--- a/Materials/Slides/slides_w2.pptx
+++ b/Materials/Slides/slides_w2.pptx
@@ -5,10 +5,10 @@
     <p:sldMasterId id="2147483660" r:id="rId1"/>
   </p:sldMasterIdLst>
   <p:notesMasterIdLst>
-    <p:notesMasterId r:id="rId41"/>
+    <p:notesMasterId r:id="rId44"/>
   </p:notesMasterIdLst>
   <p:handoutMasterIdLst>
-    <p:handoutMasterId r:id="rId42"/>
+    <p:handoutMasterId r:id="rId45"/>
   </p:handoutMasterIdLst>
   <p:sldIdLst>
     <p:sldId id="256" r:id="rId2"/>
@@ -24,32 +24,35 @@
     <p:sldId id="565" r:id="rId12"/>
     <p:sldId id="566" r:id="rId13"/>
     <p:sldId id="547" r:id="rId14"/>
-    <p:sldId id="548" r:id="rId15"/>
-    <p:sldId id="549" r:id="rId16"/>
-    <p:sldId id="550" r:id="rId17"/>
-    <p:sldId id="401" r:id="rId18"/>
-    <p:sldId id="403" r:id="rId19"/>
-    <p:sldId id="404" r:id="rId20"/>
-    <p:sldId id="405" r:id="rId21"/>
-    <p:sldId id="406" r:id="rId22"/>
-    <p:sldId id="551" r:id="rId23"/>
-    <p:sldId id="552" r:id="rId24"/>
-    <p:sldId id="553" r:id="rId25"/>
-    <p:sldId id="554" r:id="rId26"/>
-    <p:sldId id="555" r:id="rId27"/>
-    <p:sldId id="556" r:id="rId28"/>
-    <p:sldId id="557" r:id="rId29"/>
-    <p:sldId id="558" r:id="rId30"/>
-    <p:sldId id="530" r:id="rId31"/>
-    <p:sldId id="290" r:id="rId32"/>
-    <p:sldId id="559" r:id="rId33"/>
-    <p:sldId id="560" r:id="rId34"/>
-    <p:sldId id="561" r:id="rId35"/>
-    <p:sldId id="562" r:id="rId36"/>
-    <p:sldId id="563" r:id="rId37"/>
-    <p:sldId id="523" r:id="rId38"/>
-    <p:sldId id="354" r:id="rId39"/>
-    <p:sldId id="260" r:id="rId40"/>
+    <p:sldId id="567" r:id="rId15"/>
+    <p:sldId id="548" r:id="rId16"/>
+    <p:sldId id="549" r:id="rId17"/>
+    <p:sldId id="550" r:id="rId18"/>
+    <p:sldId id="401" r:id="rId19"/>
+    <p:sldId id="403" r:id="rId20"/>
+    <p:sldId id="404" r:id="rId21"/>
+    <p:sldId id="405" r:id="rId22"/>
+    <p:sldId id="406" r:id="rId23"/>
+    <p:sldId id="551" r:id="rId24"/>
+    <p:sldId id="552" r:id="rId25"/>
+    <p:sldId id="553" r:id="rId26"/>
+    <p:sldId id="554" r:id="rId27"/>
+    <p:sldId id="555" r:id="rId28"/>
+    <p:sldId id="556" r:id="rId29"/>
+    <p:sldId id="557" r:id="rId30"/>
+    <p:sldId id="558" r:id="rId31"/>
+    <p:sldId id="530" r:id="rId32"/>
+    <p:sldId id="290" r:id="rId33"/>
+    <p:sldId id="559" r:id="rId34"/>
+    <p:sldId id="560" r:id="rId35"/>
+    <p:sldId id="561" r:id="rId36"/>
+    <p:sldId id="562" r:id="rId37"/>
+    <p:sldId id="568" r:id="rId38"/>
+    <p:sldId id="569" r:id="rId39"/>
+    <p:sldId id="563" r:id="rId40"/>
+    <p:sldId id="523" r:id="rId41"/>
+    <p:sldId id="354" r:id="rId42"/>
+    <p:sldId id="260" r:id="rId43"/>
   </p:sldIdLst>
   <p:sldSz cx="12192000" cy="6858000"/>
   <p:notesSz cx="6858000" cy="9144000"/>
@@ -18496,7 +18499,7 @@
           <a:p>
             <a:fld id="{B03203E3-7C81-41A5-A697-954FF252F964}" type="datetimeFigureOut">
               <a:rPr lang="en-GB" smtClean="0"/>
-              <a:t>06/10/2026</a:t>
+              <a:t>19/10/2026</a:t>
             </a:fld>
             <a:endParaRPr lang="en-GB"/>
           </a:p>
@@ -18674,7 +18677,7 @@
           <a:p>
             <a:fld id="{00E54BCB-1937-48CE-9F00-49B381FEB4E9}" type="datetimeFigureOut">
               <a:rPr lang="en-GB" smtClean="0"/>
-              <a:t>06/10/2026</a:t>
+              <a:t>19/10/2026</a:t>
             </a:fld>
             <a:endParaRPr lang="en-GB"/>
           </a:p>
@@ -19118,7 +19121,7 @@
           <a:lstStyle/>
           <a:p>
             <a:r>
-              <a:t>Citizenship Survey 2010-11, column percentages. 3 minutes in pairs. Answers on the next slide.</a:t>
+              <a:t>What JASP shows for Worksheet 2, Exercise 1.1, with only column percentages ticked. (1) Rows hold the outcome, trust on the 0 to 10 scale. (2) Columns hold the groups. (3) Each column adds up to 100%, so the comparison runs along a row: at 7, 21.9% of men and 18.5% of women. (4) The Total column is the overall distribution. (5) Summing rows makes the pattern easier to state: 40% of men and 36% of women answered 7 or more. (6) The chi-squared test asks whether a difference this size could arise by chance: Χ² = 16.1 with 10 df, p = 0.10. Week 5 explains how to read it; the worksheet hides it.</a:t>
             </a:r>
           </a:p>
         </p:txBody>
@@ -19188,16 +19191,7 @@
           <a:lstStyle/>
           <a:p>
             <a:r>
-              <a:rPr dirty="0"/>
-              <a:t>Real data. On </a:t>
-            </a:r>
-            <a:r>
-              <a:rPr dirty="0" err="1"/>
-              <a:t>ppltrst</a:t>
-            </a:r>
-            <a:r>
-              <a:rPr dirty="0"/>
-              <a:t> the three measures disagree: mean 5.40, median 6, mode 7. More people answer above the middle of the scale than below, but a tail of very low answers (0 to 2) pulls the mean down. This mild left skew is the same mechanism as the income example, in the opposite direction.</a:t>
+              <a:t>Citizenship Survey 2010-11, column percentages. 3 minutes in pairs. Answers on the next slide.</a:t>
             </a:r>
           </a:p>
         </p:txBody>
@@ -19267,7 +19261,16 @@
           <a:lstStyle/>
           <a:p>
             <a:r>
-              <a:t>Real data rarely look like textbook curves. Age in the UK ESS sample is fairly flat from the early 30s to the late 70s, thins out at both ends, and mean and median are almost the same. Ask: why are there so few respondents under 25? (The ESS samples people aged 15+; young people are also harder to reach.)</a:t>
+              <a:rPr dirty="0"/>
+              <a:t>Real data. On </a:t>
+            </a:r>
+            <a:r>
+              <a:rPr dirty="0" err="1"/>
+              <a:t>ppltrst</a:t>
+            </a:r>
+            <a:r>
+              <a:rPr dirty="0"/>
+              <a:t> the three measures disagree: mean 5.40, median 6, mode 7. More people answer above the middle of the scale than below, but a tail of very low answers (0 to 2) pulls the mean down. This mild left skew is the same mechanism as the income example, in the opposite direction.</a:t>
             </a:r>
           </a:p>
         </p:txBody>
@@ -19337,16 +19340,7 @@
           <a:lstStyle/>
           <a:p>
             <a:r>
-              <a:rPr dirty="0"/>
-              <a:t>Synthetic example: two towns with the same mean income (£</a:t>
-            </a:r>
-            <a:r>
-              <a:rPr dirty="0" err="1"/>
-              <a:t>30k</a:t>
-            </a:r>
-            <a:r>
-              <a:rPr dirty="0"/>
-              <a:t>) but very different spread. Reporting only the average hides inequality. For sociologists, spread is often the story.</a:t>
+              <a:t>Real data rarely look like textbook curves. Age in the UK ESS sample is fairly flat from the early 30s to the late 70s, thins out at both ends, and mean and median are almost the same. Ask: why are there so few respondents under 25? (The ESS samples people aged 15+; young people are also harder to reach.)</a:t>
             </a:r>
           </a:p>
         </p:txBody>
@@ -19416,7 +19410,16 @@
           <a:lstStyle/>
           <a:p>
             <a:r>
-              <a:t>Synthetic example: five trust scores. Deviations always add up to zero, which is why we square them. We divide by n - 1 for a sample. The square root brings us back to the original units: a typical answer is about 2 points from the mean.</a:t>
+              <a:rPr dirty="0"/>
+              <a:t>Synthetic example: two towns with the same mean income (£</a:t>
+            </a:r>
+            <a:r>
+              <a:rPr dirty="0" err="1"/>
+              <a:t>30k</a:t>
+            </a:r>
+            <a:r>
+              <a:rPr dirty="0"/>
+              <a:t>) but very different spread. Reporting only the average hides inequality. For sociologists, spread is often the story.</a:t>
             </a:r>
           </a:p>
         </p:txBody>
@@ -19486,7 +19489,7 @@
           <a:lstStyle/>
           <a:p>
             <a:r>
-              <a:t>Real data. The box covers the middle half of respondents (25th to 75th percentile: 4 to 7); the line inside is the median (6). The whiskers run to the most extreme answers within 1.5 IQRs of the box, here the ends of the scale. The diamond marks the mean (5.4). In Week 2 we use box plots to compare groups.</a:t>
+              <a:t>Synthetic example: five trust scores. Deviations always add up to zero, which is why we square them. We divide by n - 1 for a sample. The square root brings us back to the original units: a typical answer is about 2 points from the mean.</a:t>
             </a:r>
           </a:p>
         </p:txBody>
@@ -19556,8 +19559,7 @@
           <a:lstStyle/>
           <a:p>
             <a:r>
-              <a:rPr dirty="0"/>
-              <a:t>ESS 0-10 trust by gender. Men score 0.27 points higher on average; the medians differ by a full point because the data are whole numbers. The bars show one standard deviation either side of each mean: the gap between groups is tiny compared with the spread within each group.</a:t>
+              <a:t>Real data. The box covers the middle half of respondents (25th to 75th percentile: 4 to 7); the line inside is the median (6). The whiskers run to the most extreme answers within 1.5 IQRs of the box, here the ends of the scale. The diamond marks the mean (5.4). In Week 2 we use box plots to compare groups.</a:t>
             </a:r>
           </a:p>
         </p:txBody>
@@ -19627,7 +19629,8 @@
           <a:lstStyle/>
           <a:p>
             <a:r>
-              <a:t>Box plots for men and women on the 0-10 scale (whiskers to the most extreme values within 1.5 IQR, here the ends of the scale). Medians differ by one point, the boxes overlap almost completely. This is what you create in Worksheet 2, Exercise 1.2.</a:t>
+              <a:rPr dirty="0"/>
+              <a:t>ESS 0-10 trust by gender. Men score 0.27 points higher on average; the medians differ by a full point because the data are whole numbers. The bars show one standard deviation either side of each mean: the gap between groups is tiny compared with the spread within each group.</a:t>
             </a:r>
           </a:p>
         </p:txBody>
@@ -19697,7 +19700,7 @@
           <a:lstStyle/>
           <a:p>
             <a:r>
-              <a:t>Synthetic example. In both panels the group means differ by exactly one point. With little spread (left) the groups barely overlap and the gap is substantial; with wide spread (right) most members of both groups look alike. The real ESS gender gap (0.27 points, SD about 2.3) is even smaller relative to its spread than the right panel.</a:t>
+              <a:t>Box plots for men and women on the 0-10 scale (whiskers to the most extreme values within 1.5 IQR, here the ends of the scale). Medians differ by one point, the boxes overlap almost completely. This is what you create in Worksheet 2, Exercise 1.2.</a:t>
             </a:r>
           </a:p>
         </p:txBody>
@@ -19828,7 +19831,7 @@
           <a:lstStyle/>
           <a:p>
             <a:r>
-              <a:t>Community Life Survey 2023-24 (England), mean trust on 0-10 by age group. Ask for one sentence. Good answers: trust is lowest among people under 35 (about 5.4 to 5.6) and rises steadily from the mid-30s to about 7 among those 75+. Note that 16-24s are not lower than 25-34s. To answer 'are young people less trusting?' we must decide which groups to compare: we return to this exact question in Week 4.</a:t>
+              <a:t>Synthetic example. In both panels the group means differ by exactly one point. With little spread (left) the groups barely overlap and the gap is substantial; with wide spread (right) most members of both groups look alike. The real ESS gender gap (0.27 points, SD about 2.3) is even smaller relative to its spread than the right panel.</a:t>
             </a:r>
           </a:p>
         </p:txBody>
@@ -19898,8 +19901,7 @@
           <a:lstStyle/>
           <a:p>
             <a:r>
-              <a:rPr dirty="0"/>
-              <a:t>Synthetic example: four samples of 80 cases. Pearson's r runs from -1 to +1. The sign gives the direction (does the cloud go up or down?) and the size gives the strength (how tightly the points hug a straight line).</a:t>
+              <a:t>Community Life Survey 2023-24 (England), mean trust on 0-10 by age group. Ask for one sentence. Good answers: trust is lowest among people under 35 (about 5.4 to 5.6) and rises steadily from the mid-30s to about 7 among those 75+. Note that 16-24s are not lower than 25-34s. To answer 'are young people less trusting?' we must decide which groups to compare: we return to this exact question in Week 4.</a:t>
             </a:r>
           </a:p>
         </p:txBody>
@@ -19970,7 +19972,7 @@
           <a:p>
             <a:r>
               <a:rPr dirty="0"/>
-              <a:t>Synthetic example: y depends very strongly on x, but the relationship is U-shaped, so Pearson's r is almost exactly zero. r measures linear association only. Always look at the scatter plot before you trust a correlation.</a:t>
+              <a:t>Synthetic example: four samples of 80 cases. Pearson's r runs from -1 to +1. The sign gives the direction (does the cloud go up or down?) and the size gives the strength (how tightly the points hug a straight line).</a:t>
             </a:r>
           </a:p>
         </p:txBody>
@@ -20019,7 +20021,7 @@
             <a:spLocks noGrp="1" noRot="1" noChangeAspect="1"/>
           </p:cNvSpPr>
           <p:nvPr>
-            <p:ph type="sldImg"/>
+            <p:ph type="sldImg" idx="2"/>
           </p:nvPr>
         </p:nvSpPr>
         <p:spPr/>
@@ -20031,7 +20033,7 @@
             <a:spLocks noGrp="1"/>
           </p:cNvSpPr>
           <p:nvPr>
-            <p:ph type="body" idx="1"/>
+            <p:ph type="body" sz="quarter" idx="3"/>
           </p:nvPr>
         </p:nvSpPr>
         <p:spPr/>
@@ -20039,7 +20041,10 @@
           <a:bodyPr/>
           <a:lstStyle/>
           <a:p>
-            <a:endParaRPr lang="en-GB" dirty="0"/>
+            <a:r>
+              <a:rPr dirty="0"/>
+              <a:t>Synthetic example: y depends very strongly on x, but the relationship is U-shaped, so Pearson's r is almost exactly zero. r measures linear association only. Always look at the scatter plot before you trust a correlation.</a:t>
+            </a:r>
           </a:p>
         </p:txBody>
       </p:sp>
@@ -20054,24 +20059,8 @@
           </p:nvPr>
         </p:nvSpPr>
         <p:spPr/>
-        <p:txBody>
-          <a:bodyPr/>
-          <a:lstStyle/>
-          <a:p>
-            <a:fld id="{18BDFEC3-8487-43E8-A154-7C12CBC1FFF2}" type="slidenum">
-              <a:rPr lang="en-US" smtClean="0"/>
-              <a:t>30</a:t>
-            </a:fld>
-            <a:endParaRPr lang="en-US"/>
-          </a:p>
-        </p:txBody>
       </p:sp>
     </p:spTree>
-    <p:extLst>
-      <p:ext uri="{BB962C8B-B14F-4D97-AF65-F5344CB8AC3E}">
-        <p14:creationId xmlns:p14="http://schemas.microsoft.com/office/powerpoint/2010/main" val="4133458937"/>
-      </p:ext>
-    </p:extLst>
   </p:cSld>
   <p:clrMapOvr>
     <a:masterClrMapping/>
@@ -20153,7 +20142,7 @@
     </p:spTree>
     <p:extLst>
       <p:ext uri="{BB962C8B-B14F-4D97-AF65-F5344CB8AC3E}">
-        <p14:creationId xmlns:p14="http://schemas.microsoft.com/office/powerpoint/2010/main" val="900853559"/>
+        <p14:creationId xmlns:p14="http://schemas.microsoft.com/office/powerpoint/2010/main" val="4133458937"/>
       </p:ext>
     </p:extLst>
   </p:cSld>
@@ -20187,7 +20176,7 @@
             <a:spLocks noGrp="1" noRot="1" noChangeAspect="1"/>
           </p:cNvSpPr>
           <p:nvPr>
-            <p:ph type="sldImg" idx="2"/>
+            <p:ph type="sldImg"/>
           </p:nvPr>
         </p:nvSpPr>
         <p:spPr/>
@@ -20199,7 +20188,7 @@
             <a:spLocks noGrp="1"/>
           </p:cNvSpPr>
           <p:nvPr>
-            <p:ph type="body" sz="quarter" idx="3"/>
+            <p:ph type="body" idx="1"/>
           </p:nvPr>
         </p:nvSpPr>
         <p:spPr/>
@@ -20207,9 +20196,7 @@
           <a:bodyPr/>
           <a:lstStyle/>
           <a:p>
-            <a:r>
-              <a:t>Worksheet 2, Exercise 3: the data behind Figure 4.1 in Wilkinson and Pickett. Each dot is a country. Trust is the percentage who say most people can be trusted; inequality is how many times more income the richest fifth receives than the poorest fifth. The correlation is -0.66: strong and negative. Portugal and Singapore sit low right; the Nordic countries high left.</a:t>
-            </a:r>
+            <a:endParaRPr lang="en-GB" dirty="0"/>
           </a:p>
         </p:txBody>
       </p:sp>
@@ -20224,8 +20211,24 @@
           </p:nvPr>
         </p:nvSpPr>
         <p:spPr/>
+        <p:txBody>
+          <a:bodyPr/>
+          <a:lstStyle/>
+          <a:p>
+            <a:fld id="{18BDFEC3-8487-43E8-A154-7C12CBC1FFF2}" type="slidenum">
+              <a:rPr lang="en-US" smtClean="0"/>
+              <a:t>32</a:t>
+            </a:fld>
+            <a:endParaRPr lang="en-US"/>
+          </a:p>
+        </p:txBody>
       </p:sp>
     </p:spTree>
+    <p:extLst>
+      <p:ext uri="{BB962C8B-B14F-4D97-AF65-F5344CB8AC3E}">
+        <p14:creationId xmlns:p14="http://schemas.microsoft.com/office/powerpoint/2010/main" val="900853559"/>
+      </p:ext>
+    </p:extLst>
   </p:cSld>
   <p:clrMapOvr>
     <a:masterClrMapping/>
@@ -20278,7 +20281,7 @@
           <a:lstStyle/>
           <a:p>
             <a:r>
-              <a:t>Worksheet 2, Exercise 3b: the 2024 update (Pickett et al.) covers 43 countries, including middle-income countries such as Brazil, India and China. With the Gini coefficient the correlation is moderate. With the quintile ratio it almost disappears, because of one country: China combines very high measured inequality (ratio 28) with high measured trust. Removing it brings r back to about -0.6. One case can change a correlation; and when a dataset adds very different countries, we are no longer studying the same population.</a:t>
+              <a:t>Worksheet 2, Exercise 3: the data behind Figure 4.1 in Wilkinson and Pickett. Each dot is a country. Trust is the percentage who say most people can be trusted; inequality is how many times more income the richest fifth receives than the poorest fifth. The correlation is -0.66: strong and negative. Portugal and Singapore sit low right; the Nordic countries high left.</a:t>
             </a:r>
           </a:p>
         </p:txBody>
@@ -20348,7 +20351,7 @@
           <a:lstStyle/>
           <a:p>
             <a:r>
-              <a:t>All correlations with Trust in the 23-country Spirit Level data. Inequality stands out. Remember these are country-level associations: they say nothing directly about whether unequal individuals trust less (the ecological fallacy).</a:t>
+              <a:t>Worksheet 2, Exercise 3b: the 2024 update (Pickett et al.) covers 43 countries, including middle-income countries such as Brazil, India and China. With the Gini coefficient the correlation is moderate. With the quintile ratio it almost disappears, because of one country: China combines very high measured inequality (ratio 28) with high measured trust. Removing it brings r back to about -0.6. One case can change a correlation; and when a dataset adds very different countries, we are no longer studying the same population.</a:t>
             </a:r>
           </a:p>
         </p:txBody>
@@ -20418,7 +20421,7 @@
           <a:lstStyle/>
           <a:p>
             <a:r>
-              <a:t>Three explanations for the same correlation. A: Wilkinson and Pickett's argument: inequality widens social distance and status competition, which erodes trust. B: trusting societies are more willing to support redistribution and welfare states, which reduce inequality. C: something else drives both, e.g. long histories of strong institutions, or religious traditions (Delhey &amp; Newton, Week 3). A correlation alone cannot tell them apart. Next week, regression lets us adjust for some third factors.</a:t>
+              <a:t>All correlations with Trust in the 23-country Spirit Level data. Inequality stands out. Remember these are country-level associations: they say nothing directly about whether unequal individuals trust less (the ecological fallacy).</a:t>
             </a:r>
           </a:p>
         </p:txBody>
@@ -20467,7 +20470,7 @@
             <a:spLocks noGrp="1" noRot="1" noChangeAspect="1"/>
           </p:cNvSpPr>
           <p:nvPr>
-            <p:ph type="sldImg"/>
+            <p:ph type="sldImg" idx="2"/>
           </p:nvPr>
         </p:nvSpPr>
         <p:spPr/>
@@ -20479,7 +20482,7 @@
             <a:spLocks noGrp="1"/>
           </p:cNvSpPr>
           <p:nvPr>
-            <p:ph type="body" idx="1"/>
+            <p:ph type="body" sz="quarter" idx="3"/>
           </p:nvPr>
         </p:nvSpPr>
         <p:spPr/>
@@ -20487,16 +20490,25 @@
           <a:bodyPr/>
           <a:lstStyle/>
           <a:p>
-            <a:endParaRPr lang="en-GB" dirty="0"/>
-          </a:p>
-        </p:txBody>
+            <a:r>
+              <a:t>Three explanations for the same correlation. A: Wilkinson and Pickett's argument: inequality widens social distance and status competition, which erodes trust. B: trusting societies are more willing to support redistribution and welfare states, which reduce inequality. C: something else drives both, e.g. long histories of strong institutions, or religious traditions (Delhey &amp; Newton, Week 3). A correlation alone cannot tell them apart. Next week, regression lets us adjust for some third factors.</a:t>
+            </a:r>
+          </a:p>
+        </p:txBody>
+      </p:sp>
+      <p:sp>
+        <p:nvSpPr>
+          <p:cNvPr id="4" name="Slide Number Placeholder 3"/>
+          <p:cNvSpPr>
+            <a:spLocks noGrp="1"/>
+          </p:cNvSpPr>
+          <p:nvPr>
+            <p:ph type="sldNum" sz="quarter" idx="5"/>
+          </p:nvPr>
+        </p:nvSpPr>
+        <p:spPr/>
       </p:sp>
     </p:spTree>
-    <p:extLst>
-      <p:ext uri="{BB962C8B-B14F-4D97-AF65-F5344CB8AC3E}">
-        <p14:creationId xmlns:p14="http://schemas.microsoft.com/office/powerpoint/2010/main" val="957270204"/>
-      </p:ext>
-    </p:extLst>
   </p:cSld>
   <p:clrMapOvr>
     <a:masterClrMapping/>
@@ -20575,6 +20587,207 @@
 </file>
 
 <file path=ppt/notesSlides/notesSlide30.xml><?xml version="1.0" encoding="utf-8"?>
+<p:notes xmlns:a="http://schemas.openxmlformats.org/drawingml/2006/main" xmlns:r="http://schemas.openxmlformats.org/officeDocument/2006/relationships" xmlns:p="http://schemas.openxmlformats.org/presentationml/2006/main">
+  <p:cSld>
+    <p:spTree>
+      <p:nvGrpSpPr>
+        <p:cNvPr id="1" name=""/>
+        <p:cNvGrpSpPr/>
+        <p:nvPr/>
+      </p:nvGrpSpPr>
+      <p:grpSpPr>
+        <a:xfrm>
+          <a:off x="0" y="0"/>
+          <a:ext cx="0" cy="0"/>
+          <a:chOff x="0" y="0"/>
+          <a:chExt cx="0" cy="0"/>
+        </a:xfrm>
+      </p:grpSpPr>
+      <p:sp>
+        <p:nvSpPr>
+          <p:cNvPr id="2" name="Slide Image Placeholder 1"/>
+          <p:cNvSpPr>
+            <a:spLocks noGrp="1" noRot="1" noChangeAspect="1"/>
+          </p:cNvSpPr>
+          <p:nvPr>
+            <p:ph type="sldImg" idx="2"/>
+          </p:nvPr>
+        </p:nvSpPr>
+        <p:spPr/>
+      </p:sp>
+      <p:sp>
+        <p:nvSpPr>
+          <p:cNvPr id="3" name="Notes Placeholder 2"/>
+          <p:cNvSpPr>
+            <a:spLocks noGrp="1"/>
+          </p:cNvSpPr>
+          <p:nvPr>
+            <p:ph type="body" sz="quarter" idx="3"/>
+          </p:nvPr>
+        </p:nvSpPr>
+        <p:spPr/>
+        <p:txBody>
+          <a:bodyPr/>
+          <a:lstStyle/>
+          <a:p>
+            <a:r>
+              <a:t>Three comparisons from the lecture written up as they might appear in the assignment: percentages within groups, a difference in means set against the spread, and a correlation with its direction and strength.</a:t>
+            </a:r>
+          </a:p>
+        </p:txBody>
+      </p:sp>
+      <p:sp>
+        <p:nvSpPr>
+          <p:cNvPr id="4" name="Slide Number Placeholder 3"/>
+          <p:cNvSpPr>
+            <a:spLocks noGrp="1"/>
+          </p:cNvSpPr>
+          <p:nvPr>
+            <p:ph type="sldNum" sz="quarter" idx="5"/>
+          </p:nvPr>
+        </p:nvSpPr>
+        <p:spPr/>
+      </p:sp>
+    </p:spTree>
+  </p:cSld>
+  <p:clrMapOvr>
+    <a:masterClrMapping/>
+  </p:clrMapOvr>
+</p:notes>
+</file>
+
+<file path=ppt/notesSlides/notesSlide31.xml><?xml version="1.0" encoding="utf-8"?>
+<p:notes xmlns:a="http://schemas.openxmlformats.org/drawingml/2006/main" xmlns:r="http://schemas.openxmlformats.org/officeDocument/2006/relationships" xmlns:p="http://schemas.openxmlformats.org/presentationml/2006/main">
+  <p:cSld>
+    <p:spTree>
+      <p:nvGrpSpPr>
+        <p:cNvPr id="1" name=""/>
+        <p:cNvGrpSpPr/>
+        <p:nvPr/>
+      </p:nvGrpSpPr>
+      <p:grpSpPr>
+        <a:xfrm>
+          <a:off x="0" y="0"/>
+          <a:ext cx="0" cy="0"/>
+          <a:chOff x="0" y="0"/>
+          <a:chExt cx="0" cy="0"/>
+        </a:xfrm>
+      </p:grpSpPr>
+      <p:sp>
+        <p:nvSpPr>
+          <p:cNvPr id="2" name="Slide Image Placeholder 1"/>
+          <p:cNvSpPr>
+            <a:spLocks noGrp="1" noRot="1" noChangeAspect="1"/>
+          </p:cNvSpPr>
+          <p:nvPr>
+            <p:ph type="sldImg" idx="2"/>
+          </p:nvPr>
+        </p:nvSpPr>
+        <p:spPr/>
+      </p:sp>
+      <p:sp>
+        <p:nvSpPr>
+          <p:cNvPr id="3" name="Notes Placeholder 2"/>
+          <p:cNvSpPr>
+            <a:spLocks noGrp="1"/>
+          </p:cNvSpPr>
+          <p:nvPr>
+            <p:ph type="body" sz="quarter" idx="3"/>
+          </p:nvPr>
+        </p:nvSpPr>
+        <p:spPr/>
+        <p:txBody>
+          <a:bodyPr/>
+          <a:lstStyle/>
+          <a:p>
+            <a:r>
+              <a:t>The Week 2 Interactive Explorer page (https://cgmoreh.github.io/SOC2069-QUANT-26/Materials/Explorers/explorer_w2.html) has interactive versions of ideas from this lecture. Students can scan the code or follow the link from the course site and try the three tasks on the slide.</a:t>
+            </a:r>
+          </a:p>
+        </p:txBody>
+      </p:sp>
+      <p:sp>
+        <p:nvSpPr>
+          <p:cNvPr id="4" name="Slide Number Placeholder 3"/>
+          <p:cNvSpPr>
+            <a:spLocks noGrp="1"/>
+          </p:cNvSpPr>
+          <p:nvPr>
+            <p:ph type="sldNum" sz="quarter" idx="5"/>
+          </p:nvPr>
+        </p:nvSpPr>
+        <p:spPr/>
+      </p:sp>
+    </p:spTree>
+  </p:cSld>
+  <p:clrMapOvr>
+    <a:masterClrMapping/>
+  </p:clrMapOvr>
+</p:notes>
+</file>
+
+<file path=ppt/notesSlides/notesSlide32.xml><?xml version="1.0" encoding="utf-8"?>
+<p:notes xmlns:a="http://schemas.openxmlformats.org/drawingml/2006/main" xmlns:r="http://schemas.openxmlformats.org/officeDocument/2006/relationships" xmlns:p="http://schemas.openxmlformats.org/presentationml/2006/main">
+  <p:cSld>
+    <p:spTree>
+      <p:nvGrpSpPr>
+        <p:cNvPr id="1" name=""/>
+        <p:cNvGrpSpPr/>
+        <p:nvPr/>
+      </p:nvGrpSpPr>
+      <p:grpSpPr>
+        <a:xfrm>
+          <a:off x="0" y="0"/>
+          <a:ext cx="0" cy="0"/>
+          <a:chOff x="0" y="0"/>
+          <a:chExt cx="0" cy="0"/>
+        </a:xfrm>
+      </p:grpSpPr>
+      <p:sp>
+        <p:nvSpPr>
+          <p:cNvPr id="2" name="Slide Image Placeholder 1"/>
+          <p:cNvSpPr>
+            <a:spLocks noGrp="1" noRot="1" noChangeAspect="1"/>
+          </p:cNvSpPr>
+          <p:nvPr>
+            <p:ph type="sldImg"/>
+          </p:nvPr>
+        </p:nvSpPr>
+        <p:spPr/>
+      </p:sp>
+      <p:sp>
+        <p:nvSpPr>
+          <p:cNvPr id="3" name="Notes Placeholder 2"/>
+          <p:cNvSpPr>
+            <a:spLocks noGrp="1"/>
+          </p:cNvSpPr>
+          <p:nvPr>
+            <p:ph type="body" idx="1"/>
+          </p:nvPr>
+        </p:nvSpPr>
+        <p:spPr/>
+        <p:txBody>
+          <a:bodyPr/>
+          <a:lstStyle/>
+          <a:p>
+            <a:endParaRPr lang="en-GB" dirty="0"/>
+          </a:p>
+        </p:txBody>
+      </p:sp>
+    </p:spTree>
+    <p:extLst>
+      <p:ext uri="{BB962C8B-B14F-4D97-AF65-F5344CB8AC3E}">
+        <p14:creationId xmlns:p14="http://schemas.microsoft.com/office/powerpoint/2010/main" val="957270204"/>
+      </p:ext>
+    </p:extLst>
+  </p:cSld>
+  <p:clrMapOvr>
+    <a:masterClrMapping/>
+  </p:clrMapOvr>
+</p:notes>
+</file>
+
+<file path=ppt/notesSlides/notesSlide33.xml><?xml version="1.0" encoding="utf-8"?>
 <p:notes xmlns:a="http://schemas.openxmlformats.org/drawingml/2006/main" xmlns:r="http://schemas.openxmlformats.org/officeDocument/2006/relationships" xmlns:p="http://schemas.openxmlformats.org/presentationml/2006/main">
   <p:cSld>
     <p:spTree>
@@ -28682,6 +28895,13 @@
             <a:schemeClr val="lt1"/>
           </a:fontRef>
         </p:style>
+        <p:txBody>
+          <a:bodyPr/>
+          <a:lstStyle/>
+          <a:p>
+            <a:endParaRPr lang="en-GB"/>
+          </a:p>
+        </p:txBody>
       </p:sp>
       <p:sp>
         <p:nvSpPr>
@@ -28720,6 +28940,13 @@
             <a:schemeClr val="lt1"/>
           </a:fontRef>
         </p:style>
+        <p:txBody>
+          <a:bodyPr/>
+          <a:lstStyle/>
+          <a:p>
+            <a:endParaRPr lang="en-GB"/>
+          </a:p>
+        </p:txBody>
       </p:sp>
       <p:sp>
         <p:nvSpPr>
@@ -35756,6 +35983,3352 @@
 <file path=ppt/slides/slide14.xml><?xml version="1.0" encoding="utf-8"?>
 <p:sld xmlns:a="http://schemas.openxmlformats.org/drawingml/2006/main" xmlns:r="http://schemas.openxmlformats.org/officeDocument/2006/relationships" xmlns:p="http://schemas.openxmlformats.org/presentationml/2006/main">
   <p:cSld>
+    <p:spTree>
+      <p:nvGrpSpPr>
+        <p:cNvPr id="1" name=""/>
+        <p:cNvGrpSpPr/>
+        <p:nvPr/>
+      </p:nvGrpSpPr>
+      <p:grpSpPr>
+        <a:xfrm>
+          <a:off x="0" y="0"/>
+          <a:ext cx="0" cy="0"/>
+          <a:chOff x="0" y="0"/>
+          <a:chExt cx="0" cy="0"/>
+        </a:xfrm>
+      </p:grpSpPr>
+      <p:sp>
+        <p:nvSpPr>
+          <p:cNvPr id="2" name="Title 1"/>
+          <p:cNvSpPr>
+            <a:spLocks noGrp="1"/>
+          </p:cNvSpPr>
+          <p:nvPr>
+            <p:ph type="title"/>
+          </p:nvPr>
+        </p:nvSpPr>
+        <p:spPr/>
+        <p:txBody>
+          <a:bodyPr/>
+          <a:lstStyle/>
+          <a:p>
+            <a:r>
+              <a:t>Reading the JASP output: contingency table</a:t>
+            </a:r>
+          </a:p>
+        </p:txBody>
+      </p:sp>
+      <p:sp>
+        <p:nvSpPr>
+          <p:cNvPr id="3" name="Date Placeholder 1">
+            <a:extLst>
+              <a:ext uri="{FF2B5EF4-FFF2-40B4-BE49-F238E27FC236}">
+                <a16:creationId xmlns:a16="http://schemas.microsoft.com/office/drawing/2014/main" id="{BFF50875-77B6-7B50-6789-FC1B56491CC3}"/>
+              </a:ext>
+            </a:extLst>
+          </p:cNvPr>
+          <p:cNvSpPr>
+            <a:spLocks noGrp="1"/>
+          </p:cNvSpPr>
+          <p:nvPr>
+            <p:ph type="dt" sz="half" idx="10"/>
+          </p:nvPr>
+        </p:nvSpPr>
+        <p:spPr/>
+        <p:txBody>
+          <a:bodyPr/>
+          <a:lstStyle/>
+          <a:p>
+            <a:fld id="{FA72AB8D-F27B-45C4-A3C3-1397CC759085}" type="datetimeyyyy">
+              <a:rPr lang="en-US" smtClean="0"/>
+              <a:t>2026</a:t>
+            </a:fld>
+            <a:endParaRPr lang="en-GB"/>
+          </a:p>
+        </p:txBody>
+      </p:sp>
+      <p:sp>
+        <p:nvSpPr>
+          <p:cNvPr id="5" name="Footer Placeholder 4">
+            <a:extLst>
+              <a:ext uri="{FF2B5EF4-FFF2-40B4-BE49-F238E27FC236}">
+                <a16:creationId xmlns:a16="http://schemas.microsoft.com/office/drawing/2014/main" id="{DE0B2AC9-C062-ACDA-78EB-2E5B2DF3BA3F}"/>
+              </a:ext>
+            </a:extLst>
+          </p:cNvPr>
+          <p:cNvSpPr>
+            <a:spLocks noGrp="1"/>
+          </p:cNvSpPr>
+          <p:nvPr>
+            <p:ph type="ftr" sz="quarter" idx="11"/>
+          </p:nvPr>
+        </p:nvSpPr>
+        <p:spPr/>
+        <p:txBody>
+          <a:bodyPr/>
+          <a:lstStyle/>
+          <a:p>
+            <a:r>
+              <a:rPr lang="en-GB"/>
+              <a:t>Comparisons and Associations</a:t>
+            </a:r>
+          </a:p>
+        </p:txBody>
+      </p:sp>
+      <p:sp>
+        <p:nvSpPr>
+          <p:cNvPr id="6" name="Slide Number Placeholder 5">
+            <a:extLst>
+              <a:ext uri="{FF2B5EF4-FFF2-40B4-BE49-F238E27FC236}">
+                <a16:creationId xmlns:a16="http://schemas.microsoft.com/office/drawing/2014/main" id="{63AA58D7-3FC7-1868-4188-EE9D3329FE70}"/>
+              </a:ext>
+            </a:extLst>
+          </p:cNvPr>
+          <p:cNvSpPr>
+            <a:spLocks noGrp="1"/>
+          </p:cNvSpPr>
+          <p:nvPr>
+            <p:ph type="sldNum" sz="quarter" idx="12"/>
+          </p:nvPr>
+        </p:nvSpPr>
+        <p:spPr/>
+        <p:txBody>
+          <a:bodyPr/>
+          <a:lstStyle/>
+          <a:p>
+            <a:fld id="{9FAA51BB-2FC0-4DB8-B50E-F52D50E733B6}" type="slidenum">
+              <a:rPr lang="en-GB" smtClean="0"/>
+              <a:t>14</a:t>
+            </a:fld>
+            <a:endParaRPr lang="en-GB"/>
+          </a:p>
+        </p:txBody>
+      </p:sp>
+      <p:sp>
+        <p:nvSpPr>
+          <p:cNvPr id="7" name="TextBox 6"/>
+          <p:cNvSpPr txBox="1"/>
+          <p:nvPr/>
+        </p:nvSpPr>
+        <p:spPr>
+          <a:xfrm>
+            <a:off x="758952" y="1261872"/>
+            <a:ext cx="5623559" cy="274320"/>
+          </a:xfrm>
+          <a:prstGeom prst="rect">
+            <a:avLst/>
+          </a:prstGeom>
+          <a:noFill/>
+        </p:spPr>
+        <p:txBody>
+          <a:bodyPr wrap="square" lIns="0" tIns="0" rIns="0" bIns="0" anchor="t">
+            <a:spAutoFit/>
+          </a:bodyPr>
+          <a:lstStyle/>
+          <a:p>
+            <a:pPr algn="l"/>
+            <a:r>
+              <a:rPr sz="1400" b="1" i="0">
+                <a:solidFill>
+                  <a:srgbClr val="222222"/>
+                </a:solidFill>
+              </a:rPr>
+              <a:t>Contingency Tables</a:t>
+            </a:r>
+            <a:endParaRPr sz="1400"/>
+          </a:p>
+        </p:txBody>
+      </p:sp>
+      <p:graphicFrame>
+        <p:nvGraphicFramePr>
+          <p:cNvPr id="8" name="Table 7"/>
+          <p:cNvGraphicFramePr>
+            <a:graphicFrameLocks noGrp="1"/>
+          </p:cNvGraphicFramePr>
+          <p:nvPr/>
+        </p:nvGraphicFramePr>
+        <p:xfrm>
+          <a:off x="758952" y="1563624"/>
+          <a:ext cx="5623560" cy="3447288"/>
+        </p:xfrm>
+        <a:graphic>
+          <a:graphicData uri="http://schemas.openxmlformats.org/drawingml/2006/table">
+            <a:tbl>
+              <a:tblPr>
+                <a:tableStyleId>{2D5ABB26-0587-4C30-8999-92F81FD0307C}</a:tableStyleId>
+              </a:tblPr>
+              <a:tblGrid>
+                <a:gridCol w="2331720">
+                  <a:extLst>
+                    <a:ext uri="{9D8B030D-6E8A-4147-A177-3AD203B41FA5}">
+                      <a16:colId xmlns:a16="http://schemas.microsoft.com/office/drawing/2014/main" val="20000"/>
+                    </a:ext>
+                  </a:extLst>
+                </a:gridCol>
+                <a:gridCol w="1097280">
+                  <a:extLst>
+                    <a:ext uri="{9D8B030D-6E8A-4147-A177-3AD203B41FA5}">
+                      <a16:colId xmlns:a16="http://schemas.microsoft.com/office/drawing/2014/main" val="20001"/>
+                    </a:ext>
+                  </a:extLst>
+                </a:gridCol>
+                <a:gridCol w="1097280">
+                  <a:extLst>
+                    <a:ext uri="{9D8B030D-6E8A-4147-A177-3AD203B41FA5}">
+                      <a16:colId xmlns:a16="http://schemas.microsoft.com/office/drawing/2014/main" val="20002"/>
+                    </a:ext>
+                  </a:extLst>
+                </a:gridCol>
+                <a:gridCol w="1097280">
+                  <a:extLst>
+                    <a:ext uri="{9D8B030D-6E8A-4147-A177-3AD203B41FA5}">
+                      <a16:colId xmlns:a16="http://schemas.microsoft.com/office/drawing/2014/main" val="20003"/>
+                    </a:ext>
+                  </a:extLst>
+                </a:gridCol>
+              </a:tblGrid>
+              <a:tr h="265176">
+                <a:tc>
+                  <a:txBody>
+                    <a:bodyPr/>
+                    <a:lstStyle/>
+                    <a:p>
+                      <a:pPr algn="l"/>
+                      <a:r>
+                        <a:rPr sz="1200" b="1" i="0">
+                          <a:solidFill>
+                            <a:srgbClr val="222222"/>
+                          </a:solidFill>
+                        </a:rPr>
+                        <a:t>ppltrst</a:t>
+                      </a:r>
+                      <a:endParaRPr sz="1200"/>
+                    </a:p>
+                  </a:txBody>
+                  <a:tcPr marL="73152" marR="73152" marT="27432" marB="27432" anchor="ctr">
+                    <a:lnL w="0">
+                      <a:noFill/>
+                    </a:lnL>
+                    <a:lnR w="0">
+                      <a:noFill/>
+                    </a:lnR>
+                    <a:lnT w="12700">
+                      <a:solidFill>
+                        <a:srgbClr val="222222"/>
+                      </a:solidFill>
+                    </a:lnT>
+                    <a:lnB w="9525">
+                      <a:solidFill>
+                        <a:srgbClr val="222222"/>
+                      </a:solidFill>
+                    </a:lnB>
+                    <a:noFill/>
+                  </a:tcPr>
+                </a:tc>
+                <a:tc>
+                  <a:txBody>
+                    <a:bodyPr/>
+                    <a:lstStyle/>
+                    <a:p>
+                      <a:pPr algn="r"/>
+                      <a:r>
+                        <a:rPr sz="1200" b="1" i="0">
+                          <a:solidFill>
+                            <a:srgbClr val="222222"/>
+                          </a:solidFill>
+                        </a:rPr>
+                        <a:t>Male</a:t>
+                      </a:r>
+                      <a:endParaRPr sz="1200"/>
+                    </a:p>
+                  </a:txBody>
+                  <a:tcPr marL="73152" marR="73152" marT="27432" marB="27432" anchor="ctr">
+                    <a:lnL w="0">
+                      <a:noFill/>
+                    </a:lnL>
+                    <a:lnR w="0">
+                      <a:noFill/>
+                    </a:lnR>
+                    <a:lnT w="12700">
+                      <a:solidFill>
+                        <a:srgbClr val="222222"/>
+                      </a:solidFill>
+                    </a:lnT>
+                    <a:lnB w="9525">
+                      <a:solidFill>
+                        <a:srgbClr val="222222"/>
+                      </a:solidFill>
+                    </a:lnB>
+                    <a:noFill/>
+                  </a:tcPr>
+                </a:tc>
+                <a:tc>
+                  <a:txBody>
+                    <a:bodyPr/>
+                    <a:lstStyle/>
+                    <a:p>
+                      <a:pPr algn="r"/>
+                      <a:r>
+                        <a:rPr sz="1200" b="1" i="0">
+                          <a:solidFill>
+                            <a:srgbClr val="222222"/>
+                          </a:solidFill>
+                        </a:rPr>
+                        <a:t>Female</a:t>
+                      </a:r>
+                      <a:endParaRPr sz="1200"/>
+                    </a:p>
+                  </a:txBody>
+                  <a:tcPr marL="73152" marR="73152" marT="27432" marB="27432" anchor="ctr">
+                    <a:lnL w="0">
+                      <a:noFill/>
+                    </a:lnL>
+                    <a:lnR w="0">
+                      <a:noFill/>
+                    </a:lnR>
+                    <a:lnT w="12700">
+                      <a:solidFill>
+                        <a:srgbClr val="222222"/>
+                      </a:solidFill>
+                    </a:lnT>
+                    <a:lnB w="9525">
+                      <a:solidFill>
+                        <a:srgbClr val="222222"/>
+                      </a:solidFill>
+                    </a:lnB>
+                    <a:noFill/>
+                  </a:tcPr>
+                </a:tc>
+                <a:tc>
+                  <a:txBody>
+                    <a:bodyPr/>
+                    <a:lstStyle/>
+                    <a:p>
+                      <a:pPr algn="r"/>
+                      <a:r>
+                        <a:rPr sz="1200" b="1" i="0">
+                          <a:solidFill>
+                            <a:srgbClr val="222222"/>
+                          </a:solidFill>
+                        </a:rPr>
+                        <a:t>Total</a:t>
+                      </a:r>
+                      <a:endParaRPr sz="1200"/>
+                    </a:p>
+                  </a:txBody>
+                  <a:tcPr marL="73152" marR="73152" marT="27432" marB="27432" anchor="ctr">
+                    <a:lnL w="0">
+                      <a:noFill/>
+                    </a:lnL>
+                    <a:lnR w="0">
+                      <a:noFill/>
+                    </a:lnR>
+                    <a:lnT w="12700">
+                      <a:solidFill>
+                        <a:srgbClr val="222222"/>
+                      </a:solidFill>
+                    </a:lnT>
+                    <a:lnB w="9525">
+                      <a:solidFill>
+                        <a:srgbClr val="222222"/>
+                      </a:solidFill>
+                    </a:lnB>
+                    <a:noFill/>
+                  </a:tcPr>
+                </a:tc>
+                <a:extLst>
+                  <a:ext uri="{0D108BD9-81ED-4DB2-BD59-A6C34878D82A}">
+                    <a16:rowId xmlns:a16="http://schemas.microsoft.com/office/drawing/2014/main" val="10000"/>
+                  </a:ext>
+                </a:extLst>
+              </a:tr>
+              <a:tr h="265176">
+                <a:tc>
+                  <a:txBody>
+                    <a:bodyPr/>
+                    <a:lstStyle/>
+                    <a:p>
+                      <a:pPr algn="l"/>
+                      <a:r>
+                        <a:rPr sz="1200" b="0" i="0">
+                          <a:solidFill>
+                            <a:srgbClr val="222222"/>
+                          </a:solidFill>
+                        </a:rPr>
+                        <a:t>You can’t be too careful</a:t>
+                      </a:r>
+                      <a:endParaRPr sz="1200"/>
+                    </a:p>
+                  </a:txBody>
+                  <a:tcPr marL="73152" marR="73152" marT="27432" marB="27432" anchor="ctr">
+                    <a:lnL w="0">
+                      <a:noFill/>
+                    </a:lnL>
+                    <a:lnR w="0">
+                      <a:noFill/>
+                    </a:lnR>
+                    <a:lnT w="9525" cap="flat" cmpd="sng" algn="ctr">
+                      <a:solidFill>
+                        <a:srgbClr val="222222"/>
+                      </a:solidFill>
+                      <a:prstDash val="solid"/>
+                      <a:round/>
+                      <a:headEnd type="none" w="med" len="med"/>
+                      <a:tailEnd type="none" w="med" len="med"/>
+                    </a:lnT>
+                    <a:lnB w="0">
+                      <a:noFill/>
+                    </a:lnB>
+                    <a:noFill/>
+                  </a:tcPr>
+                </a:tc>
+                <a:tc>
+                  <a:txBody>
+                    <a:bodyPr/>
+                    <a:lstStyle/>
+                    <a:p>
+                      <a:pPr algn="r"/>
+                      <a:r>
+                        <a:rPr sz="1200" b="0" i="0">
+                          <a:solidFill>
+                            <a:srgbClr val="222222"/>
+                          </a:solidFill>
+                        </a:rPr>
+                        <a:t>3.4 %</a:t>
+                      </a:r>
+                      <a:endParaRPr sz="1200"/>
+                    </a:p>
+                  </a:txBody>
+                  <a:tcPr marL="73152" marR="73152" marT="27432" marB="27432" anchor="ctr">
+                    <a:lnL w="0">
+                      <a:noFill/>
+                    </a:lnL>
+                    <a:lnR w="0">
+                      <a:noFill/>
+                    </a:lnR>
+                    <a:lnT w="9525" cap="flat" cmpd="sng" algn="ctr">
+                      <a:solidFill>
+                        <a:srgbClr val="222222"/>
+                      </a:solidFill>
+                      <a:prstDash val="solid"/>
+                      <a:round/>
+                      <a:headEnd type="none" w="med" len="med"/>
+                      <a:tailEnd type="none" w="med" len="med"/>
+                    </a:lnT>
+                    <a:lnB w="0">
+                      <a:noFill/>
+                    </a:lnB>
+                    <a:noFill/>
+                  </a:tcPr>
+                </a:tc>
+                <a:tc>
+                  <a:txBody>
+                    <a:bodyPr/>
+                    <a:lstStyle/>
+                    <a:p>
+                      <a:pPr algn="r"/>
+                      <a:r>
+                        <a:rPr sz="1200" b="0" i="0">
+                          <a:solidFill>
+                            <a:srgbClr val="222222"/>
+                          </a:solidFill>
+                        </a:rPr>
+                        <a:t>3.6 %</a:t>
+                      </a:r>
+                      <a:endParaRPr sz="1200"/>
+                    </a:p>
+                  </a:txBody>
+                  <a:tcPr marL="73152" marR="73152" marT="27432" marB="27432" anchor="ctr">
+                    <a:lnL w="0">
+                      <a:noFill/>
+                    </a:lnL>
+                    <a:lnR w="0">
+                      <a:noFill/>
+                    </a:lnR>
+                    <a:lnT w="9525" cap="flat" cmpd="sng" algn="ctr">
+                      <a:solidFill>
+                        <a:srgbClr val="222222"/>
+                      </a:solidFill>
+                      <a:prstDash val="solid"/>
+                      <a:round/>
+                      <a:headEnd type="none" w="med" len="med"/>
+                      <a:tailEnd type="none" w="med" len="med"/>
+                    </a:lnT>
+                    <a:lnB w="0">
+                      <a:noFill/>
+                    </a:lnB>
+                    <a:noFill/>
+                  </a:tcPr>
+                </a:tc>
+                <a:tc>
+                  <a:txBody>
+                    <a:bodyPr/>
+                    <a:lstStyle/>
+                    <a:p>
+                      <a:pPr algn="r"/>
+                      <a:r>
+                        <a:rPr sz="1200" b="0" i="0">
+                          <a:solidFill>
+                            <a:srgbClr val="222222"/>
+                          </a:solidFill>
+                        </a:rPr>
+                        <a:t>3.5 %</a:t>
+                      </a:r>
+                      <a:endParaRPr sz="1200"/>
+                    </a:p>
+                  </a:txBody>
+                  <a:tcPr marL="73152" marR="73152" marT="27432" marB="27432" anchor="ctr">
+                    <a:lnL w="0">
+                      <a:noFill/>
+                    </a:lnL>
+                    <a:lnR w="0">
+                      <a:noFill/>
+                    </a:lnR>
+                    <a:lnT w="9525" cap="flat" cmpd="sng" algn="ctr">
+                      <a:solidFill>
+                        <a:srgbClr val="222222"/>
+                      </a:solidFill>
+                      <a:prstDash val="solid"/>
+                      <a:round/>
+                      <a:headEnd type="none" w="med" len="med"/>
+                      <a:tailEnd type="none" w="med" len="med"/>
+                    </a:lnT>
+                    <a:lnB w="0">
+                      <a:noFill/>
+                    </a:lnB>
+                    <a:noFill/>
+                  </a:tcPr>
+                </a:tc>
+                <a:extLst>
+                  <a:ext uri="{0D108BD9-81ED-4DB2-BD59-A6C34878D82A}">
+                    <a16:rowId xmlns:a16="http://schemas.microsoft.com/office/drawing/2014/main" val="10001"/>
+                  </a:ext>
+                </a:extLst>
+              </a:tr>
+              <a:tr h="265176">
+                <a:tc>
+                  <a:txBody>
+                    <a:bodyPr/>
+                    <a:lstStyle/>
+                    <a:p>
+                      <a:pPr algn="l"/>
+                      <a:r>
+                        <a:rPr sz="1200" b="0" i="0">
+                          <a:solidFill>
+                            <a:srgbClr val="222222"/>
+                          </a:solidFill>
+                        </a:rPr>
+                        <a:t>1</a:t>
+                      </a:r>
+                      <a:endParaRPr sz="1200"/>
+                    </a:p>
+                  </a:txBody>
+                  <a:tcPr marL="73152" marR="73152" marT="27432" marB="27432" anchor="ctr">
+                    <a:lnL w="0">
+                      <a:noFill/>
+                    </a:lnL>
+                    <a:lnR w="0">
+                      <a:noFill/>
+                    </a:lnR>
+                    <a:lnT w="0">
+                      <a:noFill/>
+                    </a:lnT>
+                    <a:lnB w="0">
+                      <a:noFill/>
+                    </a:lnB>
+                    <a:noFill/>
+                  </a:tcPr>
+                </a:tc>
+                <a:tc>
+                  <a:txBody>
+                    <a:bodyPr/>
+                    <a:lstStyle/>
+                    <a:p>
+                      <a:pPr algn="r"/>
+                      <a:r>
+                        <a:rPr sz="1200" b="0" i="0">
+                          <a:solidFill>
+                            <a:srgbClr val="222222"/>
+                          </a:solidFill>
+                        </a:rPr>
+                        <a:t>2.4 %</a:t>
+                      </a:r>
+                      <a:endParaRPr sz="1200"/>
+                    </a:p>
+                  </a:txBody>
+                  <a:tcPr marL="73152" marR="73152" marT="27432" marB="27432" anchor="ctr">
+                    <a:lnL w="0">
+                      <a:noFill/>
+                    </a:lnL>
+                    <a:lnR w="0">
+                      <a:noFill/>
+                    </a:lnR>
+                    <a:lnT w="0">
+                      <a:noFill/>
+                    </a:lnT>
+                    <a:lnB w="0">
+                      <a:noFill/>
+                    </a:lnB>
+                    <a:noFill/>
+                  </a:tcPr>
+                </a:tc>
+                <a:tc>
+                  <a:txBody>
+                    <a:bodyPr/>
+                    <a:lstStyle/>
+                    <a:p>
+                      <a:pPr algn="r"/>
+                      <a:r>
+                        <a:rPr sz="1200" b="0" i="0">
+                          <a:solidFill>
+                            <a:srgbClr val="222222"/>
+                          </a:solidFill>
+                        </a:rPr>
+                        <a:t>4.4 %</a:t>
+                      </a:r>
+                      <a:endParaRPr sz="1200"/>
+                    </a:p>
+                  </a:txBody>
+                  <a:tcPr marL="73152" marR="73152" marT="27432" marB="27432" anchor="ctr">
+                    <a:lnL w="0">
+                      <a:noFill/>
+                    </a:lnL>
+                    <a:lnR w="0">
+                      <a:noFill/>
+                    </a:lnR>
+                    <a:lnT w="0">
+                      <a:noFill/>
+                    </a:lnT>
+                    <a:lnB w="0">
+                      <a:noFill/>
+                    </a:lnB>
+                    <a:noFill/>
+                  </a:tcPr>
+                </a:tc>
+                <a:tc>
+                  <a:txBody>
+                    <a:bodyPr/>
+                    <a:lstStyle/>
+                    <a:p>
+                      <a:pPr algn="r"/>
+                      <a:r>
+                        <a:rPr sz="1200" b="0" i="0">
+                          <a:solidFill>
+                            <a:srgbClr val="222222"/>
+                          </a:solidFill>
+                        </a:rPr>
+                        <a:t>3.5 %</a:t>
+                      </a:r>
+                      <a:endParaRPr sz="1200"/>
+                    </a:p>
+                  </a:txBody>
+                  <a:tcPr marL="73152" marR="73152" marT="27432" marB="27432" anchor="ctr">
+                    <a:lnL w="0">
+                      <a:noFill/>
+                    </a:lnL>
+                    <a:lnR w="0">
+                      <a:noFill/>
+                    </a:lnR>
+                    <a:lnT w="0">
+                      <a:noFill/>
+                    </a:lnT>
+                    <a:lnB w="0">
+                      <a:noFill/>
+                    </a:lnB>
+                    <a:noFill/>
+                  </a:tcPr>
+                </a:tc>
+                <a:extLst>
+                  <a:ext uri="{0D108BD9-81ED-4DB2-BD59-A6C34878D82A}">
+                    <a16:rowId xmlns:a16="http://schemas.microsoft.com/office/drawing/2014/main" val="10002"/>
+                  </a:ext>
+                </a:extLst>
+              </a:tr>
+              <a:tr h="265176">
+                <a:tc>
+                  <a:txBody>
+                    <a:bodyPr/>
+                    <a:lstStyle/>
+                    <a:p>
+                      <a:pPr algn="l"/>
+                      <a:r>
+                        <a:rPr sz="1200" b="0" i="0">
+                          <a:solidFill>
+                            <a:srgbClr val="222222"/>
+                          </a:solidFill>
+                        </a:rPr>
+                        <a:t>2</a:t>
+                      </a:r>
+                      <a:endParaRPr sz="1200"/>
+                    </a:p>
+                  </a:txBody>
+                  <a:tcPr marL="73152" marR="73152" marT="27432" marB="27432" anchor="ctr">
+                    <a:lnL w="0">
+                      <a:noFill/>
+                    </a:lnL>
+                    <a:lnR w="0">
+                      <a:noFill/>
+                    </a:lnR>
+                    <a:lnT w="0">
+                      <a:noFill/>
+                    </a:lnT>
+                    <a:lnB w="0">
+                      <a:noFill/>
+                    </a:lnB>
+                    <a:noFill/>
+                  </a:tcPr>
+                </a:tc>
+                <a:tc>
+                  <a:txBody>
+                    <a:bodyPr/>
+                    <a:lstStyle/>
+                    <a:p>
+                      <a:pPr algn="r"/>
+                      <a:r>
+                        <a:rPr sz="1200" b="0" i="0">
+                          <a:solidFill>
+                            <a:srgbClr val="222222"/>
+                          </a:solidFill>
+                        </a:rPr>
+                        <a:t>5.2 %</a:t>
+                      </a:r>
+                      <a:endParaRPr sz="1200"/>
+                    </a:p>
+                  </a:txBody>
+                  <a:tcPr marL="73152" marR="73152" marT="27432" marB="27432" anchor="ctr">
+                    <a:lnL w="0">
+                      <a:noFill/>
+                    </a:lnL>
+                    <a:lnR w="0">
+                      <a:noFill/>
+                    </a:lnR>
+                    <a:lnT w="0">
+                      <a:noFill/>
+                    </a:lnT>
+                    <a:lnB w="0">
+                      <a:noFill/>
+                    </a:lnB>
+                    <a:noFill/>
+                  </a:tcPr>
+                </a:tc>
+                <a:tc>
+                  <a:txBody>
+                    <a:bodyPr/>
+                    <a:lstStyle/>
+                    <a:p>
+                      <a:pPr algn="r"/>
+                      <a:r>
+                        <a:rPr sz="1200" b="0" i="0">
+                          <a:solidFill>
+                            <a:srgbClr val="222222"/>
+                          </a:solidFill>
+                        </a:rPr>
+                        <a:t>6.9 %</a:t>
+                      </a:r>
+                      <a:endParaRPr sz="1200"/>
+                    </a:p>
+                  </a:txBody>
+                  <a:tcPr marL="73152" marR="73152" marT="27432" marB="27432" anchor="ctr">
+                    <a:lnL w="0">
+                      <a:noFill/>
+                    </a:lnL>
+                    <a:lnR w="0">
+                      <a:noFill/>
+                    </a:lnR>
+                    <a:lnT w="0">
+                      <a:noFill/>
+                    </a:lnT>
+                    <a:lnB w="0">
+                      <a:noFill/>
+                    </a:lnB>
+                    <a:noFill/>
+                  </a:tcPr>
+                </a:tc>
+                <a:tc>
+                  <a:txBody>
+                    <a:bodyPr/>
+                    <a:lstStyle/>
+                    <a:p>
+                      <a:pPr algn="r"/>
+                      <a:r>
+                        <a:rPr sz="1200" b="0" i="0">
+                          <a:solidFill>
+                            <a:srgbClr val="222222"/>
+                          </a:solidFill>
+                        </a:rPr>
+                        <a:t>6.1 %</a:t>
+                      </a:r>
+                      <a:endParaRPr sz="1200"/>
+                    </a:p>
+                  </a:txBody>
+                  <a:tcPr marL="73152" marR="73152" marT="27432" marB="27432" anchor="ctr">
+                    <a:lnL w="0">
+                      <a:noFill/>
+                    </a:lnL>
+                    <a:lnR w="0">
+                      <a:noFill/>
+                    </a:lnR>
+                    <a:lnT w="0">
+                      <a:noFill/>
+                    </a:lnT>
+                    <a:lnB w="0">
+                      <a:noFill/>
+                    </a:lnB>
+                    <a:noFill/>
+                  </a:tcPr>
+                </a:tc>
+                <a:extLst>
+                  <a:ext uri="{0D108BD9-81ED-4DB2-BD59-A6C34878D82A}">
+                    <a16:rowId xmlns:a16="http://schemas.microsoft.com/office/drawing/2014/main" val="10003"/>
+                  </a:ext>
+                </a:extLst>
+              </a:tr>
+              <a:tr h="265176">
+                <a:tc>
+                  <a:txBody>
+                    <a:bodyPr/>
+                    <a:lstStyle/>
+                    <a:p>
+                      <a:pPr algn="l"/>
+                      <a:r>
+                        <a:rPr sz="1200" b="0" i="0">
+                          <a:solidFill>
+                            <a:srgbClr val="222222"/>
+                          </a:solidFill>
+                        </a:rPr>
+                        <a:t>3</a:t>
+                      </a:r>
+                      <a:endParaRPr sz="1200"/>
+                    </a:p>
+                  </a:txBody>
+                  <a:tcPr marL="73152" marR="73152" marT="27432" marB="27432" anchor="ctr">
+                    <a:lnL w="0">
+                      <a:noFill/>
+                    </a:lnL>
+                    <a:lnR w="0">
+                      <a:noFill/>
+                    </a:lnR>
+                    <a:lnT w="0">
+                      <a:noFill/>
+                    </a:lnT>
+                    <a:lnB w="0">
+                      <a:noFill/>
+                    </a:lnB>
+                    <a:noFill/>
+                  </a:tcPr>
+                </a:tc>
+                <a:tc>
+                  <a:txBody>
+                    <a:bodyPr/>
+                    <a:lstStyle/>
+                    <a:p>
+                      <a:pPr algn="r"/>
+                      <a:r>
+                        <a:rPr sz="1200" b="0" i="0">
+                          <a:solidFill>
+                            <a:srgbClr val="222222"/>
+                          </a:solidFill>
+                        </a:rPr>
+                        <a:t>8.3 %</a:t>
+                      </a:r>
+                      <a:endParaRPr sz="1200"/>
+                    </a:p>
+                  </a:txBody>
+                  <a:tcPr marL="73152" marR="73152" marT="27432" marB="27432" anchor="ctr">
+                    <a:lnL w="0">
+                      <a:noFill/>
+                    </a:lnL>
+                    <a:lnR w="0">
+                      <a:noFill/>
+                    </a:lnR>
+                    <a:lnT w="0">
+                      <a:noFill/>
+                    </a:lnT>
+                    <a:lnB w="0">
+                      <a:noFill/>
+                    </a:lnB>
+                    <a:noFill/>
+                  </a:tcPr>
+                </a:tc>
+                <a:tc>
+                  <a:txBody>
+                    <a:bodyPr/>
+                    <a:lstStyle/>
+                    <a:p>
+                      <a:pPr algn="r"/>
+                      <a:r>
+                        <a:rPr sz="1200" b="0" i="0">
+                          <a:solidFill>
+                            <a:srgbClr val="222222"/>
+                          </a:solidFill>
+                        </a:rPr>
+                        <a:t>9.1 %</a:t>
+                      </a:r>
+                      <a:endParaRPr sz="1200"/>
+                    </a:p>
+                  </a:txBody>
+                  <a:tcPr marL="73152" marR="73152" marT="27432" marB="27432" anchor="ctr">
+                    <a:lnL w="0">
+                      <a:noFill/>
+                    </a:lnL>
+                    <a:lnR w="0">
+                      <a:noFill/>
+                    </a:lnR>
+                    <a:lnT w="0">
+                      <a:noFill/>
+                    </a:lnT>
+                    <a:lnB w="0">
+                      <a:noFill/>
+                    </a:lnB>
+                    <a:noFill/>
+                  </a:tcPr>
+                </a:tc>
+                <a:tc>
+                  <a:txBody>
+                    <a:bodyPr/>
+                    <a:lstStyle/>
+                    <a:p>
+                      <a:pPr algn="r"/>
+                      <a:r>
+                        <a:rPr sz="1200" b="0" i="0">
+                          <a:solidFill>
+                            <a:srgbClr val="222222"/>
+                          </a:solidFill>
+                        </a:rPr>
+                        <a:t>8.7 %</a:t>
+                      </a:r>
+                      <a:endParaRPr sz="1200"/>
+                    </a:p>
+                  </a:txBody>
+                  <a:tcPr marL="73152" marR="73152" marT="27432" marB="27432" anchor="ctr">
+                    <a:lnL w="0">
+                      <a:noFill/>
+                    </a:lnL>
+                    <a:lnR w="0">
+                      <a:noFill/>
+                    </a:lnR>
+                    <a:lnT w="0">
+                      <a:noFill/>
+                    </a:lnT>
+                    <a:lnB w="0">
+                      <a:noFill/>
+                    </a:lnB>
+                    <a:noFill/>
+                  </a:tcPr>
+                </a:tc>
+                <a:extLst>
+                  <a:ext uri="{0D108BD9-81ED-4DB2-BD59-A6C34878D82A}">
+                    <a16:rowId xmlns:a16="http://schemas.microsoft.com/office/drawing/2014/main" val="10004"/>
+                  </a:ext>
+                </a:extLst>
+              </a:tr>
+              <a:tr h="265176">
+                <a:tc>
+                  <a:txBody>
+                    <a:bodyPr/>
+                    <a:lstStyle/>
+                    <a:p>
+                      <a:pPr algn="l"/>
+                      <a:r>
+                        <a:rPr sz="1200" b="0" i="0">
+                          <a:solidFill>
+                            <a:srgbClr val="222222"/>
+                          </a:solidFill>
+                        </a:rPr>
+                        <a:t>4</a:t>
+                      </a:r>
+                      <a:endParaRPr sz="1200"/>
+                    </a:p>
+                  </a:txBody>
+                  <a:tcPr marL="73152" marR="73152" marT="27432" marB="27432" anchor="ctr">
+                    <a:lnL w="0">
+                      <a:noFill/>
+                    </a:lnL>
+                    <a:lnR w="0">
+                      <a:noFill/>
+                    </a:lnR>
+                    <a:lnT w="0">
+                      <a:noFill/>
+                    </a:lnT>
+                    <a:lnB w="0">
+                      <a:noFill/>
+                    </a:lnB>
+                    <a:noFill/>
+                  </a:tcPr>
+                </a:tc>
+                <a:tc>
+                  <a:txBody>
+                    <a:bodyPr/>
+                    <a:lstStyle/>
+                    <a:p>
+                      <a:pPr algn="r"/>
+                      <a:r>
+                        <a:rPr sz="1200" b="0" i="0">
+                          <a:solidFill>
+                            <a:srgbClr val="222222"/>
+                          </a:solidFill>
+                        </a:rPr>
+                        <a:t>7.5 %</a:t>
+                      </a:r>
+                      <a:endParaRPr sz="1200"/>
+                    </a:p>
+                  </a:txBody>
+                  <a:tcPr marL="73152" marR="73152" marT="27432" marB="27432" anchor="ctr">
+                    <a:lnL w="0">
+                      <a:noFill/>
+                    </a:lnL>
+                    <a:lnR w="0">
+                      <a:noFill/>
+                    </a:lnR>
+                    <a:lnT w="0">
+                      <a:noFill/>
+                    </a:lnT>
+                    <a:lnB w="0">
+                      <a:noFill/>
+                    </a:lnB>
+                    <a:noFill/>
+                  </a:tcPr>
+                </a:tc>
+                <a:tc>
+                  <a:txBody>
+                    <a:bodyPr/>
+                    <a:lstStyle/>
+                    <a:p>
+                      <a:pPr algn="r"/>
+                      <a:r>
+                        <a:rPr sz="1200" b="0" i="0">
+                          <a:solidFill>
+                            <a:srgbClr val="222222"/>
+                          </a:solidFill>
+                        </a:rPr>
+                        <a:t>6.4 %</a:t>
+                      </a:r>
+                      <a:endParaRPr sz="1200"/>
+                    </a:p>
+                  </a:txBody>
+                  <a:tcPr marL="73152" marR="73152" marT="27432" marB="27432" anchor="ctr">
+                    <a:lnL w="0">
+                      <a:noFill/>
+                    </a:lnL>
+                    <a:lnR w="0">
+                      <a:noFill/>
+                    </a:lnR>
+                    <a:lnT w="0">
+                      <a:noFill/>
+                    </a:lnT>
+                    <a:lnB w="0">
+                      <a:noFill/>
+                    </a:lnB>
+                    <a:noFill/>
+                  </a:tcPr>
+                </a:tc>
+                <a:tc>
+                  <a:txBody>
+                    <a:bodyPr/>
+                    <a:lstStyle/>
+                    <a:p>
+                      <a:pPr algn="r"/>
+                      <a:r>
+                        <a:rPr sz="1200" b="0" i="0">
+                          <a:solidFill>
+                            <a:srgbClr val="222222"/>
+                          </a:solidFill>
+                        </a:rPr>
+                        <a:t>7.0 %</a:t>
+                      </a:r>
+                      <a:endParaRPr sz="1200"/>
+                    </a:p>
+                  </a:txBody>
+                  <a:tcPr marL="73152" marR="73152" marT="27432" marB="27432" anchor="ctr">
+                    <a:lnL w="0">
+                      <a:noFill/>
+                    </a:lnL>
+                    <a:lnR w="0">
+                      <a:noFill/>
+                    </a:lnR>
+                    <a:lnT w="0">
+                      <a:noFill/>
+                    </a:lnT>
+                    <a:lnB w="0">
+                      <a:noFill/>
+                    </a:lnB>
+                    <a:noFill/>
+                  </a:tcPr>
+                </a:tc>
+                <a:extLst>
+                  <a:ext uri="{0D108BD9-81ED-4DB2-BD59-A6C34878D82A}">
+                    <a16:rowId xmlns:a16="http://schemas.microsoft.com/office/drawing/2014/main" val="10005"/>
+                  </a:ext>
+                </a:extLst>
+              </a:tr>
+              <a:tr h="265176">
+                <a:tc>
+                  <a:txBody>
+                    <a:bodyPr/>
+                    <a:lstStyle/>
+                    <a:p>
+                      <a:pPr algn="l"/>
+                      <a:r>
+                        <a:rPr sz="1200" b="0" i="0">
+                          <a:solidFill>
+                            <a:srgbClr val="222222"/>
+                          </a:solidFill>
+                        </a:rPr>
+                        <a:t>5</a:t>
+                      </a:r>
+                      <a:endParaRPr sz="1200"/>
+                    </a:p>
+                  </a:txBody>
+                  <a:tcPr marL="73152" marR="73152" marT="27432" marB="27432" anchor="ctr">
+                    <a:lnL w="0">
+                      <a:noFill/>
+                    </a:lnL>
+                    <a:lnR w="0">
+                      <a:noFill/>
+                    </a:lnR>
+                    <a:lnT w="0">
+                      <a:noFill/>
+                    </a:lnT>
+                    <a:lnB w="0">
+                      <a:noFill/>
+                    </a:lnB>
+                    <a:noFill/>
+                  </a:tcPr>
+                </a:tc>
+                <a:tc>
+                  <a:txBody>
+                    <a:bodyPr/>
+                    <a:lstStyle/>
+                    <a:p>
+                      <a:pPr algn="r"/>
+                      <a:r>
+                        <a:rPr sz="1200" b="0" i="0">
+                          <a:solidFill>
+                            <a:srgbClr val="222222"/>
+                          </a:solidFill>
+                        </a:rPr>
+                        <a:t>17.8 %</a:t>
+                      </a:r>
+                      <a:endParaRPr sz="1200"/>
+                    </a:p>
+                  </a:txBody>
+                  <a:tcPr marL="73152" marR="73152" marT="27432" marB="27432" anchor="ctr">
+                    <a:lnL w="0">
+                      <a:noFill/>
+                    </a:lnL>
+                    <a:lnR w="0">
+                      <a:noFill/>
+                    </a:lnR>
+                    <a:lnT w="0">
+                      <a:noFill/>
+                    </a:lnT>
+                    <a:lnB w="0">
+                      <a:noFill/>
+                    </a:lnB>
+                    <a:noFill/>
+                  </a:tcPr>
+                </a:tc>
+                <a:tc>
+                  <a:txBody>
+                    <a:bodyPr/>
+                    <a:lstStyle/>
+                    <a:p>
+                      <a:pPr algn="r"/>
+                      <a:r>
+                        <a:rPr sz="1200" b="0" i="0">
+                          <a:solidFill>
+                            <a:srgbClr val="222222"/>
+                          </a:solidFill>
+                        </a:rPr>
+                        <a:t>21.3 %</a:t>
+                      </a:r>
+                      <a:endParaRPr sz="1200"/>
+                    </a:p>
+                  </a:txBody>
+                  <a:tcPr marL="73152" marR="73152" marT="27432" marB="27432" anchor="ctr">
+                    <a:lnL w="0">
+                      <a:noFill/>
+                    </a:lnL>
+                    <a:lnR w="0">
+                      <a:noFill/>
+                    </a:lnR>
+                    <a:lnT w="0">
+                      <a:noFill/>
+                    </a:lnT>
+                    <a:lnB w="0">
+                      <a:noFill/>
+                    </a:lnB>
+                    <a:noFill/>
+                  </a:tcPr>
+                </a:tc>
+                <a:tc>
+                  <a:txBody>
+                    <a:bodyPr/>
+                    <a:lstStyle/>
+                    <a:p>
+                      <a:pPr algn="r"/>
+                      <a:r>
+                        <a:rPr sz="1200" b="0" i="0">
+                          <a:solidFill>
+                            <a:srgbClr val="222222"/>
+                          </a:solidFill>
+                        </a:rPr>
+                        <a:t>19.6 %</a:t>
+                      </a:r>
+                      <a:endParaRPr sz="1200"/>
+                    </a:p>
+                  </a:txBody>
+                  <a:tcPr marL="73152" marR="73152" marT="27432" marB="27432" anchor="ctr">
+                    <a:lnL w="0">
+                      <a:noFill/>
+                    </a:lnL>
+                    <a:lnR w="0">
+                      <a:noFill/>
+                    </a:lnR>
+                    <a:lnT w="0">
+                      <a:noFill/>
+                    </a:lnT>
+                    <a:lnB w="0">
+                      <a:noFill/>
+                    </a:lnB>
+                    <a:noFill/>
+                  </a:tcPr>
+                </a:tc>
+                <a:extLst>
+                  <a:ext uri="{0D108BD9-81ED-4DB2-BD59-A6C34878D82A}">
+                    <a16:rowId xmlns:a16="http://schemas.microsoft.com/office/drawing/2014/main" val="10006"/>
+                  </a:ext>
+                </a:extLst>
+              </a:tr>
+              <a:tr h="265176">
+                <a:tc>
+                  <a:txBody>
+                    <a:bodyPr/>
+                    <a:lstStyle/>
+                    <a:p>
+                      <a:pPr algn="l"/>
+                      <a:r>
+                        <a:rPr sz="1200" b="0" i="0">
+                          <a:solidFill>
+                            <a:srgbClr val="222222"/>
+                          </a:solidFill>
+                        </a:rPr>
+                        <a:t>6</a:t>
+                      </a:r>
+                      <a:endParaRPr sz="1200"/>
+                    </a:p>
+                  </a:txBody>
+                  <a:tcPr marL="73152" marR="73152" marT="27432" marB="27432" anchor="ctr">
+                    <a:lnL w="0">
+                      <a:noFill/>
+                    </a:lnL>
+                    <a:lnR w="0">
+                      <a:noFill/>
+                    </a:lnR>
+                    <a:lnT w="0">
+                      <a:noFill/>
+                    </a:lnT>
+                    <a:lnB w="0">
+                      <a:noFill/>
+                    </a:lnB>
+                    <a:noFill/>
+                  </a:tcPr>
+                </a:tc>
+                <a:tc>
+                  <a:txBody>
+                    <a:bodyPr/>
+                    <a:lstStyle/>
+                    <a:p>
+                      <a:pPr algn="r"/>
+                      <a:r>
+                        <a:rPr sz="1200" b="0" i="0">
+                          <a:solidFill>
+                            <a:srgbClr val="222222"/>
+                          </a:solidFill>
+                        </a:rPr>
+                        <a:t>15.2 %</a:t>
+                      </a:r>
+                      <a:endParaRPr sz="1200"/>
+                    </a:p>
+                  </a:txBody>
+                  <a:tcPr marL="73152" marR="73152" marT="27432" marB="27432" anchor="ctr">
+                    <a:lnL w="0">
+                      <a:noFill/>
+                    </a:lnL>
+                    <a:lnR w="0">
+                      <a:noFill/>
+                    </a:lnR>
+                    <a:lnT w="0">
+                      <a:noFill/>
+                    </a:lnT>
+                    <a:lnB w="0">
+                      <a:noFill/>
+                    </a:lnB>
+                    <a:noFill/>
+                  </a:tcPr>
+                </a:tc>
+                <a:tc>
+                  <a:txBody>
+                    <a:bodyPr/>
+                    <a:lstStyle/>
+                    <a:p>
+                      <a:pPr algn="r"/>
+                      <a:r>
+                        <a:rPr sz="1200" b="0" i="0">
+                          <a:solidFill>
+                            <a:srgbClr val="222222"/>
+                          </a:solidFill>
+                        </a:rPr>
+                        <a:t>12.4 %</a:t>
+                      </a:r>
+                      <a:endParaRPr sz="1200"/>
+                    </a:p>
+                  </a:txBody>
+                  <a:tcPr marL="73152" marR="73152" marT="27432" marB="27432" anchor="ctr">
+                    <a:lnL w="0">
+                      <a:noFill/>
+                    </a:lnL>
+                    <a:lnR w="0">
+                      <a:noFill/>
+                    </a:lnR>
+                    <a:lnT w="0">
+                      <a:noFill/>
+                    </a:lnT>
+                    <a:lnB w="0">
+                      <a:noFill/>
+                    </a:lnB>
+                    <a:noFill/>
+                  </a:tcPr>
+                </a:tc>
+                <a:tc>
+                  <a:txBody>
+                    <a:bodyPr/>
+                    <a:lstStyle/>
+                    <a:p>
+                      <a:pPr algn="r"/>
+                      <a:r>
+                        <a:rPr sz="1200" b="0" i="0">
+                          <a:solidFill>
+                            <a:srgbClr val="222222"/>
+                          </a:solidFill>
+                        </a:rPr>
+                        <a:t>13.8 %</a:t>
+                      </a:r>
+                      <a:endParaRPr sz="1200"/>
+                    </a:p>
+                  </a:txBody>
+                  <a:tcPr marL="73152" marR="73152" marT="27432" marB="27432" anchor="ctr">
+                    <a:lnL w="0">
+                      <a:noFill/>
+                    </a:lnL>
+                    <a:lnR w="0">
+                      <a:noFill/>
+                    </a:lnR>
+                    <a:lnT w="0">
+                      <a:noFill/>
+                    </a:lnT>
+                    <a:lnB w="0">
+                      <a:noFill/>
+                    </a:lnB>
+                    <a:noFill/>
+                  </a:tcPr>
+                </a:tc>
+                <a:extLst>
+                  <a:ext uri="{0D108BD9-81ED-4DB2-BD59-A6C34878D82A}">
+                    <a16:rowId xmlns:a16="http://schemas.microsoft.com/office/drawing/2014/main" val="10007"/>
+                  </a:ext>
+                </a:extLst>
+              </a:tr>
+              <a:tr h="265176">
+                <a:tc>
+                  <a:txBody>
+                    <a:bodyPr/>
+                    <a:lstStyle/>
+                    <a:p>
+                      <a:pPr algn="l"/>
+                      <a:r>
+                        <a:rPr sz="1200" b="0" i="0">
+                          <a:solidFill>
+                            <a:srgbClr val="222222"/>
+                          </a:solidFill>
+                        </a:rPr>
+                        <a:t>7</a:t>
+                      </a:r>
+                      <a:endParaRPr sz="1200"/>
+                    </a:p>
+                  </a:txBody>
+                  <a:tcPr marL="73152" marR="73152" marT="27432" marB="27432" anchor="ctr">
+                    <a:lnL w="0">
+                      <a:noFill/>
+                    </a:lnL>
+                    <a:lnR w="0">
+                      <a:noFill/>
+                    </a:lnR>
+                    <a:lnT w="0">
+                      <a:noFill/>
+                    </a:lnT>
+                    <a:lnB w="0">
+                      <a:noFill/>
+                    </a:lnB>
+                    <a:noFill/>
+                  </a:tcPr>
+                </a:tc>
+                <a:tc>
+                  <a:txBody>
+                    <a:bodyPr/>
+                    <a:lstStyle/>
+                    <a:p>
+                      <a:pPr algn="r"/>
+                      <a:r>
+                        <a:rPr sz="1200" b="0" i="0">
+                          <a:solidFill>
+                            <a:srgbClr val="222222"/>
+                          </a:solidFill>
+                        </a:rPr>
+                        <a:t>21.9 %</a:t>
+                      </a:r>
+                      <a:endParaRPr sz="1200"/>
+                    </a:p>
+                  </a:txBody>
+                  <a:tcPr marL="73152" marR="73152" marT="27432" marB="27432" anchor="ctr">
+                    <a:lnL w="0">
+                      <a:noFill/>
+                    </a:lnL>
+                    <a:lnR w="0">
+                      <a:noFill/>
+                    </a:lnR>
+                    <a:lnT w="0">
+                      <a:noFill/>
+                    </a:lnT>
+                    <a:lnB w="0">
+                      <a:noFill/>
+                    </a:lnB>
+                    <a:noFill/>
+                  </a:tcPr>
+                </a:tc>
+                <a:tc>
+                  <a:txBody>
+                    <a:bodyPr/>
+                    <a:lstStyle/>
+                    <a:p>
+                      <a:pPr algn="r"/>
+                      <a:r>
+                        <a:rPr sz="1200" b="0" i="0">
+                          <a:solidFill>
+                            <a:srgbClr val="222222"/>
+                          </a:solidFill>
+                        </a:rPr>
+                        <a:t>18.5 %</a:t>
+                      </a:r>
+                      <a:endParaRPr sz="1200"/>
+                    </a:p>
+                  </a:txBody>
+                  <a:tcPr marL="73152" marR="73152" marT="27432" marB="27432" anchor="ctr">
+                    <a:lnL w="0">
+                      <a:noFill/>
+                    </a:lnL>
+                    <a:lnR w="0">
+                      <a:noFill/>
+                    </a:lnR>
+                    <a:lnT w="0">
+                      <a:noFill/>
+                    </a:lnT>
+                    <a:lnB w="0">
+                      <a:noFill/>
+                    </a:lnB>
+                    <a:noFill/>
+                  </a:tcPr>
+                </a:tc>
+                <a:tc>
+                  <a:txBody>
+                    <a:bodyPr/>
+                    <a:lstStyle/>
+                    <a:p>
+                      <a:pPr algn="r"/>
+                      <a:r>
+                        <a:rPr sz="1200" b="0" i="0">
+                          <a:solidFill>
+                            <a:srgbClr val="222222"/>
+                          </a:solidFill>
+                        </a:rPr>
+                        <a:t>20.2 %</a:t>
+                      </a:r>
+                      <a:endParaRPr sz="1200"/>
+                    </a:p>
+                  </a:txBody>
+                  <a:tcPr marL="73152" marR="73152" marT="27432" marB="27432" anchor="ctr">
+                    <a:lnL w="0">
+                      <a:noFill/>
+                    </a:lnL>
+                    <a:lnR w="0">
+                      <a:noFill/>
+                    </a:lnR>
+                    <a:lnT w="0">
+                      <a:noFill/>
+                    </a:lnT>
+                    <a:lnB w="0">
+                      <a:noFill/>
+                    </a:lnB>
+                    <a:noFill/>
+                  </a:tcPr>
+                </a:tc>
+                <a:extLst>
+                  <a:ext uri="{0D108BD9-81ED-4DB2-BD59-A6C34878D82A}">
+                    <a16:rowId xmlns:a16="http://schemas.microsoft.com/office/drawing/2014/main" val="10008"/>
+                  </a:ext>
+                </a:extLst>
+              </a:tr>
+              <a:tr h="265176">
+                <a:tc>
+                  <a:txBody>
+                    <a:bodyPr/>
+                    <a:lstStyle/>
+                    <a:p>
+                      <a:pPr algn="l"/>
+                      <a:r>
+                        <a:rPr sz="1200" b="0" i="0">
+                          <a:solidFill>
+                            <a:srgbClr val="222222"/>
+                          </a:solidFill>
+                        </a:rPr>
+                        <a:t>8</a:t>
+                      </a:r>
+                      <a:endParaRPr sz="1200"/>
+                    </a:p>
+                  </a:txBody>
+                  <a:tcPr marL="73152" marR="73152" marT="27432" marB="27432" anchor="ctr">
+                    <a:lnL w="0">
+                      <a:noFill/>
+                    </a:lnL>
+                    <a:lnR w="0">
+                      <a:noFill/>
+                    </a:lnR>
+                    <a:lnT w="0">
+                      <a:noFill/>
+                    </a:lnT>
+                    <a:lnB w="0">
+                      <a:noFill/>
+                    </a:lnB>
+                    <a:noFill/>
+                  </a:tcPr>
+                </a:tc>
+                <a:tc>
+                  <a:txBody>
+                    <a:bodyPr/>
+                    <a:lstStyle/>
+                    <a:p>
+                      <a:pPr algn="r"/>
+                      <a:r>
+                        <a:rPr sz="1200" b="0" i="0">
+                          <a:solidFill>
+                            <a:srgbClr val="222222"/>
+                          </a:solidFill>
+                        </a:rPr>
+                        <a:t>13.4 %</a:t>
+                      </a:r>
+                      <a:endParaRPr sz="1200"/>
+                    </a:p>
+                  </a:txBody>
+                  <a:tcPr marL="73152" marR="73152" marT="27432" marB="27432" anchor="ctr">
+                    <a:lnL w="0">
+                      <a:noFill/>
+                    </a:lnL>
+                    <a:lnR w="0">
+                      <a:noFill/>
+                    </a:lnR>
+                    <a:lnT w="0">
+                      <a:noFill/>
+                    </a:lnT>
+                    <a:lnB w="0">
+                      <a:noFill/>
+                    </a:lnB>
+                    <a:noFill/>
+                  </a:tcPr>
+                </a:tc>
+                <a:tc>
+                  <a:txBody>
+                    <a:bodyPr/>
+                    <a:lstStyle/>
+                    <a:p>
+                      <a:pPr algn="r"/>
+                      <a:r>
+                        <a:rPr sz="1200" b="0" i="0">
+                          <a:solidFill>
+                            <a:srgbClr val="222222"/>
+                          </a:solidFill>
+                        </a:rPr>
+                        <a:t>12.7 %</a:t>
+                      </a:r>
+                      <a:endParaRPr sz="1200"/>
+                    </a:p>
+                  </a:txBody>
+                  <a:tcPr marL="73152" marR="73152" marT="27432" marB="27432" anchor="ctr">
+                    <a:lnL w="0">
+                      <a:noFill/>
+                    </a:lnL>
+                    <a:lnR w="0">
+                      <a:noFill/>
+                    </a:lnR>
+                    <a:lnT w="0">
+                      <a:noFill/>
+                    </a:lnT>
+                    <a:lnB w="0">
+                      <a:noFill/>
+                    </a:lnB>
+                    <a:noFill/>
+                  </a:tcPr>
+                </a:tc>
+                <a:tc>
+                  <a:txBody>
+                    <a:bodyPr/>
+                    <a:lstStyle/>
+                    <a:p>
+                      <a:pPr algn="r"/>
+                      <a:r>
+                        <a:rPr sz="1200" b="0" i="0">
+                          <a:solidFill>
+                            <a:srgbClr val="222222"/>
+                          </a:solidFill>
+                        </a:rPr>
+                        <a:t>13.0 %</a:t>
+                      </a:r>
+                      <a:endParaRPr sz="1200"/>
+                    </a:p>
+                  </a:txBody>
+                  <a:tcPr marL="73152" marR="73152" marT="27432" marB="27432" anchor="ctr">
+                    <a:lnL w="0">
+                      <a:noFill/>
+                    </a:lnL>
+                    <a:lnR w="0">
+                      <a:noFill/>
+                    </a:lnR>
+                    <a:lnT w="0">
+                      <a:noFill/>
+                    </a:lnT>
+                    <a:lnB w="0">
+                      <a:noFill/>
+                    </a:lnB>
+                    <a:noFill/>
+                  </a:tcPr>
+                </a:tc>
+                <a:extLst>
+                  <a:ext uri="{0D108BD9-81ED-4DB2-BD59-A6C34878D82A}">
+                    <a16:rowId xmlns:a16="http://schemas.microsoft.com/office/drawing/2014/main" val="10009"/>
+                  </a:ext>
+                </a:extLst>
+              </a:tr>
+              <a:tr h="265176">
+                <a:tc>
+                  <a:txBody>
+                    <a:bodyPr/>
+                    <a:lstStyle/>
+                    <a:p>
+                      <a:pPr algn="l"/>
+                      <a:r>
+                        <a:rPr sz="1200" b="0" i="0">
+                          <a:solidFill>
+                            <a:srgbClr val="222222"/>
+                          </a:solidFill>
+                        </a:rPr>
+                        <a:t>9</a:t>
+                      </a:r>
+                      <a:endParaRPr sz="1200"/>
+                    </a:p>
+                  </a:txBody>
+                  <a:tcPr marL="73152" marR="73152" marT="27432" marB="27432" anchor="ctr">
+                    <a:lnL w="0">
+                      <a:noFill/>
+                    </a:lnL>
+                    <a:lnR w="0">
+                      <a:noFill/>
+                    </a:lnR>
+                    <a:lnT w="0">
+                      <a:noFill/>
+                    </a:lnT>
+                    <a:lnB w="0">
+                      <a:noFill/>
+                    </a:lnB>
+                    <a:noFill/>
+                  </a:tcPr>
+                </a:tc>
+                <a:tc>
+                  <a:txBody>
+                    <a:bodyPr/>
+                    <a:lstStyle/>
+                    <a:p>
+                      <a:pPr algn="r"/>
+                      <a:r>
+                        <a:rPr sz="1200" b="0" i="0">
+                          <a:solidFill>
+                            <a:srgbClr val="222222"/>
+                          </a:solidFill>
+                        </a:rPr>
+                        <a:t>2.8 %</a:t>
+                      </a:r>
+                      <a:endParaRPr sz="1200"/>
+                    </a:p>
+                  </a:txBody>
+                  <a:tcPr marL="73152" marR="73152" marT="27432" marB="27432" anchor="ctr">
+                    <a:lnL w="0">
+                      <a:noFill/>
+                    </a:lnL>
+                    <a:lnR w="0">
+                      <a:noFill/>
+                    </a:lnR>
+                    <a:lnT w="0">
+                      <a:noFill/>
+                    </a:lnT>
+                    <a:lnB w="0">
+                      <a:noFill/>
+                    </a:lnB>
+                    <a:noFill/>
+                  </a:tcPr>
+                </a:tc>
+                <a:tc>
+                  <a:txBody>
+                    <a:bodyPr/>
+                    <a:lstStyle/>
+                    <a:p>
+                      <a:pPr algn="r"/>
+                      <a:r>
+                        <a:rPr sz="1200" b="0" i="0">
+                          <a:solidFill>
+                            <a:srgbClr val="222222"/>
+                          </a:solidFill>
+                        </a:rPr>
+                        <a:t>3.0 %</a:t>
+                      </a:r>
+                      <a:endParaRPr sz="1200"/>
+                    </a:p>
+                  </a:txBody>
+                  <a:tcPr marL="73152" marR="73152" marT="27432" marB="27432" anchor="ctr">
+                    <a:lnL w="0">
+                      <a:noFill/>
+                    </a:lnL>
+                    <a:lnR w="0">
+                      <a:noFill/>
+                    </a:lnR>
+                    <a:lnT w="0">
+                      <a:noFill/>
+                    </a:lnT>
+                    <a:lnB w="0">
+                      <a:noFill/>
+                    </a:lnB>
+                    <a:noFill/>
+                  </a:tcPr>
+                </a:tc>
+                <a:tc>
+                  <a:txBody>
+                    <a:bodyPr/>
+                    <a:lstStyle/>
+                    <a:p>
+                      <a:pPr algn="r"/>
+                      <a:r>
+                        <a:rPr sz="1200" b="0" i="0">
+                          <a:solidFill>
+                            <a:srgbClr val="222222"/>
+                          </a:solidFill>
+                        </a:rPr>
+                        <a:t>2.9 %</a:t>
+                      </a:r>
+                      <a:endParaRPr sz="1200"/>
+                    </a:p>
+                  </a:txBody>
+                  <a:tcPr marL="73152" marR="73152" marT="27432" marB="27432" anchor="ctr">
+                    <a:lnL w="0">
+                      <a:noFill/>
+                    </a:lnL>
+                    <a:lnR w="0">
+                      <a:noFill/>
+                    </a:lnR>
+                    <a:lnT w="0">
+                      <a:noFill/>
+                    </a:lnT>
+                    <a:lnB w="0">
+                      <a:noFill/>
+                    </a:lnB>
+                    <a:noFill/>
+                  </a:tcPr>
+                </a:tc>
+                <a:extLst>
+                  <a:ext uri="{0D108BD9-81ED-4DB2-BD59-A6C34878D82A}">
+                    <a16:rowId xmlns:a16="http://schemas.microsoft.com/office/drawing/2014/main" val="10010"/>
+                  </a:ext>
+                </a:extLst>
+              </a:tr>
+              <a:tr h="265176">
+                <a:tc>
+                  <a:txBody>
+                    <a:bodyPr/>
+                    <a:lstStyle/>
+                    <a:p>
+                      <a:pPr algn="l"/>
+                      <a:r>
+                        <a:rPr sz="1200" b="0" i="0">
+                          <a:solidFill>
+                            <a:srgbClr val="222222"/>
+                          </a:solidFill>
+                        </a:rPr>
+                        <a:t>Most people can be trusted</a:t>
+                      </a:r>
+                      <a:endParaRPr sz="1200"/>
+                    </a:p>
+                  </a:txBody>
+                  <a:tcPr marL="73152" marR="73152" marT="27432" marB="27432" anchor="ctr">
+                    <a:lnL w="0">
+                      <a:noFill/>
+                    </a:lnL>
+                    <a:lnR w="0">
+                      <a:noFill/>
+                    </a:lnR>
+                    <a:lnT w="0">
+                      <a:noFill/>
+                    </a:lnT>
+                    <a:lnB w="0">
+                      <a:noFill/>
+                    </a:lnB>
+                    <a:noFill/>
+                  </a:tcPr>
+                </a:tc>
+                <a:tc>
+                  <a:txBody>
+                    <a:bodyPr/>
+                    <a:lstStyle/>
+                    <a:p>
+                      <a:pPr algn="r"/>
+                      <a:r>
+                        <a:rPr sz="1200" b="0" i="0">
+                          <a:solidFill>
+                            <a:srgbClr val="222222"/>
+                          </a:solidFill>
+                        </a:rPr>
+                        <a:t>2.1 %</a:t>
+                      </a:r>
+                      <a:endParaRPr sz="1200"/>
+                    </a:p>
+                  </a:txBody>
+                  <a:tcPr marL="73152" marR="73152" marT="27432" marB="27432" anchor="ctr">
+                    <a:lnL w="0">
+                      <a:noFill/>
+                    </a:lnL>
+                    <a:lnR w="0">
+                      <a:noFill/>
+                    </a:lnR>
+                    <a:lnT w="0">
+                      <a:noFill/>
+                    </a:lnT>
+                    <a:lnB w="0">
+                      <a:noFill/>
+                    </a:lnB>
+                    <a:noFill/>
+                  </a:tcPr>
+                </a:tc>
+                <a:tc>
+                  <a:txBody>
+                    <a:bodyPr/>
+                    <a:lstStyle/>
+                    <a:p>
+                      <a:pPr algn="r"/>
+                      <a:r>
+                        <a:rPr sz="1200" b="0" i="0">
+                          <a:solidFill>
+                            <a:srgbClr val="222222"/>
+                          </a:solidFill>
+                        </a:rPr>
+                        <a:t>1.6 %</a:t>
+                      </a:r>
+                      <a:endParaRPr sz="1200"/>
+                    </a:p>
+                  </a:txBody>
+                  <a:tcPr marL="73152" marR="73152" marT="27432" marB="27432" anchor="ctr">
+                    <a:lnL w="0">
+                      <a:noFill/>
+                    </a:lnL>
+                    <a:lnR w="0">
+                      <a:noFill/>
+                    </a:lnR>
+                    <a:lnT w="0">
+                      <a:noFill/>
+                    </a:lnT>
+                    <a:lnB w="0">
+                      <a:noFill/>
+                    </a:lnB>
+                    <a:noFill/>
+                  </a:tcPr>
+                </a:tc>
+                <a:tc>
+                  <a:txBody>
+                    <a:bodyPr/>
+                    <a:lstStyle/>
+                    <a:p>
+                      <a:pPr algn="r"/>
+                      <a:r>
+                        <a:rPr sz="1200" b="0" i="0">
+                          <a:solidFill>
+                            <a:srgbClr val="222222"/>
+                          </a:solidFill>
+                        </a:rPr>
+                        <a:t>1.8 %</a:t>
+                      </a:r>
+                      <a:endParaRPr sz="1200"/>
+                    </a:p>
+                  </a:txBody>
+                  <a:tcPr marL="73152" marR="73152" marT="27432" marB="27432" anchor="ctr">
+                    <a:lnL w="0">
+                      <a:noFill/>
+                    </a:lnL>
+                    <a:lnR w="0">
+                      <a:noFill/>
+                    </a:lnR>
+                    <a:lnT w="0">
+                      <a:noFill/>
+                    </a:lnT>
+                    <a:lnB w="0">
+                      <a:noFill/>
+                    </a:lnB>
+                    <a:noFill/>
+                  </a:tcPr>
+                </a:tc>
+                <a:extLst>
+                  <a:ext uri="{0D108BD9-81ED-4DB2-BD59-A6C34878D82A}">
+                    <a16:rowId xmlns:a16="http://schemas.microsoft.com/office/drawing/2014/main" val="10011"/>
+                  </a:ext>
+                </a:extLst>
+              </a:tr>
+              <a:tr h="265176">
+                <a:tc>
+                  <a:txBody>
+                    <a:bodyPr/>
+                    <a:lstStyle/>
+                    <a:p>
+                      <a:pPr algn="l"/>
+                      <a:r>
+                        <a:rPr sz="1200" b="0" i="0">
+                          <a:solidFill>
+                            <a:srgbClr val="222222"/>
+                          </a:solidFill>
+                        </a:rPr>
+                        <a:t>Total</a:t>
+                      </a:r>
+                      <a:endParaRPr sz="1200"/>
+                    </a:p>
+                  </a:txBody>
+                  <a:tcPr marL="73152" marR="73152" marT="27432" marB="27432" anchor="ctr">
+                    <a:lnL w="0">
+                      <a:noFill/>
+                    </a:lnL>
+                    <a:lnR w="0">
+                      <a:noFill/>
+                    </a:lnR>
+                    <a:lnT w="0">
+                      <a:noFill/>
+                    </a:lnT>
+                    <a:lnB w="12700">
+                      <a:solidFill>
+                        <a:srgbClr val="222222"/>
+                      </a:solidFill>
+                    </a:lnB>
+                    <a:noFill/>
+                  </a:tcPr>
+                </a:tc>
+                <a:tc>
+                  <a:txBody>
+                    <a:bodyPr/>
+                    <a:lstStyle/>
+                    <a:p>
+                      <a:pPr algn="r"/>
+                      <a:r>
+                        <a:rPr sz="1200" b="0" i="0">
+                          <a:solidFill>
+                            <a:srgbClr val="222222"/>
+                          </a:solidFill>
+                        </a:rPr>
+                        <a:t>100.0 %</a:t>
+                      </a:r>
+                      <a:endParaRPr sz="1200"/>
+                    </a:p>
+                  </a:txBody>
+                  <a:tcPr marL="73152" marR="73152" marT="27432" marB="27432" anchor="ctr">
+                    <a:lnL w="0">
+                      <a:noFill/>
+                    </a:lnL>
+                    <a:lnR w="0">
+                      <a:noFill/>
+                    </a:lnR>
+                    <a:lnT w="0">
+                      <a:noFill/>
+                    </a:lnT>
+                    <a:lnB w="12700">
+                      <a:solidFill>
+                        <a:srgbClr val="222222"/>
+                      </a:solidFill>
+                    </a:lnB>
+                    <a:noFill/>
+                  </a:tcPr>
+                </a:tc>
+                <a:tc>
+                  <a:txBody>
+                    <a:bodyPr/>
+                    <a:lstStyle/>
+                    <a:p>
+                      <a:pPr algn="r"/>
+                      <a:r>
+                        <a:rPr sz="1200" b="0" i="0">
+                          <a:solidFill>
+                            <a:srgbClr val="222222"/>
+                          </a:solidFill>
+                        </a:rPr>
+                        <a:t>100.0 %</a:t>
+                      </a:r>
+                      <a:endParaRPr sz="1200"/>
+                    </a:p>
+                  </a:txBody>
+                  <a:tcPr marL="73152" marR="73152" marT="27432" marB="27432" anchor="ctr">
+                    <a:lnL w="0">
+                      <a:noFill/>
+                    </a:lnL>
+                    <a:lnR w="0">
+                      <a:noFill/>
+                    </a:lnR>
+                    <a:lnT w="0">
+                      <a:noFill/>
+                    </a:lnT>
+                    <a:lnB w="12700">
+                      <a:solidFill>
+                        <a:srgbClr val="222222"/>
+                      </a:solidFill>
+                    </a:lnB>
+                    <a:noFill/>
+                  </a:tcPr>
+                </a:tc>
+                <a:tc>
+                  <a:txBody>
+                    <a:bodyPr/>
+                    <a:lstStyle/>
+                    <a:p>
+                      <a:pPr algn="r"/>
+                      <a:r>
+                        <a:rPr sz="1200" b="0" i="0">
+                          <a:solidFill>
+                            <a:srgbClr val="222222"/>
+                          </a:solidFill>
+                        </a:rPr>
+                        <a:t>100.0 %</a:t>
+                      </a:r>
+                      <a:endParaRPr sz="1200"/>
+                    </a:p>
+                  </a:txBody>
+                  <a:tcPr marL="73152" marR="73152" marT="27432" marB="27432" anchor="ctr">
+                    <a:lnL w="0">
+                      <a:noFill/>
+                    </a:lnL>
+                    <a:lnR w="0">
+                      <a:noFill/>
+                    </a:lnR>
+                    <a:lnT w="0">
+                      <a:noFill/>
+                    </a:lnT>
+                    <a:lnB w="12700">
+                      <a:solidFill>
+                        <a:srgbClr val="222222"/>
+                      </a:solidFill>
+                    </a:lnB>
+                    <a:noFill/>
+                  </a:tcPr>
+                </a:tc>
+                <a:extLst>
+                  <a:ext uri="{0D108BD9-81ED-4DB2-BD59-A6C34878D82A}">
+                    <a16:rowId xmlns:a16="http://schemas.microsoft.com/office/drawing/2014/main" val="10012"/>
+                  </a:ext>
+                </a:extLst>
+              </a:tr>
+            </a:tbl>
+          </a:graphicData>
+        </a:graphic>
+      </p:graphicFrame>
+      <p:sp>
+        <p:nvSpPr>
+          <p:cNvPr id="9" name="TextBox 8"/>
+          <p:cNvSpPr txBox="1"/>
+          <p:nvPr/>
+        </p:nvSpPr>
+        <p:spPr>
+          <a:xfrm>
+            <a:off x="758952" y="5047488"/>
+            <a:ext cx="5623559" cy="237744"/>
+          </a:xfrm>
+          <a:prstGeom prst="rect">
+            <a:avLst/>
+          </a:prstGeom>
+          <a:noFill/>
+        </p:spPr>
+        <p:txBody>
+          <a:bodyPr wrap="square" lIns="0" tIns="0" rIns="0" bIns="0" anchor="t">
+            <a:spAutoFit/>
+          </a:bodyPr>
+          <a:lstStyle/>
+          <a:p>
+            <a:pPr algn="l"/>
+            <a:r>
+              <a:rPr sz="1100" b="0" i="1">
+                <a:solidFill>
+                  <a:srgbClr val="222222"/>
+                </a:solidFill>
+              </a:rPr>
+              <a:t>Note. </a:t>
+            </a:r>
+            <a:r>
+              <a:rPr sz="1100" b="0" i="0">
+                <a:solidFill>
+                  <a:srgbClr val="222222"/>
+                </a:solidFill>
+              </a:rPr>
+              <a:t>Each cell shows the % within column.</a:t>
+            </a:r>
+            <a:endParaRPr sz="1100"/>
+          </a:p>
+        </p:txBody>
+      </p:sp>
+      <p:sp>
+        <p:nvSpPr>
+          <p:cNvPr id="10" name="TextBox 9"/>
+          <p:cNvSpPr txBox="1"/>
+          <p:nvPr/>
+        </p:nvSpPr>
+        <p:spPr>
+          <a:xfrm>
+            <a:off x="6720840" y="1261872"/>
+            <a:ext cx="3474720" cy="274320"/>
+          </a:xfrm>
+          <a:prstGeom prst="rect">
+            <a:avLst/>
+          </a:prstGeom>
+          <a:noFill/>
+        </p:spPr>
+        <p:txBody>
+          <a:bodyPr wrap="square" lIns="0" tIns="0" rIns="0" bIns="0" anchor="t">
+            <a:spAutoFit/>
+          </a:bodyPr>
+          <a:lstStyle/>
+          <a:p>
+            <a:pPr algn="l"/>
+            <a:r>
+              <a:rPr sz="1400" b="1" i="0">
+                <a:solidFill>
+                  <a:srgbClr val="222222"/>
+                </a:solidFill>
+              </a:rPr>
+              <a:t>Chi-Squared Tests</a:t>
+            </a:r>
+            <a:endParaRPr sz="1400"/>
+          </a:p>
+        </p:txBody>
+      </p:sp>
+      <p:graphicFrame>
+        <p:nvGraphicFramePr>
+          <p:cNvPr id="11" name="Table 10"/>
+          <p:cNvGraphicFramePr>
+            <a:graphicFrameLocks noGrp="1"/>
+          </p:cNvGraphicFramePr>
+          <p:nvPr/>
+        </p:nvGraphicFramePr>
+        <p:xfrm>
+          <a:off x="6720840" y="1563624"/>
+          <a:ext cx="3474720" cy="795528"/>
+        </p:xfrm>
+        <a:graphic>
+          <a:graphicData uri="http://schemas.openxmlformats.org/drawingml/2006/table">
+            <a:tbl>
+              <a:tblPr>
+                <a:tableStyleId>{2D5ABB26-0587-4C30-8999-92F81FD0307C}</a:tableStyleId>
+              </a:tblPr>
+              <a:tblGrid>
+                <a:gridCol w="822960">
+                  <a:extLst>
+                    <a:ext uri="{9D8B030D-6E8A-4147-A177-3AD203B41FA5}">
+                      <a16:colId xmlns:a16="http://schemas.microsoft.com/office/drawing/2014/main" val="20000"/>
+                    </a:ext>
+                  </a:extLst>
+                </a:gridCol>
+                <a:gridCol w="1097280">
+                  <a:extLst>
+                    <a:ext uri="{9D8B030D-6E8A-4147-A177-3AD203B41FA5}">
+                      <a16:colId xmlns:a16="http://schemas.microsoft.com/office/drawing/2014/main" val="20001"/>
+                    </a:ext>
+                  </a:extLst>
+                </a:gridCol>
+                <a:gridCol w="640080">
+                  <a:extLst>
+                    <a:ext uri="{9D8B030D-6E8A-4147-A177-3AD203B41FA5}">
+                      <a16:colId xmlns:a16="http://schemas.microsoft.com/office/drawing/2014/main" val="20002"/>
+                    </a:ext>
+                  </a:extLst>
+                </a:gridCol>
+                <a:gridCol w="914400">
+                  <a:extLst>
+                    <a:ext uri="{9D8B030D-6E8A-4147-A177-3AD203B41FA5}">
+                      <a16:colId xmlns:a16="http://schemas.microsoft.com/office/drawing/2014/main" val="20003"/>
+                    </a:ext>
+                  </a:extLst>
+                </a:gridCol>
+              </a:tblGrid>
+              <a:tr h="265176">
+                <a:tc>
+                  <a:txBody>
+                    <a:bodyPr/>
+                    <a:lstStyle/>
+                    <a:p>
+                      <a:pPr algn="l"/>
+                      <a:endParaRPr sz="1200"/>
+                    </a:p>
+                  </a:txBody>
+                  <a:tcPr marL="73152" marR="73152" marT="27432" marB="27432" anchor="ctr">
+                    <a:lnL w="0">
+                      <a:noFill/>
+                    </a:lnL>
+                    <a:lnR w="0">
+                      <a:noFill/>
+                    </a:lnR>
+                    <a:lnT w="12700">
+                      <a:solidFill>
+                        <a:srgbClr val="222222"/>
+                      </a:solidFill>
+                    </a:lnT>
+                    <a:lnB w="9525">
+                      <a:solidFill>
+                        <a:srgbClr val="222222"/>
+                      </a:solidFill>
+                    </a:lnB>
+                    <a:noFill/>
+                  </a:tcPr>
+                </a:tc>
+                <a:tc>
+                  <a:txBody>
+                    <a:bodyPr/>
+                    <a:lstStyle/>
+                    <a:p>
+                      <a:pPr algn="r"/>
+                      <a:r>
+                        <a:rPr sz="1200" b="1" i="0">
+                          <a:solidFill>
+                            <a:srgbClr val="222222"/>
+                          </a:solidFill>
+                        </a:rPr>
+                        <a:t>Value</a:t>
+                      </a:r>
+                      <a:endParaRPr sz="1200"/>
+                    </a:p>
+                  </a:txBody>
+                  <a:tcPr marL="73152" marR="73152" marT="27432" marB="27432" anchor="ctr">
+                    <a:lnL w="0">
+                      <a:noFill/>
+                    </a:lnL>
+                    <a:lnR w="0">
+                      <a:noFill/>
+                    </a:lnR>
+                    <a:lnT w="12700">
+                      <a:solidFill>
+                        <a:srgbClr val="222222"/>
+                      </a:solidFill>
+                    </a:lnT>
+                    <a:lnB w="9525">
+                      <a:solidFill>
+                        <a:srgbClr val="222222"/>
+                      </a:solidFill>
+                    </a:lnB>
+                    <a:noFill/>
+                  </a:tcPr>
+                </a:tc>
+                <a:tc>
+                  <a:txBody>
+                    <a:bodyPr/>
+                    <a:lstStyle/>
+                    <a:p>
+                      <a:pPr algn="r"/>
+                      <a:r>
+                        <a:rPr sz="1200" b="1" i="0">
+                          <a:solidFill>
+                            <a:srgbClr val="222222"/>
+                          </a:solidFill>
+                        </a:rPr>
+                        <a:t>df</a:t>
+                      </a:r>
+                      <a:endParaRPr sz="1200"/>
+                    </a:p>
+                  </a:txBody>
+                  <a:tcPr marL="73152" marR="73152" marT="27432" marB="27432" anchor="ctr">
+                    <a:lnL w="0">
+                      <a:noFill/>
+                    </a:lnL>
+                    <a:lnR w="0">
+                      <a:noFill/>
+                    </a:lnR>
+                    <a:lnT w="12700">
+                      <a:solidFill>
+                        <a:srgbClr val="222222"/>
+                      </a:solidFill>
+                    </a:lnT>
+                    <a:lnB w="9525">
+                      <a:solidFill>
+                        <a:srgbClr val="222222"/>
+                      </a:solidFill>
+                    </a:lnB>
+                    <a:noFill/>
+                  </a:tcPr>
+                </a:tc>
+                <a:tc>
+                  <a:txBody>
+                    <a:bodyPr/>
+                    <a:lstStyle/>
+                    <a:p>
+                      <a:pPr algn="r"/>
+                      <a:r>
+                        <a:rPr sz="1200" b="1" i="0">
+                          <a:solidFill>
+                            <a:srgbClr val="222222"/>
+                          </a:solidFill>
+                        </a:rPr>
+                        <a:t>p</a:t>
+                      </a:r>
+                      <a:endParaRPr sz="1200"/>
+                    </a:p>
+                  </a:txBody>
+                  <a:tcPr marL="73152" marR="73152" marT="27432" marB="27432" anchor="ctr">
+                    <a:lnL w="0">
+                      <a:noFill/>
+                    </a:lnL>
+                    <a:lnR w="0">
+                      <a:noFill/>
+                    </a:lnR>
+                    <a:lnT w="12700">
+                      <a:solidFill>
+                        <a:srgbClr val="222222"/>
+                      </a:solidFill>
+                    </a:lnT>
+                    <a:lnB w="9525">
+                      <a:solidFill>
+                        <a:srgbClr val="222222"/>
+                      </a:solidFill>
+                    </a:lnB>
+                    <a:noFill/>
+                  </a:tcPr>
+                </a:tc>
+                <a:extLst>
+                  <a:ext uri="{0D108BD9-81ED-4DB2-BD59-A6C34878D82A}">
+                    <a16:rowId xmlns:a16="http://schemas.microsoft.com/office/drawing/2014/main" val="10000"/>
+                  </a:ext>
+                </a:extLst>
+              </a:tr>
+              <a:tr h="265176">
+                <a:tc>
+                  <a:txBody>
+                    <a:bodyPr/>
+                    <a:lstStyle/>
+                    <a:p>
+                      <a:pPr algn="l"/>
+                      <a:r>
+                        <a:rPr sz="1200" b="0" i="0">
+                          <a:solidFill>
+                            <a:srgbClr val="222222"/>
+                          </a:solidFill>
+                        </a:rPr>
+                        <a:t>Χ²</a:t>
+                      </a:r>
+                      <a:endParaRPr sz="1200"/>
+                    </a:p>
+                  </a:txBody>
+                  <a:tcPr marL="73152" marR="73152" marT="27432" marB="27432" anchor="ctr">
+                    <a:lnL w="0">
+                      <a:noFill/>
+                    </a:lnL>
+                    <a:lnR w="0">
+                      <a:noFill/>
+                    </a:lnR>
+                    <a:lnT w="9525" cap="flat" cmpd="sng" algn="ctr">
+                      <a:solidFill>
+                        <a:srgbClr val="222222"/>
+                      </a:solidFill>
+                      <a:prstDash val="solid"/>
+                      <a:round/>
+                      <a:headEnd type="none" w="med" len="med"/>
+                      <a:tailEnd type="none" w="med" len="med"/>
+                    </a:lnT>
+                    <a:lnB w="0">
+                      <a:noFill/>
+                    </a:lnB>
+                    <a:noFill/>
+                  </a:tcPr>
+                </a:tc>
+                <a:tc>
+                  <a:txBody>
+                    <a:bodyPr/>
+                    <a:lstStyle/>
+                    <a:p>
+                      <a:pPr algn="r"/>
+                      <a:r>
+                        <a:rPr sz="1200" b="0" i="0">
+                          <a:solidFill>
+                            <a:srgbClr val="222222"/>
+                          </a:solidFill>
+                        </a:rPr>
+                        <a:t>16.092</a:t>
+                      </a:r>
+                      <a:endParaRPr sz="1200"/>
+                    </a:p>
+                  </a:txBody>
+                  <a:tcPr marL="73152" marR="73152" marT="27432" marB="27432" anchor="ctr">
+                    <a:lnL w="0">
+                      <a:noFill/>
+                    </a:lnL>
+                    <a:lnR w="0">
+                      <a:noFill/>
+                    </a:lnR>
+                    <a:lnT w="9525" cap="flat" cmpd="sng" algn="ctr">
+                      <a:solidFill>
+                        <a:srgbClr val="222222"/>
+                      </a:solidFill>
+                      <a:prstDash val="solid"/>
+                      <a:round/>
+                      <a:headEnd type="none" w="med" len="med"/>
+                      <a:tailEnd type="none" w="med" len="med"/>
+                    </a:lnT>
+                    <a:lnB w="0">
+                      <a:noFill/>
+                    </a:lnB>
+                    <a:noFill/>
+                  </a:tcPr>
+                </a:tc>
+                <a:tc>
+                  <a:txBody>
+                    <a:bodyPr/>
+                    <a:lstStyle/>
+                    <a:p>
+                      <a:pPr algn="r"/>
+                      <a:r>
+                        <a:rPr sz="1200" b="0" i="0">
+                          <a:solidFill>
+                            <a:srgbClr val="222222"/>
+                          </a:solidFill>
+                        </a:rPr>
+                        <a:t>10</a:t>
+                      </a:r>
+                      <a:endParaRPr sz="1200"/>
+                    </a:p>
+                  </a:txBody>
+                  <a:tcPr marL="73152" marR="73152" marT="27432" marB="27432" anchor="ctr">
+                    <a:lnL w="0">
+                      <a:noFill/>
+                    </a:lnL>
+                    <a:lnR w="0">
+                      <a:noFill/>
+                    </a:lnR>
+                    <a:lnT w="9525" cap="flat" cmpd="sng" algn="ctr">
+                      <a:solidFill>
+                        <a:srgbClr val="222222"/>
+                      </a:solidFill>
+                      <a:prstDash val="solid"/>
+                      <a:round/>
+                      <a:headEnd type="none" w="med" len="med"/>
+                      <a:tailEnd type="none" w="med" len="med"/>
+                    </a:lnT>
+                    <a:lnB w="0">
+                      <a:noFill/>
+                    </a:lnB>
+                    <a:noFill/>
+                  </a:tcPr>
+                </a:tc>
+                <a:tc>
+                  <a:txBody>
+                    <a:bodyPr/>
+                    <a:lstStyle/>
+                    <a:p>
+                      <a:pPr algn="r"/>
+                      <a:r>
+                        <a:rPr sz="1200" b="0" i="0">
+                          <a:solidFill>
+                            <a:srgbClr val="222222"/>
+                          </a:solidFill>
+                        </a:rPr>
+                        <a:t>0.097</a:t>
+                      </a:r>
+                      <a:endParaRPr sz="1200"/>
+                    </a:p>
+                  </a:txBody>
+                  <a:tcPr marL="73152" marR="73152" marT="27432" marB="27432" anchor="ctr">
+                    <a:lnL w="0">
+                      <a:noFill/>
+                    </a:lnL>
+                    <a:lnR w="0">
+                      <a:noFill/>
+                    </a:lnR>
+                    <a:lnT w="9525" cap="flat" cmpd="sng" algn="ctr">
+                      <a:solidFill>
+                        <a:srgbClr val="222222"/>
+                      </a:solidFill>
+                      <a:prstDash val="solid"/>
+                      <a:round/>
+                      <a:headEnd type="none" w="med" len="med"/>
+                      <a:tailEnd type="none" w="med" len="med"/>
+                    </a:lnT>
+                    <a:lnB w="0">
+                      <a:noFill/>
+                    </a:lnB>
+                    <a:noFill/>
+                  </a:tcPr>
+                </a:tc>
+                <a:extLst>
+                  <a:ext uri="{0D108BD9-81ED-4DB2-BD59-A6C34878D82A}">
+                    <a16:rowId xmlns:a16="http://schemas.microsoft.com/office/drawing/2014/main" val="10001"/>
+                  </a:ext>
+                </a:extLst>
+              </a:tr>
+              <a:tr h="265176">
+                <a:tc>
+                  <a:txBody>
+                    <a:bodyPr/>
+                    <a:lstStyle/>
+                    <a:p>
+                      <a:pPr algn="l"/>
+                      <a:r>
+                        <a:rPr sz="1200" b="0" i="0">
+                          <a:solidFill>
+                            <a:srgbClr val="222222"/>
+                          </a:solidFill>
+                        </a:rPr>
+                        <a:t>N</a:t>
+                      </a:r>
+                      <a:endParaRPr sz="1200"/>
+                    </a:p>
+                  </a:txBody>
+                  <a:tcPr marL="73152" marR="73152" marT="27432" marB="27432" anchor="ctr">
+                    <a:lnL w="0">
+                      <a:noFill/>
+                    </a:lnL>
+                    <a:lnR w="0">
+                      <a:noFill/>
+                    </a:lnR>
+                    <a:lnT w="0">
+                      <a:noFill/>
+                    </a:lnT>
+                    <a:lnB w="12700">
+                      <a:solidFill>
+                        <a:srgbClr val="222222"/>
+                      </a:solidFill>
+                    </a:lnB>
+                    <a:noFill/>
+                  </a:tcPr>
+                </a:tc>
+                <a:tc>
+                  <a:txBody>
+                    <a:bodyPr/>
+                    <a:lstStyle/>
+                    <a:p>
+                      <a:pPr algn="r"/>
+                      <a:r>
+                        <a:rPr sz="1200" b="0" i="0">
+                          <a:solidFill>
+                            <a:srgbClr val="222222"/>
+                          </a:solidFill>
+                        </a:rPr>
+                        <a:t>1680</a:t>
+                      </a:r>
+                      <a:endParaRPr sz="1200"/>
+                    </a:p>
+                  </a:txBody>
+                  <a:tcPr marL="73152" marR="73152" marT="27432" marB="27432" anchor="ctr">
+                    <a:lnL w="0">
+                      <a:noFill/>
+                    </a:lnL>
+                    <a:lnR w="0">
+                      <a:noFill/>
+                    </a:lnR>
+                    <a:lnT w="0">
+                      <a:noFill/>
+                    </a:lnT>
+                    <a:lnB w="12700">
+                      <a:solidFill>
+                        <a:srgbClr val="222222"/>
+                      </a:solidFill>
+                    </a:lnB>
+                    <a:noFill/>
+                  </a:tcPr>
+                </a:tc>
+                <a:tc>
+                  <a:txBody>
+                    <a:bodyPr/>
+                    <a:lstStyle/>
+                    <a:p>
+                      <a:pPr algn="r"/>
+                      <a:endParaRPr sz="1200"/>
+                    </a:p>
+                  </a:txBody>
+                  <a:tcPr marL="73152" marR="73152" marT="27432" marB="27432" anchor="ctr">
+                    <a:lnL w="0">
+                      <a:noFill/>
+                    </a:lnL>
+                    <a:lnR w="0">
+                      <a:noFill/>
+                    </a:lnR>
+                    <a:lnT w="0">
+                      <a:noFill/>
+                    </a:lnT>
+                    <a:lnB w="12700">
+                      <a:solidFill>
+                        <a:srgbClr val="222222"/>
+                      </a:solidFill>
+                    </a:lnB>
+                    <a:noFill/>
+                  </a:tcPr>
+                </a:tc>
+                <a:tc>
+                  <a:txBody>
+                    <a:bodyPr/>
+                    <a:lstStyle/>
+                    <a:p>
+                      <a:pPr algn="r"/>
+                      <a:endParaRPr sz="1200"/>
+                    </a:p>
+                  </a:txBody>
+                  <a:tcPr marL="73152" marR="73152" marT="27432" marB="27432" anchor="ctr">
+                    <a:lnL w="0">
+                      <a:noFill/>
+                    </a:lnL>
+                    <a:lnR w="0">
+                      <a:noFill/>
+                    </a:lnR>
+                    <a:lnT w="0">
+                      <a:noFill/>
+                    </a:lnT>
+                    <a:lnB w="12700">
+                      <a:solidFill>
+                        <a:srgbClr val="222222"/>
+                      </a:solidFill>
+                    </a:lnB>
+                    <a:noFill/>
+                  </a:tcPr>
+                </a:tc>
+                <a:extLst>
+                  <a:ext uri="{0D108BD9-81ED-4DB2-BD59-A6C34878D82A}">
+                    <a16:rowId xmlns:a16="http://schemas.microsoft.com/office/drawing/2014/main" val="10002"/>
+                  </a:ext>
+                </a:extLst>
+              </a:tr>
+            </a:tbl>
+          </a:graphicData>
+        </a:graphic>
+      </p:graphicFrame>
+      <p:sp>
+        <p:nvSpPr>
+          <p:cNvPr id="12" name="Oval 11"/>
+          <p:cNvSpPr/>
+          <p:nvPr/>
+        </p:nvSpPr>
+        <p:spPr>
+          <a:xfrm>
+            <a:off x="402335" y="1549908"/>
+            <a:ext cx="292608" cy="292608"/>
+          </a:xfrm>
+          <a:prstGeom prst="ellipse">
+            <a:avLst/>
+          </a:prstGeom>
+          <a:solidFill>
+            <a:srgbClr val="B88C00"/>
+          </a:solidFill>
+          <a:ln>
+            <a:noFill/>
+          </a:ln>
+        </p:spPr>
+        <p:txBody>
+          <a:bodyPr wrap="square" lIns="0" tIns="18288" rIns="0" bIns="18288" rtlCol="0" anchor="ctr"/>
+          <a:lstStyle/>
+          <a:p>
+            <a:pPr algn="ctr"/>
+            <a:r>
+              <a:rPr sz="1200" b="1" i="0">
+                <a:solidFill>
+                  <a:srgbClr val="FFFFFF"/>
+                </a:solidFill>
+              </a:rPr>
+              <a:t>1</a:t>
+            </a:r>
+            <a:endParaRPr sz="1200"/>
+          </a:p>
+        </p:txBody>
+      </p:sp>
+      <p:sp>
+        <p:nvSpPr>
+          <p:cNvPr id="13" name="Oval 12"/>
+          <p:cNvSpPr/>
+          <p:nvPr/>
+        </p:nvSpPr>
+        <p:spPr>
+          <a:xfrm>
+            <a:off x="4041648" y="1261872"/>
+            <a:ext cx="292608" cy="292608"/>
+          </a:xfrm>
+          <a:prstGeom prst="ellipse">
+            <a:avLst/>
+          </a:prstGeom>
+          <a:solidFill>
+            <a:srgbClr val="B88C00"/>
+          </a:solidFill>
+          <a:ln>
+            <a:noFill/>
+          </a:ln>
+        </p:spPr>
+        <p:txBody>
+          <a:bodyPr wrap="square" lIns="0" tIns="18288" rIns="0" bIns="18288" rtlCol="0" anchor="ctr"/>
+          <a:lstStyle/>
+          <a:p>
+            <a:pPr algn="ctr"/>
+            <a:r>
+              <a:rPr sz="1200" b="1" i="0">
+                <a:solidFill>
+                  <a:srgbClr val="FFFFFF"/>
+                </a:solidFill>
+              </a:rPr>
+              <a:t>2</a:t>
+            </a:r>
+            <a:endParaRPr sz="1200"/>
+          </a:p>
+        </p:txBody>
+      </p:sp>
+      <p:sp>
+        <p:nvSpPr>
+          <p:cNvPr id="14" name="Oval 13"/>
+          <p:cNvSpPr/>
+          <p:nvPr/>
+        </p:nvSpPr>
+        <p:spPr>
+          <a:xfrm>
+            <a:off x="3081527" y="4732019"/>
+            <a:ext cx="292608" cy="292608"/>
+          </a:xfrm>
+          <a:prstGeom prst="ellipse">
+            <a:avLst/>
+          </a:prstGeom>
+          <a:solidFill>
+            <a:srgbClr val="B88C00"/>
+          </a:solidFill>
+          <a:ln>
+            <a:noFill/>
+          </a:ln>
+        </p:spPr>
+        <p:txBody>
+          <a:bodyPr wrap="square" lIns="0" tIns="18288" rIns="0" bIns="18288" rtlCol="0" anchor="ctr"/>
+          <a:lstStyle/>
+          <a:p>
+            <a:pPr algn="ctr"/>
+            <a:r>
+              <a:rPr sz="1200" b="1" i="0">
+                <a:solidFill>
+                  <a:srgbClr val="FFFFFF"/>
+                </a:solidFill>
+              </a:rPr>
+              <a:t>3</a:t>
+            </a:r>
+            <a:endParaRPr sz="1200"/>
+          </a:p>
+        </p:txBody>
+      </p:sp>
+      <p:sp>
+        <p:nvSpPr>
+          <p:cNvPr id="15" name="Oval 14"/>
+          <p:cNvSpPr/>
+          <p:nvPr/>
+        </p:nvSpPr>
+        <p:spPr>
+          <a:xfrm>
+            <a:off x="5687567" y="1261872"/>
+            <a:ext cx="292608" cy="292608"/>
+          </a:xfrm>
+          <a:prstGeom prst="ellipse">
+            <a:avLst/>
+          </a:prstGeom>
+          <a:solidFill>
+            <a:srgbClr val="B88C00"/>
+          </a:solidFill>
+          <a:ln>
+            <a:noFill/>
+          </a:ln>
+        </p:spPr>
+        <p:txBody>
+          <a:bodyPr wrap="square" lIns="0" tIns="18288" rIns="0" bIns="18288" rtlCol="0" anchor="ctr"/>
+          <a:lstStyle/>
+          <a:p>
+            <a:pPr algn="ctr"/>
+            <a:r>
+              <a:rPr sz="1200" b="1" i="0">
+                <a:solidFill>
+                  <a:srgbClr val="FFFFFF"/>
+                </a:solidFill>
+              </a:rPr>
+              <a:t>4</a:t>
+            </a:r>
+            <a:endParaRPr sz="1200"/>
+          </a:p>
+        </p:txBody>
+      </p:sp>
+      <p:sp>
+        <p:nvSpPr>
+          <p:cNvPr id="16" name="Oval 15"/>
+          <p:cNvSpPr/>
+          <p:nvPr/>
+        </p:nvSpPr>
+        <p:spPr>
+          <a:xfrm>
+            <a:off x="2670048" y="3936491"/>
+            <a:ext cx="292608" cy="292608"/>
+          </a:xfrm>
+          <a:prstGeom prst="ellipse">
+            <a:avLst/>
+          </a:prstGeom>
+          <a:solidFill>
+            <a:srgbClr val="B88C00"/>
+          </a:solidFill>
+          <a:ln>
+            <a:noFill/>
+          </a:ln>
+        </p:spPr>
+        <p:txBody>
+          <a:bodyPr wrap="square" lIns="0" tIns="18288" rIns="0" bIns="18288" rtlCol="0" anchor="ctr"/>
+          <a:lstStyle/>
+          <a:p>
+            <a:pPr algn="ctr"/>
+            <a:r>
+              <a:rPr sz="1200" b="1" i="0">
+                <a:solidFill>
+                  <a:srgbClr val="FFFFFF"/>
+                </a:solidFill>
+              </a:rPr>
+              <a:t>5</a:t>
+            </a:r>
+            <a:endParaRPr sz="1200"/>
+          </a:p>
+        </p:txBody>
+      </p:sp>
+      <p:sp>
+        <p:nvSpPr>
+          <p:cNvPr id="17" name="Oval 16"/>
+          <p:cNvSpPr/>
+          <p:nvPr/>
+        </p:nvSpPr>
+        <p:spPr>
+          <a:xfrm>
+            <a:off x="10277855" y="1815084"/>
+            <a:ext cx="292608" cy="292608"/>
+          </a:xfrm>
+          <a:prstGeom prst="ellipse">
+            <a:avLst/>
+          </a:prstGeom>
+          <a:solidFill>
+            <a:srgbClr val="B88C00"/>
+          </a:solidFill>
+          <a:ln>
+            <a:noFill/>
+          </a:ln>
+        </p:spPr>
+        <p:txBody>
+          <a:bodyPr wrap="square" lIns="0" tIns="18288" rIns="0" bIns="18288" rtlCol="0" anchor="ctr"/>
+          <a:lstStyle/>
+          <a:p>
+            <a:pPr algn="ctr"/>
+            <a:r>
+              <a:rPr sz="1200" b="1" i="0">
+                <a:solidFill>
+                  <a:srgbClr val="FFFFFF"/>
+                </a:solidFill>
+              </a:rPr>
+              <a:t>6</a:t>
+            </a:r>
+            <a:endParaRPr sz="1200"/>
+          </a:p>
+        </p:txBody>
+      </p:sp>
+      <p:sp>
+        <p:nvSpPr>
+          <p:cNvPr id="18" name="Oval 17"/>
+          <p:cNvSpPr/>
+          <p:nvPr/>
+        </p:nvSpPr>
+        <p:spPr>
+          <a:xfrm>
+            <a:off x="6720840" y="2660904"/>
+            <a:ext cx="292608" cy="292608"/>
+          </a:xfrm>
+          <a:prstGeom prst="ellipse">
+            <a:avLst/>
+          </a:prstGeom>
+          <a:solidFill>
+            <a:srgbClr val="B88C00"/>
+          </a:solidFill>
+          <a:ln>
+            <a:noFill/>
+          </a:ln>
+        </p:spPr>
+        <p:txBody>
+          <a:bodyPr wrap="square" lIns="0" tIns="18288" rIns="0" bIns="18288" rtlCol="0" anchor="ctr"/>
+          <a:lstStyle/>
+          <a:p>
+            <a:pPr algn="ctr"/>
+            <a:r>
+              <a:rPr sz="1200" b="1" i="0">
+                <a:solidFill>
+                  <a:srgbClr val="FFFFFF"/>
+                </a:solidFill>
+              </a:rPr>
+              <a:t>1</a:t>
+            </a:r>
+            <a:endParaRPr sz="1200"/>
+          </a:p>
+        </p:txBody>
+      </p:sp>
+      <p:sp>
+        <p:nvSpPr>
+          <p:cNvPr id="19" name="TextBox 18"/>
+          <p:cNvSpPr txBox="1"/>
+          <p:nvPr/>
+        </p:nvSpPr>
+        <p:spPr>
+          <a:xfrm>
+            <a:off x="7132320" y="2542032"/>
+            <a:ext cx="4233672" cy="530352"/>
+          </a:xfrm>
+          <a:prstGeom prst="rect">
+            <a:avLst/>
+          </a:prstGeom>
+          <a:noFill/>
+        </p:spPr>
+        <p:txBody>
+          <a:bodyPr wrap="square" lIns="0" tIns="0" rIns="0" bIns="0" anchor="ctr">
+            <a:spAutoFit/>
+          </a:bodyPr>
+          <a:lstStyle/>
+          <a:p>
+            <a:pPr algn="l"/>
+            <a:r>
+              <a:rPr sz="1300" b="0" i="0">
+                <a:solidFill>
+                  <a:srgbClr val="1F2A33"/>
+                </a:solidFill>
+              </a:rPr>
+              <a:t>Rows: the outcome, trust from 0 to 10</a:t>
+            </a:r>
+            <a:endParaRPr sz="1300"/>
+          </a:p>
+        </p:txBody>
+      </p:sp>
+      <p:sp>
+        <p:nvSpPr>
+          <p:cNvPr id="20" name="Oval 19"/>
+          <p:cNvSpPr/>
+          <p:nvPr/>
+        </p:nvSpPr>
+        <p:spPr>
+          <a:xfrm>
+            <a:off x="6720840" y="3191256"/>
+            <a:ext cx="292608" cy="292608"/>
+          </a:xfrm>
+          <a:prstGeom prst="ellipse">
+            <a:avLst/>
+          </a:prstGeom>
+          <a:solidFill>
+            <a:srgbClr val="B88C00"/>
+          </a:solidFill>
+          <a:ln>
+            <a:noFill/>
+          </a:ln>
+        </p:spPr>
+        <p:txBody>
+          <a:bodyPr wrap="square" lIns="0" tIns="18288" rIns="0" bIns="18288" rtlCol="0" anchor="ctr"/>
+          <a:lstStyle/>
+          <a:p>
+            <a:pPr algn="ctr"/>
+            <a:r>
+              <a:rPr sz="1200" b="1" i="0">
+                <a:solidFill>
+                  <a:srgbClr val="FFFFFF"/>
+                </a:solidFill>
+              </a:rPr>
+              <a:t>2</a:t>
+            </a:r>
+            <a:endParaRPr sz="1200"/>
+          </a:p>
+        </p:txBody>
+      </p:sp>
+      <p:sp>
+        <p:nvSpPr>
+          <p:cNvPr id="21" name="TextBox 20"/>
+          <p:cNvSpPr txBox="1"/>
+          <p:nvPr/>
+        </p:nvSpPr>
+        <p:spPr>
+          <a:xfrm>
+            <a:off x="7132320" y="3072384"/>
+            <a:ext cx="4233672" cy="530352"/>
+          </a:xfrm>
+          <a:prstGeom prst="rect">
+            <a:avLst/>
+          </a:prstGeom>
+          <a:noFill/>
+        </p:spPr>
+        <p:txBody>
+          <a:bodyPr wrap="square" lIns="0" tIns="0" rIns="0" bIns="0" anchor="ctr">
+            <a:spAutoFit/>
+          </a:bodyPr>
+          <a:lstStyle/>
+          <a:p>
+            <a:pPr algn="l"/>
+            <a:r>
+              <a:rPr sz="1300" b="0" i="0">
+                <a:solidFill>
+                  <a:srgbClr val="1F2A33"/>
+                </a:solidFill>
+              </a:rPr>
+              <a:t>Columns: the groups being compared, men and women</a:t>
+            </a:r>
+            <a:endParaRPr sz="1300"/>
+          </a:p>
+        </p:txBody>
+      </p:sp>
+      <p:sp>
+        <p:nvSpPr>
+          <p:cNvPr id="22" name="Oval 21"/>
+          <p:cNvSpPr/>
+          <p:nvPr/>
+        </p:nvSpPr>
+        <p:spPr>
+          <a:xfrm>
+            <a:off x="6720840" y="3721608"/>
+            <a:ext cx="292608" cy="292608"/>
+          </a:xfrm>
+          <a:prstGeom prst="ellipse">
+            <a:avLst/>
+          </a:prstGeom>
+          <a:solidFill>
+            <a:srgbClr val="B88C00"/>
+          </a:solidFill>
+          <a:ln>
+            <a:noFill/>
+          </a:ln>
+        </p:spPr>
+        <p:txBody>
+          <a:bodyPr wrap="square" lIns="0" tIns="18288" rIns="0" bIns="18288" rtlCol="0" anchor="ctr"/>
+          <a:lstStyle/>
+          <a:p>
+            <a:pPr algn="ctr"/>
+            <a:r>
+              <a:rPr sz="1200" b="1" i="0">
+                <a:solidFill>
+                  <a:srgbClr val="FFFFFF"/>
+                </a:solidFill>
+              </a:rPr>
+              <a:t>3</a:t>
+            </a:r>
+            <a:endParaRPr sz="1200"/>
+          </a:p>
+        </p:txBody>
+      </p:sp>
+      <p:sp>
+        <p:nvSpPr>
+          <p:cNvPr id="23" name="TextBox 22"/>
+          <p:cNvSpPr txBox="1"/>
+          <p:nvPr/>
+        </p:nvSpPr>
+        <p:spPr>
+          <a:xfrm>
+            <a:off x="7132320" y="3602736"/>
+            <a:ext cx="4233672" cy="530352"/>
+          </a:xfrm>
+          <a:prstGeom prst="rect">
+            <a:avLst/>
+          </a:prstGeom>
+          <a:noFill/>
+        </p:spPr>
+        <p:txBody>
+          <a:bodyPr wrap="square" lIns="0" tIns="0" rIns="0" bIns="0" anchor="ctr">
+            <a:spAutoFit/>
+          </a:bodyPr>
+          <a:lstStyle/>
+          <a:p>
+            <a:pPr algn="l"/>
+            <a:r>
+              <a:rPr sz="1300" b="0" i="0">
+                <a:solidFill>
+                  <a:srgbClr val="1F2A33"/>
+                </a:solidFill>
+              </a:rPr>
+              <a:t>Column percentages: each column adds up to 100%, so compare along a row</a:t>
+            </a:r>
+            <a:endParaRPr sz="1300"/>
+          </a:p>
+        </p:txBody>
+      </p:sp>
+      <p:sp>
+        <p:nvSpPr>
+          <p:cNvPr id="24" name="Oval 23"/>
+          <p:cNvSpPr/>
+          <p:nvPr/>
+        </p:nvSpPr>
+        <p:spPr>
+          <a:xfrm>
+            <a:off x="6720840" y="4251959"/>
+            <a:ext cx="292608" cy="292608"/>
+          </a:xfrm>
+          <a:prstGeom prst="ellipse">
+            <a:avLst/>
+          </a:prstGeom>
+          <a:solidFill>
+            <a:srgbClr val="B88C00"/>
+          </a:solidFill>
+          <a:ln>
+            <a:noFill/>
+          </a:ln>
+        </p:spPr>
+        <p:txBody>
+          <a:bodyPr wrap="square" lIns="0" tIns="18288" rIns="0" bIns="18288" rtlCol="0" anchor="ctr"/>
+          <a:lstStyle/>
+          <a:p>
+            <a:pPr algn="ctr"/>
+            <a:r>
+              <a:rPr sz="1200" b="1" i="0">
+                <a:solidFill>
+                  <a:srgbClr val="FFFFFF"/>
+                </a:solidFill>
+              </a:rPr>
+              <a:t>4</a:t>
+            </a:r>
+            <a:endParaRPr sz="1200"/>
+          </a:p>
+        </p:txBody>
+      </p:sp>
+      <p:sp>
+        <p:nvSpPr>
+          <p:cNvPr id="25" name="TextBox 24"/>
+          <p:cNvSpPr txBox="1"/>
+          <p:nvPr/>
+        </p:nvSpPr>
+        <p:spPr>
+          <a:xfrm>
+            <a:off x="7132320" y="4133087"/>
+            <a:ext cx="4233672" cy="530352"/>
+          </a:xfrm>
+          <a:prstGeom prst="rect">
+            <a:avLst/>
+          </a:prstGeom>
+          <a:noFill/>
+        </p:spPr>
+        <p:txBody>
+          <a:bodyPr wrap="square" lIns="0" tIns="0" rIns="0" bIns="0" anchor="ctr">
+            <a:spAutoFit/>
+          </a:bodyPr>
+          <a:lstStyle/>
+          <a:p>
+            <a:pPr algn="l"/>
+            <a:r>
+              <a:rPr sz="1300" b="0" i="0">
+                <a:solidFill>
+                  <a:srgbClr val="1F2A33"/>
+                </a:solidFill>
+              </a:rPr>
+              <a:t>Total: everyone together, the distribution from Week 1</a:t>
+            </a:r>
+            <a:endParaRPr sz="1300"/>
+          </a:p>
+        </p:txBody>
+      </p:sp>
+      <p:sp>
+        <p:nvSpPr>
+          <p:cNvPr id="26" name="Oval 25"/>
+          <p:cNvSpPr/>
+          <p:nvPr/>
+        </p:nvSpPr>
+        <p:spPr>
+          <a:xfrm>
+            <a:off x="6720840" y="4782312"/>
+            <a:ext cx="292608" cy="292608"/>
+          </a:xfrm>
+          <a:prstGeom prst="ellipse">
+            <a:avLst/>
+          </a:prstGeom>
+          <a:solidFill>
+            <a:srgbClr val="B88C00"/>
+          </a:solidFill>
+          <a:ln>
+            <a:noFill/>
+          </a:ln>
+        </p:spPr>
+        <p:txBody>
+          <a:bodyPr wrap="square" lIns="0" tIns="18288" rIns="0" bIns="18288" rtlCol="0" anchor="ctr"/>
+          <a:lstStyle/>
+          <a:p>
+            <a:pPr algn="ctr"/>
+            <a:r>
+              <a:rPr sz="1200" b="1" i="0">
+                <a:solidFill>
+                  <a:srgbClr val="FFFFFF"/>
+                </a:solidFill>
+              </a:rPr>
+              <a:t>5</a:t>
+            </a:r>
+            <a:endParaRPr sz="1200"/>
+          </a:p>
+        </p:txBody>
+      </p:sp>
+      <p:sp>
+        <p:nvSpPr>
+          <p:cNvPr id="27" name="TextBox 26"/>
+          <p:cNvSpPr txBox="1"/>
+          <p:nvPr/>
+        </p:nvSpPr>
+        <p:spPr>
+          <a:xfrm>
+            <a:off x="7132320" y="4663440"/>
+            <a:ext cx="4233672" cy="530352"/>
+          </a:xfrm>
+          <a:prstGeom prst="rect">
+            <a:avLst/>
+          </a:prstGeom>
+          <a:noFill/>
+        </p:spPr>
+        <p:txBody>
+          <a:bodyPr wrap="square" lIns="0" tIns="0" rIns="0" bIns="0" anchor="ctr">
+            <a:spAutoFit/>
+          </a:bodyPr>
+          <a:lstStyle/>
+          <a:p>
+            <a:pPr algn="l"/>
+            <a:r>
+              <a:rPr sz="1300" b="0" i="0">
+                <a:solidFill>
+                  <a:srgbClr val="1F2A33"/>
+                </a:solidFill>
+              </a:rPr>
+              <a:t>Read groups of rows: 40% of men and 36% of women answered 7 or more</a:t>
+            </a:r>
+            <a:endParaRPr sz="1300"/>
+          </a:p>
+        </p:txBody>
+      </p:sp>
+      <p:sp>
+        <p:nvSpPr>
+          <p:cNvPr id="28" name="Oval 27"/>
+          <p:cNvSpPr/>
+          <p:nvPr/>
+        </p:nvSpPr>
+        <p:spPr>
+          <a:xfrm>
+            <a:off x="6720840" y="5312664"/>
+            <a:ext cx="292608" cy="292608"/>
+          </a:xfrm>
+          <a:prstGeom prst="ellipse">
+            <a:avLst/>
+          </a:prstGeom>
+          <a:solidFill>
+            <a:srgbClr val="B88C00"/>
+          </a:solidFill>
+          <a:ln>
+            <a:noFill/>
+          </a:ln>
+        </p:spPr>
+        <p:txBody>
+          <a:bodyPr wrap="square" lIns="0" tIns="18288" rIns="0" bIns="18288" rtlCol="0" anchor="ctr"/>
+          <a:lstStyle/>
+          <a:p>
+            <a:pPr algn="ctr"/>
+            <a:r>
+              <a:rPr sz="1200" b="1" i="0">
+                <a:solidFill>
+                  <a:srgbClr val="FFFFFF"/>
+                </a:solidFill>
+              </a:rPr>
+              <a:t>6</a:t>
+            </a:r>
+            <a:endParaRPr sz="1200"/>
+          </a:p>
+        </p:txBody>
+      </p:sp>
+      <p:sp>
+        <p:nvSpPr>
+          <p:cNvPr id="29" name="TextBox 28"/>
+          <p:cNvSpPr txBox="1"/>
+          <p:nvPr/>
+        </p:nvSpPr>
+        <p:spPr>
+          <a:xfrm>
+            <a:off x="7132320" y="5193792"/>
+            <a:ext cx="4233672" cy="530352"/>
+          </a:xfrm>
+          <a:prstGeom prst="rect">
+            <a:avLst/>
+          </a:prstGeom>
+          <a:noFill/>
+        </p:spPr>
+        <p:txBody>
+          <a:bodyPr wrap="square" lIns="0" tIns="0" rIns="0" bIns="0" anchor="ctr">
+            <a:spAutoFit/>
+          </a:bodyPr>
+          <a:lstStyle/>
+          <a:p>
+            <a:pPr algn="l"/>
+            <a:r>
+              <a:rPr sz="1300" b="0" i="0">
+                <a:solidFill>
+                  <a:srgbClr val="1F2A33"/>
+                </a:solidFill>
+              </a:rPr>
+              <a:t>Chi-squared test: could a difference like this arise by chance? (Week 5)</a:t>
+            </a:r>
+            <a:endParaRPr sz="1300"/>
+          </a:p>
+        </p:txBody>
+      </p:sp>
+      <p:sp>
+        <p:nvSpPr>
+          <p:cNvPr id="30" name="TextBox 29"/>
+          <p:cNvSpPr txBox="1"/>
+          <p:nvPr/>
+        </p:nvSpPr>
+        <p:spPr>
+          <a:xfrm>
+            <a:off x="758952" y="5943600"/>
+            <a:ext cx="10607040" cy="292608"/>
+          </a:xfrm>
+          <a:prstGeom prst="rect">
+            <a:avLst/>
+          </a:prstGeom>
+          <a:noFill/>
+        </p:spPr>
+        <p:txBody>
+          <a:bodyPr wrap="square" lIns="0" tIns="0" rIns="0" bIns="0" anchor="ctr">
+            <a:spAutoFit/>
+          </a:bodyPr>
+          <a:lstStyle/>
+          <a:p>
+            <a:pPr algn="l"/>
+            <a:r>
+              <a:rPr sz="1200" b="0" i="0">
+                <a:solidFill>
+                  <a:srgbClr val="55606B"/>
+                </a:solidFill>
+              </a:rPr>
+              <a:t>Data: ESS Round 11 (2023–24), UK, n = 1,680. JASP: Contingency Tables; ppltrst in Rows, gndr in Columns; Cells: column percentages only.</a:t>
+            </a:r>
+            <a:endParaRPr sz="1200"/>
+          </a:p>
+        </p:txBody>
+      </p:sp>
+    </p:spTree>
+  </p:cSld>
+  <p:clrMapOvr>
+    <a:masterClrMapping/>
+  </p:clrMapOvr>
+</p:sld>
+</file>
+
+<file path=ppt/slides/slide15.xml><?xml version="1.0" encoding="utf-8"?>
+<p:sld xmlns:a="http://schemas.openxmlformats.org/drawingml/2006/main" xmlns:r="http://schemas.openxmlformats.org/officeDocument/2006/relationships" xmlns:p="http://schemas.openxmlformats.org/presentationml/2006/main">
+  <p:cSld>
     <p:bg>
       <p:bgPr>
         <a:blipFill>
@@ -35880,7 +39453,7 @@
           <a:p>
             <a:fld id="{9FAA51BB-2FC0-4DB8-B50E-F52D50E733B6}" type="slidenum">
               <a:rPr lang="en-GB" smtClean="0"/>
-              <a:t>14</a:t>
+              <a:t>15</a:t>
             </a:fld>
             <a:endParaRPr lang="en-GB"/>
           </a:p>
@@ -36835,7 +40408,7 @@
 </p:sld>
 </file>
 
-<file path=ppt/slides/slide15.xml><?xml version="1.0" encoding="utf-8"?>
+<file path=ppt/slides/slide16.xml><?xml version="1.0" encoding="utf-8"?>
 <p:sld xmlns:a="http://schemas.openxmlformats.org/drawingml/2006/main" xmlns:r="http://schemas.openxmlformats.org/officeDocument/2006/relationships" xmlns:p="http://schemas.openxmlformats.org/presentationml/2006/main" show="0">
   <p:cSld>
     <p:bg>
@@ -36962,7 +40535,7 @@
           <a:p>
             <a:fld id="{9FAA51BB-2FC0-4DB8-B50E-F52D50E733B6}" type="slidenum">
               <a:rPr lang="en-GB" smtClean="0"/>
-              <a:t>15</a:t>
+              <a:t>16</a:t>
             </a:fld>
             <a:endParaRPr lang="en-GB"/>
           </a:p>
@@ -37961,167 +41534,6 @@
 </p:sld>
 </file>
 
-<file path=ppt/slides/slide16.xml><?xml version="1.0" encoding="utf-8"?>
-<p:sld xmlns:a="http://schemas.openxmlformats.org/drawingml/2006/main" xmlns:r="http://schemas.openxmlformats.org/officeDocument/2006/relationships" xmlns:p="http://schemas.openxmlformats.org/presentationml/2006/main">
-  <p:cSld>
-    <p:spTree>
-      <p:nvGrpSpPr>
-        <p:cNvPr id="1" name=""/>
-        <p:cNvGrpSpPr/>
-        <p:nvPr/>
-      </p:nvGrpSpPr>
-      <p:grpSpPr>
-        <a:xfrm>
-          <a:off x="0" y="0"/>
-          <a:ext cx="0" cy="0"/>
-          <a:chOff x="0" y="0"/>
-          <a:chExt cx="0" cy="0"/>
-        </a:xfrm>
-      </p:grpSpPr>
-      <p:sp>
-        <p:nvSpPr>
-          <p:cNvPr id="2" name="Title 1"/>
-          <p:cNvSpPr>
-            <a:spLocks noGrp="1"/>
-          </p:cNvSpPr>
-          <p:nvPr>
-            <p:ph type="title"/>
-          </p:nvPr>
-        </p:nvSpPr>
-        <p:spPr/>
-        <p:txBody>
-          <a:bodyPr/>
-          <a:lstStyle/>
-          <a:p>
-            <a:r>
-              <a:rPr sz="4000"/>
-              <a:t>A categorical and</a:t>
-            </a:r>
-          </a:p>
-          <a:p>
-            <a:r>
-              <a:rPr sz="4000"/>
-              <a:t>a scale variable</a:t>
-            </a:r>
-          </a:p>
-        </p:txBody>
-      </p:sp>
-      <p:sp>
-        <p:nvSpPr>
-          <p:cNvPr id="3" name="Text Placeholder 2"/>
-          <p:cNvSpPr>
-            <a:spLocks noGrp="1"/>
-          </p:cNvSpPr>
-          <p:nvPr>
-            <p:ph type="body" sz="half" idx="2"/>
-          </p:nvPr>
-        </p:nvSpPr>
-        <p:spPr/>
-        <p:txBody>
-          <a:bodyPr/>
-          <a:lstStyle/>
-          <a:p>
-            <a:r>
-              <a:rPr sz="2400"/>
-              <a:t>Comparing groups</a:t>
-            </a:r>
-          </a:p>
-        </p:txBody>
-      </p:sp>
-      <p:sp>
-        <p:nvSpPr>
-          <p:cNvPr id="4" name="Date Placeholder 1">
-            <a:extLst>
-              <a:ext uri="{FF2B5EF4-FFF2-40B4-BE49-F238E27FC236}">
-                <a16:creationId xmlns:a16="http://schemas.microsoft.com/office/drawing/2014/main" id="{BFF50875-77B6-7B50-6789-FC1B56491CC3}"/>
-              </a:ext>
-            </a:extLst>
-          </p:cNvPr>
-          <p:cNvSpPr>
-            <a:spLocks noGrp="1"/>
-          </p:cNvSpPr>
-          <p:nvPr>
-            <p:ph type="dt" sz="half" idx="10"/>
-          </p:nvPr>
-        </p:nvSpPr>
-        <p:spPr/>
-        <p:txBody>
-          <a:bodyPr/>
-          <a:lstStyle/>
-          <a:p>
-            <a:fld id="{FA72AB8D-F27B-45C4-A3C3-1397CC759085}" type="datetimeyyyy">
-              <a:rPr lang="en-US" smtClean="0"/>
-              <a:t>2026</a:t>
-            </a:fld>
-            <a:endParaRPr lang="en-GB"/>
-          </a:p>
-        </p:txBody>
-      </p:sp>
-      <p:sp>
-        <p:nvSpPr>
-          <p:cNvPr id="5" name="Footer Placeholder 4">
-            <a:extLst>
-              <a:ext uri="{FF2B5EF4-FFF2-40B4-BE49-F238E27FC236}">
-                <a16:creationId xmlns:a16="http://schemas.microsoft.com/office/drawing/2014/main" id="{DE0B2AC9-C062-ACDA-78EB-2E5B2DF3BA3F}"/>
-              </a:ext>
-            </a:extLst>
-          </p:cNvPr>
-          <p:cNvSpPr>
-            <a:spLocks noGrp="1"/>
-          </p:cNvSpPr>
-          <p:nvPr>
-            <p:ph type="ftr" sz="quarter" idx="11"/>
-          </p:nvPr>
-        </p:nvSpPr>
-        <p:spPr/>
-        <p:txBody>
-          <a:bodyPr/>
-          <a:lstStyle/>
-          <a:p>
-            <a:r>
-              <a:rPr lang="en-GB"/>
-              <a:t>Comparisons and Associations</a:t>
-            </a:r>
-          </a:p>
-        </p:txBody>
-      </p:sp>
-      <p:sp>
-        <p:nvSpPr>
-          <p:cNvPr id="6" name="Slide Number Placeholder 5">
-            <a:extLst>
-              <a:ext uri="{FF2B5EF4-FFF2-40B4-BE49-F238E27FC236}">
-                <a16:creationId xmlns:a16="http://schemas.microsoft.com/office/drawing/2014/main" id="{63AA58D7-3FC7-1868-4188-EE9D3329FE70}"/>
-              </a:ext>
-            </a:extLst>
-          </p:cNvPr>
-          <p:cNvSpPr>
-            <a:spLocks noGrp="1"/>
-          </p:cNvSpPr>
-          <p:nvPr>
-            <p:ph type="sldNum" sz="quarter" idx="12"/>
-          </p:nvPr>
-        </p:nvSpPr>
-        <p:spPr/>
-        <p:txBody>
-          <a:bodyPr/>
-          <a:lstStyle/>
-          <a:p>
-            <a:fld id="{9FAA51BB-2FC0-4DB8-B50E-F52D50E733B6}" type="slidenum">
-              <a:rPr lang="en-GB" smtClean="0"/>
-              <a:t>16</a:t>
-            </a:fld>
-            <a:endParaRPr lang="en-GB"/>
-          </a:p>
-        </p:txBody>
-      </p:sp>
-    </p:spTree>
-  </p:cSld>
-  <p:clrMapOvr>
-    <a:masterClrMapping/>
-  </p:clrMapOvr>
-</p:sld>
-</file>
-
 <file path=ppt/slides/slide17.xml><?xml version="1.0" encoding="utf-8"?>
 <p:sld xmlns:a="http://schemas.openxmlformats.org/drawingml/2006/main" xmlns:r="http://schemas.openxmlformats.org/officeDocument/2006/relationships" xmlns:p="http://schemas.openxmlformats.org/presentationml/2006/main">
   <p:cSld>
@@ -38155,13 +41567,66 @@
           <a:lstStyle/>
           <a:p>
             <a:r>
-              <a:rPr lang="en-GB" sz="3400" dirty="0"/>
-              <a:t>Recall</a:t>
+              <a:rPr sz="4000"/>
+              <a:t>A categorical and</a:t>
             </a:r>
+          </a:p>
+          <a:p>
             <a:r>
-              <a:rPr sz="3400" dirty="0"/>
-              <a:t>: mean, median and mode</a:t>
+              <a:rPr sz="4000"/>
+              <a:t>a scale variable</a:t>
             </a:r>
+          </a:p>
+        </p:txBody>
+      </p:sp>
+      <p:sp>
+        <p:nvSpPr>
+          <p:cNvPr id="3" name="Text Placeholder 2"/>
+          <p:cNvSpPr>
+            <a:spLocks noGrp="1"/>
+          </p:cNvSpPr>
+          <p:nvPr>
+            <p:ph type="body" sz="half" idx="2"/>
+          </p:nvPr>
+        </p:nvSpPr>
+        <p:spPr/>
+        <p:txBody>
+          <a:bodyPr/>
+          <a:lstStyle/>
+          <a:p>
+            <a:r>
+              <a:rPr sz="2400"/>
+              <a:t>Comparing groups</a:t>
+            </a:r>
+          </a:p>
+        </p:txBody>
+      </p:sp>
+      <p:sp>
+        <p:nvSpPr>
+          <p:cNvPr id="4" name="Date Placeholder 1">
+            <a:extLst>
+              <a:ext uri="{FF2B5EF4-FFF2-40B4-BE49-F238E27FC236}">
+                <a16:creationId xmlns:a16="http://schemas.microsoft.com/office/drawing/2014/main" id="{BFF50875-77B6-7B50-6789-FC1B56491CC3}"/>
+              </a:ext>
+            </a:extLst>
+          </p:cNvPr>
+          <p:cNvSpPr>
+            <a:spLocks noGrp="1"/>
+          </p:cNvSpPr>
+          <p:nvPr>
+            <p:ph type="dt" sz="half" idx="10"/>
+          </p:nvPr>
+        </p:nvSpPr>
+        <p:spPr/>
+        <p:txBody>
+          <a:bodyPr/>
+          <a:lstStyle/>
+          <a:p>
+            <a:fld id="{FA72AB8D-F27B-45C4-A3C3-1397CC759085}" type="datetimeyyyy">
+              <a:rPr lang="en-US" smtClean="0"/>
+              <a:t>2026</a:t>
+            </a:fld>
+            <a:endParaRPr lang="en-GB"/>
           </a:p>
         </p:txBody>
       </p:sp>
@@ -38170,7 +41635,7 @@
           <p:cNvPr id="5" name="Footer Placeholder 4">
             <a:extLst>
               <a:ext uri="{FF2B5EF4-FFF2-40B4-BE49-F238E27FC236}">
-                <a16:creationId xmlns:a16="http://schemas.microsoft.com/office/drawing/2014/main" id="{6772CAAB-9C32-D830-FF00-86600C487E94}"/>
+                <a16:creationId xmlns:a16="http://schemas.microsoft.com/office/drawing/2014/main" id="{DE0B2AC9-C062-ACDA-78EB-2E5B2DF3BA3F}"/>
               </a:ext>
             </a:extLst>
           </p:cNvPr>
@@ -38188,7 +41653,7 @@
           <a:p>
             <a:r>
               <a:rPr lang="en-GB"/>
-              <a:t>Measurement and Description</a:t>
+              <a:t>Comparisons and Associations</a:t>
             </a:r>
           </a:p>
         </p:txBody>
@@ -38198,7 +41663,7 @@
           <p:cNvPr id="6" name="Slide Number Placeholder 5">
             <a:extLst>
               <a:ext uri="{FF2B5EF4-FFF2-40B4-BE49-F238E27FC236}">
-                <a16:creationId xmlns:a16="http://schemas.microsoft.com/office/drawing/2014/main" id="{953B9D79-309D-D507-17FF-67827394EFDB}"/>
+                <a16:creationId xmlns:a16="http://schemas.microsoft.com/office/drawing/2014/main" id="{63AA58D7-3FC7-1868-4188-EE9D3329FE70}"/>
               </a:ext>
             </a:extLst>
           </p:cNvPr>
@@ -38219,349 +41684,6 @@
               <a:t>17</a:t>
             </a:fld>
             <a:endParaRPr lang="en-GB"/>
-          </a:p>
-        </p:txBody>
-      </p:sp>
-      <p:graphicFrame>
-        <p:nvGraphicFramePr>
-          <p:cNvPr id="7" name="ppltrst centre chart"/>
-          <p:cNvGraphicFramePr>
-            <a:graphicFrameLocks noGrp="1"/>
-          </p:cNvGraphicFramePr>
-          <p:nvPr/>
-        </p:nvGraphicFramePr>
-        <p:xfrm>
-          <a:off x="758952" y="1280160"/>
-          <a:ext cx="6949440" cy="4480560"/>
-        </p:xfrm>
-        <a:graphic>
-          <a:graphicData uri="http://schemas.openxmlformats.org/drawingml/2006/chart">
-            <c:chart xmlns:c="http://schemas.openxmlformats.org/drawingml/2006/chart" xmlns:r="http://schemas.openxmlformats.org/officeDocument/2006/relationships" r:id="rId3"/>
-          </a:graphicData>
-        </a:graphic>
-      </p:graphicFrame>
-      <p:sp>
-        <p:nvSpPr>
-          <p:cNvPr id="8" name="Rounded Rectangle 7"/>
-          <p:cNvSpPr/>
-          <p:nvPr/>
-        </p:nvSpPr>
-        <p:spPr>
-          <a:xfrm>
-            <a:off x="8001000" y="1371600"/>
-            <a:ext cx="3364992" cy="868680"/>
-          </a:xfrm>
-          <a:prstGeom prst="roundRect">
-            <a:avLst>
-              <a:gd name="adj" fmla="val 8000"/>
-            </a:avLst>
-          </a:prstGeom>
-          <a:solidFill>
-            <a:srgbClr val="EEF3F7"/>
-          </a:solidFill>
-          <a:ln>
-            <a:noFill/>
-          </a:ln>
-        </p:spPr>
-        <p:txBody>
-          <a:bodyPr rtlCol="0" anchor="ctr"/>
-          <a:lstStyle/>
-          <a:p>
-            <a:endParaRPr/>
-          </a:p>
-        </p:txBody>
-      </p:sp>
-      <p:sp>
-        <p:nvSpPr>
-          <p:cNvPr id="9" name="TextBox 8"/>
-          <p:cNvSpPr txBox="1"/>
-          <p:nvPr/>
-        </p:nvSpPr>
-        <p:spPr>
-          <a:xfrm>
-            <a:off x="8183879" y="1517904"/>
-            <a:ext cx="2999232" cy="576071"/>
-          </a:xfrm>
-          <a:prstGeom prst="rect">
-            <a:avLst/>
-          </a:prstGeom>
-          <a:noFill/>
-        </p:spPr>
-        <p:txBody>
-          <a:bodyPr wrap="square" lIns="0" tIns="0" rIns="0" bIns="0" anchor="t">
-            <a:spAutoFit/>
-          </a:bodyPr>
-          <a:lstStyle/>
-          <a:p>
-            <a:pPr algn="l">
-              <a:spcAft>
-                <a:spcPts val="400"/>
-              </a:spcAft>
-            </a:pPr>
-            <a:r>
-              <a:rPr sz="2400" b="1" i="0">
-                <a:solidFill>
-                  <a:srgbClr val="1F394D"/>
-                </a:solidFill>
-              </a:rPr>
-              <a:t>Mean:  5.40</a:t>
-            </a:r>
-          </a:p>
-        </p:txBody>
-      </p:sp>
-      <p:sp>
-        <p:nvSpPr>
-          <p:cNvPr id="10" name="Rounded Rectangle 9"/>
-          <p:cNvSpPr/>
-          <p:nvPr/>
-        </p:nvSpPr>
-        <p:spPr>
-          <a:xfrm>
-            <a:off x="8001000" y="2377440"/>
-            <a:ext cx="3364992" cy="868680"/>
-          </a:xfrm>
-          <a:prstGeom prst="roundRect">
-            <a:avLst>
-              <a:gd name="adj" fmla="val 8000"/>
-            </a:avLst>
-          </a:prstGeom>
-          <a:solidFill>
-            <a:srgbClr val="EEF3F7"/>
-          </a:solidFill>
-          <a:ln>
-            <a:noFill/>
-          </a:ln>
-        </p:spPr>
-        <p:txBody>
-          <a:bodyPr rtlCol="0" anchor="ctr"/>
-          <a:lstStyle/>
-          <a:p>
-            <a:endParaRPr/>
-          </a:p>
-        </p:txBody>
-      </p:sp>
-      <p:sp>
-        <p:nvSpPr>
-          <p:cNvPr id="11" name="TextBox 10"/>
-          <p:cNvSpPr txBox="1"/>
-          <p:nvPr/>
-        </p:nvSpPr>
-        <p:spPr>
-          <a:xfrm>
-            <a:off x="8183879" y="2523744"/>
-            <a:ext cx="2999232" cy="576071"/>
-          </a:xfrm>
-          <a:prstGeom prst="rect">
-            <a:avLst/>
-          </a:prstGeom>
-          <a:noFill/>
-        </p:spPr>
-        <p:txBody>
-          <a:bodyPr wrap="square" lIns="0" tIns="0" rIns="0" bIns="0" anchor="t">
-            <a:spAutoFit/>
-          </a:bodyPr>
-          <a:lstStyle/>
-          <a:p>
-            <a:pPr algn="l">
-              <a:spcAft>
-                <a:spcPts val="400"/>
-              </a:spcAft>
-            </a:pPr>
-            <a:r>
-              <a:rPr sz="2400" b="1" i="0">
-                <a:solidFill>
-                  <a:srgbClr val="3F739B"/>
-                </a:solidFill>
-              </a:rPr>
-              <a:t>Median:  6</a:t>
-            </a:r>
-          </a:p>
-        </p:txBody>
-      </p:sp>
-      <p:sp>
-        <p:nvSpPr>
-          <p:cNvPr id="12" name="Rounded Rectangle 11"/>
-          <p:cNvSpPr/>
-          <p:nvPr/>
-        </p:nvSpPr>
-        <p:spPr>
-          <a:xfrm>
-            <a:off x="8001000" y="3383280"/>
-            <a:ext cx="3364992" cy="868680"/>
-          </a:xfrm>
-          <a:prstGeom prst="roundRect">
-            <a:avLst>
-              <a:gd name="adj" fmla="val 8000"/>
-            </a:avLst>
-          </a:prstGeom>
-          <a:solidFill>
-            <a:srgbClr val="EEF3F7"/>
-          </a:solidFill>
-          <a:ln>
-            <a:noFill/>
-          </a:ln>
-        </p:spPr>
-        <p:txBody>
-          <a:bodyPr rtlCol="0" anchor="ctr"/>
-          <a:lstStyle/>
-          <a:p>
-            <a:endParaRPr/>
-          </a:p>
-        </p:txBody>
-      </p:sp>
-      <p:sp>
-        <p:nvSpPr>
-          <p:cNvPr id="13" name="TextBox 12"/>
-          <p:cNvSpPr txBox="1"/>
-          <p:nvPr/>
-        </p:nvSpPr>
-        <p:spPr>
-          <a:xfrm>
-            <a:off x="8183879" y="3529584"/>
-            <a:ext cx="2999232" cy="576071"/>
-          </a:xfrm>
-          <a:prstGeom prst="rect">
-            <a:avLst/>
-          </a:prstGeom>
-          <a:noFill/>
-        </p:spPr>
-        <p:txBody>
-          <a:bodyPr wrap="square" lIns="0" tIns="0" rIns="0" bIns="0" anchor="t">
-            <a:spAutoFit/>
-          </a:bodyPr>
-          <a:lstStyle/>
-          <a:p>
-            <a:pPr algn="l">
-              <a:spcAft>
-                <a:spcPts val="400"/>
-              </a:spcAft>
-            </a:pPr>
-            <a:r>
-              <a:rPr sz="2400" b="1" i="0">
-                <a:solidFill>
-                  <a:srgbClr val="7A5C00"/>
-                </a:solidFill>
-              </a:rPr>
-              <a:t>Mode:  7</a:t>
-            </a:r>
-          </a:p>
-        </p:txBody>
-      </p:sp>
-      <p:sp>
-        <p:nvSpPr>
-          <p:cNvPr id="14" name="Rounded Rectangle 13"/>
-          <p:cNvSpPr/>
-          <p:nvPr/>
-        </p:nvSpPr>
-        <p:spPr>
-          <a:xfrm>
-            <a:off x="8001000" y="4434840"/>
-            <a:ext cx="3364992" cy="1371600"/>
-          </a:xfrm>
-          <a:prstGeom prst="roundRect">
-            <a:avLst>
-              <a:gd name="adj" fmla="val 8000"/>
-            </a:avLst>
-          </a:prstGeom>
-          <a:solidFill>
-            <a:srgbClr val="1F394D"/>
-          </a:solidFill>
-          <a:ln>
-            <a:noFill/>
-          </a:ln>
-        </p:spPr>
-        <p:txBody>
-          <a:bodyPr rtlCol="0" anchor="ctr"/>
-          <a:lstStyle/>
-          <a:p>
-            <a:endParaRPr/>
-          </a:p>
-        </p:txBody>
-      </p:sp>
-      <p:sp>
-        <p:nvSpPr>
-          <p:cNvPr id="15" name="TextBox 14"/>
-          <p:cNvSpPr txBox="1"/>
-          <p:nvPr/>
-        </p:nvSpPr>
-        <p:spPr>
-          <a:xfrm>
-            <a:off x="8202168" y="4595774"/>
-            <a:ext cx="2962656" cy="1049731"/>
-          </a:xfrm>
-          <a:prstGeom prst="rect">
-            <a:avLst/>
-          </a:prstGeom>
-          <a:noFill/>
-        </p:spPr>
-        <p:txBody>
-          <a:bodyPr wrap="square" lIns="0" tIns="0" rIns="0" bIns="0" anchor="t">
-            <a:spAutoFit/>
-          </a:bodyPr>
-          <a:lstStyle/>
-          <a:p>
-            <a:pPr algn="l">
-              <a:spcAft>
-                <a:spcPts val="400"/>
-              </a:spcAft>
-            </a:pPr>
-            <a:r>
-              <a:rPr sz="1800" b="1" i="0">
-                <a:solidFill>
-                  <a:srgbClr val="FFFFFF"/>
-                </a:solidFill>
-              </a:rPr>
-              <a:t>Slight left skew</a:t>
-            </a:r>
-          </a:p>
-          <a:p>
-            <a:pPr algn="l">
-              <a:spcAft>
-                <a:spcPts val="400"/>
-              </a:spcAft>
-            </a:pPr>
-            <a:r>
-              <a:rPr sz="1500" b="0" i="0">
-                <a:solidFill>
-                  <a:srgbClr val="CCDDEA"/>
-                </a:solidFill>
-              </a:rPr>
-              <a:t>A tail of low answers pulls the mean below the median.</a:t>
-            </a:r>
-          </a:p>
-        </p:txBody>
-      </p:sp>
-      <p:sp>
-        <p:nvSpPr>
-          <p:cNvPr id="16" name="TextBox 15"/>
-          <p:cNvSpPr txBox="1"/>
-          <p:nvPr/>
-        </p:nvSpPr>
-        <p:spPr>
-          <a:xfrm>
-            <a:off x="758952" y="5943600"/>
-            <a:ext cx="10607040" cy="292608"/>
-          </a:xfrm>
-          <a:prstGeom prst="rect">
-            <a:avLst/>
-          </a:prstGeom>
-          <a:noFill/>
-        </p:spPr>
-        <p:txBody>
-          <a:bodyPr wrap="square" lIns="0" tIns="0" rIns="0" bIns="0" anchor="ctr">
-            <a:spAutoFit/>
-          </a:bodyPr>
-          <a:lstStyle/>
-          <a:p>
-            <a:pPr algn="l"/>
-            <a:r>
-              <a:rPr sz="1200" b="0" i="0">
-                <a:solidFill>
-                  <a:srgbClr val="55606B"/>
-                </a:solidFill>
-              </a:rPr>
-              <a:t>Data: European Social Survey Round 11 (2023-24), UK sample, valid n = 1,680 (gb-ess11-trust.sav).</a:t>
-            </a:r>
           </a:p>
         </p:txBody>
       </p:sp>
@@ -38607,9 +41729,12 @@
           <a:p>
             <a:r>
               <a:rPr lang="en-GB" sz="3400" dirty="0"/>
-              <a:t>Recall: range and standard deviation</a:t>
+              <a:t>Recall</a:t>
             </a:r>
-            <a:endParaRPr sz="3400" dirty="0"/>
+            <a:r>
+              <a:rPr sz="3400" dirty="0"/>
+              <a:t>: mean, median and mode</a:t>
+            </a:r>
           </a:p>
         </p:txBody>
       </p:sp>
@@ -38672,7 +41797,7 @@
       </p:sp>
       <p:graphicFrame>
         <p:nvGraphicFramePr>
-          <p:cNvPr id="7" name="ESS age histogram"/>
+          <p:cNvPr id="7" name="ppltrst centre chart"/>
           <p:cNvGraphicFramePr>
             <a:graphicFrameLocks noGrp="1"/>
           </p:cNvGraphicFramePr>
@@ -38680,7 +41805,7 @@
         </p:nvGraphicFramePr>
         <p:xfrm>
           <a:off x="758952" y="1280160"/>
-          <a:ext cx="7498079" cy="4526280"/>
+          <a:ext cx="6949440" cy="4480560"/>
         </p:xfrm>
         <a:graphic>
           <a:graphicData uri="http://schemas.openxmlformats.org/drawingml/2006/chart">
@@ -38696,8 +41821,8 @@
         </p:nvSpPr>
         <p:spPr>
           <a:xfrm>
-            <a:off x="8549640" y="1371600"/>
-            <a:ext cx="2816352" cy="960120"/>
+            <a:off x="8001000" y="1371600"/>
+            <a:ext cx="3364992" cy="868680"/>
           </a:xfrm>
           <a:prstGeom prst="roundRect">
             <a:avLst>
@@ -38727,8 +41852,8 @@
         </p:nvSpPr>
         <p:spPr>
           <a:xfrm>
-            <a:off x="8714232" y="1503273"/>
-            <a:ext cx="2487168" cy="696772"/>
+            <a:off x="8183879" y="1517904"/>
+            <a:ext cx="2999232" cy="576071"/>
           </a:xfrm>
           <a:prstGeom prst="rect">
             <a:avLst/>
@@ -38752,22 +41877,7 @@
                   <a:srgbClr val="1F394D"/>
                 </a:solidFill>
               </a:rPr>
-              <a:t>53.6</a:t>
-            </a:r>
-          </a:p>
-          <a:p>
-            <a:pPr algn="l">
-              <a:spcAft>
-                <a:spcPts val="400"/>
-              </a:spcAft>
-            </a:pPr>
-            <a:r>
-              <a:rPr sz="1400" b="0" i="0">
-                <a:solidFill>
-                  <a:srgbClr val="1F2A33"/>
-                </a:solidFill>
-              </a:rPr>
-              <a:t>Mean age</a:t>
+              <a:t>Mean:  5.40</a:t>
             </a:r>
           </a:p>
         </p:txBody>
@@ -38780,8 +41890,8 @@
         </p:nvSpPr>
         <p:spPr>
           <a:xfrm>
-            <a:off x="8549640" y="2468880"/>
-            <a:ext cx="2816352" cy="960120"/>
+            <a:off x="8001000" y="2377440"/>
+            <a:ext cx="3364992" cy="868680"/>
           </a:xfrm>
           <a:prstGeom prst="roundRect">
             <a:avLst>
@@ -38811,8 +41921,8 @@
         </p:nvSpPr>
         <p:spPr>
           <a:xfrm>
-            <a:off x="8714232" y="2600553"/>
-            <a:ext cx="2487168" cy="696772"/>
+            <a:off x="8183879" y="2523744"/>
+            <a:ext cx="2999232" cy="576071"/>
           </a:xfrm>
           <a:prstGeom prst="rect">
             <a:avLst/>
@@ -38833,25 +41943,10 @@
             <a:r>
               <a:rPr sz="2400" b="1" i="0">
                 <a:solidFill>
-                  <a:srgbClr val="1F394D"/>
+                  <a:srgbClr val="3F739B"/>
                 </a:solidFill>
               </a:rPr>
-              <a:t>54</a:t>
-            </a:r>
-          </a:p>
-          <a:p>
-            <a:pPr algn="l">
-              <a:spcAft>
-                <a:spcPts val="400"/>
-              </a:spcAft>
-            </a:pPr>
-            <a:r>
-              <a:rPr sz="1400" b="0" i="0">
-                <a:solidFill>
-                  <a:srgbClr val="1F2A33"/>
-                </a:solidFill>
-              </a:rPr>
-              <a:t>Median age</a:t>
+              <a:t>Median:  6</a:t>
             </a:r>
           </a:p>
         </p:txBody>
@@ -38864,8 +41959,8 @@
         </p:nvSpPr>
         <p:spPr>
           <a:xfrm>
-            <a:off x="8549640" y="3566160"/>
-            <a:ext cx="2816352" cy="960120"/>
+            <a:off x="8001000" y="3383280"/>
+            <a:ext cx="3364992" cy="868680"/>
           </a:xfrm>
           <a:prstGeom prst="roundRect">
             <a:avLst>
@@ -38895,8 +41990,8 @@
         </p:nvSpPr>
         <p:spPr>
           <a:xfrm>
-            <a:off x="8714232" y="3697833"/>
-            <a:ext cx="2487168" cy="696772"/>
+            <a:off x="8183879" y="3529584"/>
+            <a:ext cx="2999232" cy="576071"/>
           </a:xfrm>
           <a:prstGeom prst="rect">
             <a:avLst/>
@@ -38917,25 +42012,10 @@
             <a:r>
               <a:rPr sz="2400" b="1" i="0">
                 <a:solidFill>
-                  <a:srgbClr val="1F394D"/>
+                  <a:srgbClr val="7A5C00"/>
                 </a:solidFill>
               </a:rPr>
-              <a:t>19.0</a:t>
-            </a:r>
-          </a:p>
-          <a:p>
-            <a:pPr algn="l">
-              <a:spcAft>
-                <a:spcPts val="400"/>
-              </a:spcAft>
-            </a:pPr>
-            <a:r>
-              <a:rPr sz="1400" b="0" i="0">
-                <a:solidFill>
-                  <a:srgbClr val="1F2A33"/>
-                </a:solidFill>
-              </a:rPr>
-              <a:t>Standard deviation</a:t>
+              <a:t>Mode:  7</a:t>
             </a:r>
           </a:p>
         </p:txBody>
@@ -38948,8 +42028,8 @@
         </p:nvSpPr>
         <p:spPr>
           <a:xfrm>
-            <a:off x="8549640" y="4663440"/>
-            <a:ext cx="2816352" cy="960120"/>
+            <a:off x="8001000" y="4434840"/>
+            <a:ext cx="3364992" cy="1371600"/>
           </a:xfrm>
           <a:prstGeom prst="roundRect">
             <a:avLst>
@@ -38957,7 +42037,7 @@
             </a:avLst>
           </a:prstGeom>
           <a:solidFill>
-            <a:srgbClr val="EEF3F7"/>
+            <a:srgbClr val="1F394D"/>
           </a:solidFill>
           <a:ln>
             <a:noFill/>
@@ -38979,8 +42059,8 @@
         </p:nvSpPr>
         <p:spPr>
           <a:xfrm>
-            <a:off x="8714232" y="4795113"/>
-            <a:ext cx="2487168" cy="696772"/>
+            <a:off x="8202168" y="4595774"/>
+            <a:ext cx="2962656" cy="1049731"/>
           </a:xfrm>
           <a:prstGeom prst="rect">
             <a:avLst/>
@@ -38999,12 +42079,12 @@
               </a:spcAft>
             </a:pPr>
             <a:r>
-              <a:rPr sz="2400" b="1" i="0">
+              <a:rPr sz="1800" b="1" i="0">
                 <a:solidFill>
-                  <a:srgbClr val="1F394D"/>
+                  <a:srgbClr val="FFFFFF"/>
                 </a:solidFill>
               </a:rPr>
-              <a:t>15 to 90</a:t>
+              <a:t>Slight left skew</a:t>
             </a:r>
           </a:p>
           <a:p>
@@ -39014,12 +42094,12 @@
               </a:spcAft>
             </a:pPr>
             <a:r>
-              <a:rPr sz="1400" b="0" i="0">
+              <a:rPr sz="1500" b="0" i="0">
                 <a:solidFill>
-                  <a:srgbClr val="1F2A33"/>
+                  <a:srgbClr val="CCDDEA"/>
                 </a:solidFill>
               </a:rPr>
-              <a:t>Range</a:t>
+              <a:t>A tail of low answers pulls the mean below the median.</a:t>
             </a:r>
           </a:p>
         </p:txBody>
@@ -39053,7 +42133,7 @@
                   <a:srgbClr val="55606B"/>
                 </a:solidFill>
               </a:rPr>
-              <a:t>Data: European Social Survey Round 11 (2023-24), UK sample, n = 1,647 with a valid age (agea).</a:t>
+              <a:t>Data: European Social Survey Round 11 (2023-24), UK sample, valid n = 1,680 (gb-ess11-trust.sav).</a:t>
             </a:r>
           </a:p>
         </p:txBody>
@@ -39100,16 +42180,9 @@
           <a:p>
             <a:r>
               <a:rPr lang="en-GB" sz="3400" dirty="0"/>
-              <a:t>Recall: s</a:t>
+              <a:t>Recall: range and standard deviation</a:t>
             </a:r>
-            <a:r>
-              <a:rPr sz="3400" dirty="0" err="1"/>
-              <a:t>ame</a:t>
-            </a:r>
-            <a:r>
-              <a:rPr sz="3400" dirty="0"/>
-              <a:t> average, very different societies</a:t>
-            </a:r>
+            <a:endParaRPr sz="3400" dirty="0"/>
           </a:p>
         </p:txBody>
       </p:sp>
@@ -39172,15 +42245,15 @@
       </p:sp>
       <p:graphicFrame>
         <p:nvGraphicFramePr>
-          <p:cNvPr id="7" name="Two towns chart"/>
+          <p:cNvPr id="7" name="ESS age histogram"/>
           <p:cNvGraphicFramePr>
             <a:graphicFrameLocks noGrp="1"/>
           </p:cNvGraphicFramePr>
           <p:nvPr/>
         </p:nvGraphicFramePr>
         <p:xfrm>
-          <a:off x="758952" y="1325880"/>
-          <a:ext cx="6766560" cy="4526280"/>
+          <a:off x="758952" y="1280160"/>
+          <a:ext cx="7498079" cy="4526280"/>
         </p:xfrm>
         <a:graphic>
           <a:graphicData uri="http://schemas.openxmlformats.org/drawingml/2006/chart">
@@ -39196,8 +42269,8 @@
         </p:nvSpPr>
         <p:spPr>
           <a:xfrm>
-            <a:off x="7772400" y="1371600"/>
-            <a:ext cx="3593592" cy="1325880"/>
+            <a:off x="8549640" y="1371600"/>
+            <a:ext cx="2816352" cy="960120"/>
           </a:xfrm>
           <a:prstGeom prst="roundRect">
             <a:avLst>
@@ -39227,8 +42300,8 @@
         </p:nvSpPr>
         <p:spPr>
           <a:xfrm>
-            <a:off x="7973568" y="1532534"/>
-            <a:ext cx="3191256" cy="1004011"/>
+            <a:off x="8714232" y="1503273"/>
+            <a:ext cx="2487168" cy="696772"/>
           </a:xfrm>
           <a:prstGeom prst="rect">
             <a:avLst/>
@@ -39247,12 +42320,12 @@
               </a:spcAft>
             </a:pPr>
             <a:r>
-              <a:rPr sz="1900" b="1" i="0">
+              <a:rPr sz="2400" b="1" i="0">
                 <a:solidFill>
                   <a:srgbClr val="1F394D"/>
                 </a:solidFill>
               </a:rPr>
-              <a:t>Range</a:t>
+              <a:t>53.6</a:t>
             </a:r>
           </a:p>
           <a:p>
@@ -39262,12 +42335,12 @@
               </a:spcAft>
             </a:pPr>
             <a:r>
-              <a:rPr sz="1600" b="0" i="0">
+              <a:rPr sz="1400" b="0" i="0">
                 <a:solidFill>
                   <a:srgbClr val="1F2A33"/>
                 </a:solidFill>
               </a:rPr>
-              <a:t>Highest minus lowest. Set by just two cases.</a:t>
+              <a:t>Mean age</a:t>
             </a:r>
           </a:p>
         </p:txBody>
@@ -39280,8 +42353,8 @@
         </p:nvSpPr>
         <p:spPr>
           <a:xfrm>
-            <a:off x="7772400" y="2852928"/>
-            <a:ext cx="3593592" cy="1325880"/>
+            <a:off x="8549640" y="2468880"/>
+            <a:ext cx="2816352" cy="960120"/>
           </a:xfrm>
           <a:prstGeom prst="roundRect">
             <a:avLst>
@@ -39311,8 +42384,8 @@
         </p:nvSpPr>
         <p:spPr>
           <a:xfrm>
-            <a:off x="7973568" y="3013862"/>
-            <a:ext cx="3191256" cy="1004011"/>
+            <a:off x="8714232" y="2600553"/>
+            <a:ext cx="2487168" cy="696772"/>
           </a:xfrm>
           <a:prstGeom prst="rect">
             <a:avLst/>
@@ -39331,12 +42404,12 @@
               </a:spcAft>
             </a:pPr>
             <a:r>
-              <a:rPr sz="1900" b="1" i="0">
+              <a:rPr sz="2400" b="1" i="0">
                 <a:solidFill>
                   <a:srgbClr val="1F394D"/>
                 </a:solidFill>
               </a:rPr>
-              <a:t>Interquartile range</a:t>
+              <a:t>54</a:t>
             </a:r>
           </a:p>
           <a:p>
@@ -39346,12 +42419,12 @@
               </a:spcAft>
             </a:pPr>
             <a:r>
-              <a:rPr sz="1600" b="0" i="0">
+              <a:rPr sz="1400" b="0" i="0">
                 <a:solidFill>
                   <a:srgbClr val="1F2A33"/>
                 </a:solidFill>
               </a:rPr>
-              <a:t>Spread of the middle 50%. Ignores the extremes.</a:t>
+              <a:t>Median age</a:t>
             </a:r>
           </a:p>
         </p:txBody>
@@ -39364,8 +42437,8 @@
         </p:nvSpPr>
         <p:spPr>
           <a:xfrm>
-            <a:off x="7772400" y="4334256"/>
-            <a:ext cx="3593592" cy="1325880"/>
+            <a:off x="8549640" y="3566160"/>
+            <a:ext cx="2816352" cy="960120"/>
           </a:xfrm>
           <a:prstGeom prst="roundRect">
             <a:avLst>
@@ -39395,8 +42468,8 @@
         </p:nvSpPr>
         <p:spPr>
           <a:xfrm>
-            <a:off x="7973568" y="4495190"/>
-            <a:ext cx="3191256" cy="1004011"/>
+            <a:off x="8714232" y="3697833"/>
+            <a:ext cx="2487168" cy="696772"/>
           </a:xfrm>
           <a:prstGeom prst="rect">
             <a:avLst/>
@@ -39415,12 +42488,12 @@
               </a:spcAft>
             </a:pPr>
             <a:r>
-              <a:rPr sz="1900" b="1" i="0">
+              <a:rPr sz="2400" b="1" i="0">
                 <a:solidFill>
                   <a:srgbClr val="1F394D"/>
                 </a:solidFill>
               </a:rPr>
-              <a:t>Standard deviation</a:t>
+              <a:t>19.0</a:t>
             </a:r>
           </a:p>
           <a:p>
@@ -39430,12 +42503,12 @@
               </a:spcAft>
             </a:pPr>
             <a:r>
-              <a:rPr sz="1600" b="0" i="0">
+              <a:rPr sz="1400" b="0" i="0">
                 <a:solidFill>
                   <a:srgbClr val="1F2A33"/>
                 </a:solidFill>
               </a:rPr>
-              <a:t>Typical distance from the mean.</a:t>
+              <a:t>Standard deviation</a:t>
             </a:r>
           </a:p>
         </p:txBody>
@@ -39448,21 +42521,19 @@
         </p:nvSpPr>
         <p:spPr>
           <a:xfrm>
-            <a:off x="758952" y="5943600"/>
-            <a:ext cx="2514600" cy="292608"/>
+            <a:off x="8549640" y="4663440"/>
+            <a:ext cx="2816352" cy="960120"/>
           </a:xfrm>
           <a:prstGeom prst="roundRect">
             <a:avLst>
-              <a:gd name="adj" fmla="val 50000"/>
+              <a:gd name="adj" fmla="val 8000"/>
             </a:avLst>
           </a:prstGeom>
           <a:solidFill>
-            <a:srgbClr val="FFFFFF"/>
+            <a:srgbClr val="EEF3F7"/>
           </a:solidFill>
-          <a:ln w="15875">
-            <a:solidFill>
-              <a:srgbClr val="B88C00"/>
-            </a:solidFill>
+          <a:ln>
+            <a:noFill/>
           </a:ln>
         </p:spPr>
         <p:txBody>
@@ -39481,8 +42552,8 @@
         </p:nvSpPr>
         <p:spPr>
           <a:xfrm>
-            <a:off x="758952" y="5943600"/>
-            <a:ext cx="2514600" cy="292608"/>
+            <a:off x="8714232" y="4795113"/>
+            <a:ext cx="2487168" cy="696772"/>
           </a:xfrm>
           <a:prstGeom prst="rect">
             <a:avLst/>
@@ -39490,19 +42561,72 @@
           <a:noFill/>
         </p:spPr>
         <p:txBody>
+          <a:bodyPr wrap="square" lIns="0" tIns="0" rIns="0" bIns="0" anchor="t">
+            <a:spAutoFit/>
+          </a:bodyPr>
+          <a:lstStyle/>
+          <a:p>
+            <a:pPr algn="l">
+              <a:spcAft>
+                <a:spcPts val="400"/>
+              </a:spcAft>
+            </a:pPr>
+            <a:r>
+              <a:rPr sz="2400" b="1" i="0">
+                <a:solidFill>
+                  <a:srgbClr val="1F394D"/>
+                </a:solidFill>
+              </a:rPr>
+              <a:t>15 to 90</a:t>
+            </a:r>
+          </a:p>
+          <a:p>
+            <a:pPr algn="l">
+              <a:spcAft>
+                <a:spcPts val="400"/>
+              </a:spcAft>
+            </a:pPr>
+            <a:r>
+              <a:rPr sz="1400" b="0" i="0">
+                <a:solidFill>
+                  <a:srgbClr val="1F2A33"/>
+                </a:solidFill>
+              </a:rPr>
+              <a:t>Range</a:t>
+            </a:r>
+          </a:p>
+        </p:txBody>
+      </p:sp>
+      <p:sp>
+        <p:nvSpPr>
+          <p:cNvPr id="16" name="TextBox 15"/>
+          <p:cNvSpPr txBox="1"/>
+          <p:nvPr/>
+        </p:nvSpPr>
+        <p:spPr>
+          <a:xfrm>
+            <a:off x="758952" y="5943600"/>
+            <a:ext cx="10607040" cy="292608"/>
+          </a:xfrm>
+          <a:prstGeom prst="rect">
+            <a:avLst/>
+          </a:prstGeom>
+          <a:noFill/>
+        </p:spPr>
+        <p:txBody>
           <a:bodyPr wrap="square" lIns="0" tIns="0" rIns="0" bIns="0" anchor="ctr">
             <a:spAutoFit/>
           </a:bodyPr>
           <a:lstStyle/>
           <a:p>
-            <a:pPr algn="ctr"/>
+            <a:pPr algn="l"/>
             <a:r>
-              <a:rPr sz="1200" b="1" i="0">
+              <a:rPr sz="1200" b="0" i="0">
                 <a:solidFill>
-                  <a:srgbClr val="7A5C00"/>
+                  <a:srgbClr val="55606B"/>
                 </a:solidFill>
               </a:rPr>
-              <a:t>SYNTHETIC EXAMPLE DATA</a:t>
+              <a:t>Data: European Social Survey Round 11 (2023-24), UK sample, n = 1,647 with a valid age (agea).</a:t>
             </a:r>
           </a:p>
         </p:txBody>
@@ -39734,8 +42858,16 @@
           <a:lstStyle/>
           <a:p>
             <a:r>
-              <a:rPr sz="3400"/>
-              <a:t>The standard deviation, step by step</a:t>
+              <a:rPr lang="en-GB" sz="3400" dirty="0"/>
+              <a:t>Recall: s</a:t>
+            </a:r>
+            <a:r>
+              <a:rPr sz="3400" dirty="0" err="1"/>
+              <a:t>ame</a:t>
+            </a:r>
+            <a:r>
+              <a:rPr sz="3400" dirty="0"/>
+              <a:t> average, very different societies</a:t>
             </a:r>
           </a:p>
         </p:txBody>
@@ -39792,6 +42924,447 @@
             <a:fld id="{9FAA51BB-2FC0-4DB8-B50E-F52D50E733B6}" type="slidenum">
               <a:rPr lang="en-GB" smtClean="0"/>
               <a:t>20</a:t>
+            </a:fld>
+            <a:endParaRPr lang="en-GB"/>
+          </a:p>
+        </p:txBody>
+      </p:sp>
+      <p:graphicFrame>
+        <p:nvGraphicFramePr>
+          <p:cNvPr id="7" name="Two towns chart"/>
+          <p:cNvGraphicFramePr>
+            <a:graphicFrameLocks noGrp="1"/>
+          </p:cNvGraphicFramePr>
+          <p:nvPr/>
+        </p:nvGraphicFramePr>
+        <p:xfrm>
+          <a:off x="758952" y="1325880"/>
+          <a:ext cx="6766560" cy="4526280"/>
+        </p:xfrm>
+        <a:graphic>
+          <a:graphicData uri="http://schemas.openxmlformats.org/drawingml/2006/chart">
+            <c:chart xmlns:c="http://schemas.openxmlformats.org/drawingml/2006/chart" xmlns:r="http://schemas.openxmlformats.org/officeDocument/2006/relationships" r:id="rId3"/>
+          </a:graphicData>
+        </a:graphic>
+      </p:graphicFrame>
+      <p:sp>
+        <p:nvSpPr>
+          <p:cNvPr id="8" name="Rounded Rectangle 7"/>
+          <p:cNvSpPr/>
+          <p:nvPr/>
+        </p:nvSpPr>
+        <p:spPr>
+          <a:xfrm>
+            <a:off x="7772400" y="1371600"/>
+            <a:ext cx="3593592" cy="1325880"/>
+          </a:xfrm>
+          <a:prstGeom prst="roundRect">
+            <a:avLst>
+              <a:gd name="adj" fmla="val 8000"/>
+            </a:avLst>
+          </a:prstGeom>
+          <a:solidFill>
+            <a:srgbClr val="EEF3F7"/>
+          </a:solidFill>
+          <a:ln>
+            <a:noFill/>
+          </a:ln>
+        </p:spPr>
+        <p:txBody>
+          <a:bodyPr rtlCol="0" anchor="ctr"/>
+          <a:lstStyle/>
+          <a:p>
+            <a:endParaRPr/>
+          </a:p>
+        </p:txBody>
+      </p:sp>
+      <p:sp>
+        <p:nvSpPr>
+          <p:cNvPr id="9" name="TextBox 8"/>
+          <p:cNvSpPr txBox="1"/>
+          <p:nvPr/>
+        </p:nvSpPr>
+        <p:spPr>
+          <a:xfrm>
+            <a:off x="7973568" y="1532534"/>
+            <a:ext cx="3191256" cy="1004011"/>
+          </a:xfrm>
+          <a:prstGeom prst="rect">
+            <a:avLst/>
+          </a:prstGeom>
+          <a:noFill/>
+        </p:spPr>
+        <p:txBody>
+          <a:bodyPr wrap="square" lIns="0" tIns="0" rIns="0" bIns="0" anchor="t">
+            <a:spAutoFit/>
+          </a:bodyPr>
+          <a:lstStyle/>
+          <a:p>
+            <a:pPr algn="l">
+              <a:spcAft>
+                <a:spcPts val="400"/>
+              </a:spcAft>
+            </a:pPr>
+            <a:r>
+              <a:rPr sz="1900" b="1" i="0">
+                <a:solidFill>
+                  <a:srgbClr val="1F394D"/>
+                </a:solidFill>
+              </a:rPr>
+              <a:t>Range</a:t>
+            </a:r>
+          </a:p>
+          <a:p>
+            <a:pPr algn="l">
+              <a:spcAft>
+                <a:spcPts val="400"/>
+              </a:spcAft>
+            </a:pPr>
+            <a:r>
+              <a:rPr sz="1600" b="0" i="0">
+                <a:solidFill>
+                  <a:srgbClr val="1F2A33"/>
+                </a:solidFill>
+              </a:rPr>
+              <a:t>Highest minus lowest. Set by just two cases.</a:t>
+            </a:r>
+          </a:p>
+        </p:txBody>
+      </p:sp>
+      <p:sp>
+        <p:nvSpPr>
+          <p:cNvPr id="10" name="Rounded Rectangle 9"/>
+          <p:cNvSpPr/>
+          <p:nvPr/>
+        </p:nvSpPr>
+        <p:spPr>
+          <a:xfrm>
+            <a:off x="7772400" y="2852928"/>
+            <a:ext cx="3593592" cy="1325880"/>
+          </a:xfrm>
+          <a:prstGeom prst="roundRect">
+            <a:avLst>
+              <a:gd name="adj" fmla="val 8000"/>
+            </a:avLst>
+          </a:prstGeom>
+          <a:solidFill>
+            <a:srgbClr val="EEF3F7"/>
+          </a:solidFill>
+          <a:ln>
+            <a:noFill/>
+          </a:ln>
+        </p:spPr>
+        <p:txBody>
+          <a:bodyPr rtlCol="0" anchor="ctr"/>
+          <a:lstStyle/>
+          <a:p>
+            <a:endParaRPr/>
+          </a:p>
+        </p:txBody>
+      </p:sp>
+      <p:sp>
+        <p:nvSpPr>
+          <p:cNvPr id="11" name="TextBox 10"/>
+          <p:cNvSpPr txBox="1"/>
+          <p:nvPr/>
+        </p:nvSpPr>
+        <p:spPr>
+          <a:xfrm>
+            <a:off x="7973568" y="3013862"/>
+            <a:ext cx="3191256" cy="1004011"/>
+          </a:xfrm>
+          <a:prstGeom prst="rect">
+            <a:avLst/>
+          </a:prstGeom>
+          <a:noFill/>
+        </p:spPr>
+        <p:txBody>
+          <a:bodyPr wrap="square" lIns="0" tIns="0" rIns="0" bIns="0" anchor="t">
+            <a:spAutoFit/>
+          </a:bodyPr>
+          <a:lstStyle/>
+          <a:p>
+            <a:pPr algn="l">
+              <a:spcAft>
+                <a:spcPts val="400"/>
+              </a:spcAft>
+            </a:pPr>
+            <a:r>
+              <a:rPr sz="1900" b="1" i="0">
+                <a:solidFill>
+                  <a:srgbClr val="1F394D"/>
+                </a:solidFill>
+              </a:rPr>
+              <a:t>Interquartile range</a:t>
+            </a:r>
+          </a:p>
+          <a:p>
+            <a:pPr algn="l">
+              <a:spcAft>
+                <a:spcPts val="400"/>
+              </a:spcAft>
+            </a:pPr>
+            <a:r>
+              <a:rPr sz="1600" b="0" i="0">
+                <a:solidFill>
+                  <a:srgbClr val="1F2A33"/>
+                </a:solidFill>
+              </a:rPr>
+              <a:t>Spread of the middle 50%. Ignores the extremes.</a:t>
+            </a:r>
+          </a:p>
+        </p:txBody>
+      </p:sp>
+      <p:sp>
+        <p:nvSpPr>
+          <p:cNvPr id="12" name="Rounded Rectangle 11"/>
+          <p:cNvSpPr/>
+          <p:nvPr/>
+        </p:nvSpPr>
+        <p:spPr>
+          <a:xfrm>
+            <a:off x="7772400" y="4334256"/>
+            <a:ext cx="3593592" cy="1325880"/>
+          </a:xfrm>
+          <a:prstGeom prst="roundRect">
+            <a:avLst>
+              <a:gd name="adj" fmla="val 8000"/>
+            </a:avLst>
+          </a:prstGeom>
+          <a:solidFill>
+            <a:srgbClr val="EEF3F7"/>
+          </a:solidFill>
+          <a:ln>
+            <a:noFill/>
+          </a:ln>
+        </p:spPr>
+        <p:txBody>
+          <a:bodyPr rtlCol="0" anchor="ctr"/>
+          <a:lstStyle/>
+          <a:p>
+            <a:endParaRPr/>
+          </a:p>
+        </p:txBody>
+      </p:sp>
+      <p:sp>
+        <p:nvSpPr>
+          <p:cNvPr id="13" name="TextBox 12"/>
+          <p:cNvSpPr txBox="1"/>
+          <p:nvPr/>
+        </p:nvSpPr>
+        <p:spPr>
+          <a:xfrm>
+            <a:off x="7973568" y="4495190"/>
+            <a:ext cx="3191256" cy="1004011"/>
+          </a:xfrm>
+          <a:prstGeom prst="rect">
+            <a:avLst/>
+          </a:prstGeom>
+          <a:noFill/>
+        </p:spPr>
+        <p:txBody>
+          <a:bodyPr wrap="square" lIns="0" tIns="0" rIns="0" bIns="0" anchor="t">
+            <a:spAutoFit/>
+          </a:bodyPr>
+          <a:lstStyle/>
+          <a:p>
+            <a:pPr algn="l">
+              <a:spcAft>
+                <a:spcPts val="400"/>
+              </a:spcAft>
+            </a:pPr>
+            <a:r>
+              <a:rPr sz="1900" b="1" i="0">
+                <a:solidFill>
+                  <a:srgbClr val="1F394D"/>
+                </a:solidFill>
+              </a:rPr>
+              <a:t>Standard deviation</a:t>
+            </a:r>
+          </a:p>
+          <a:p>
+            <a:pPr algn="l">
+              <a:spcAft>
+                <a:spcPts val="400"/>
+              </a:spcAft>
+            </a:pPr>
+            <a:r>
+              <a:rPr sz="1600" b="0" i="0">
+                <a:solidFill>
+                  <a:srgbClr val="1F2A33"/>
+                </a:solidFill>
+              </a:rPr>
+              <a:t>Typical distance from the mean.</a:t>
+            </a:r>
+          </a:p>
+        </p:txBody>
+      </p:sp>
+      <p:sp>
+        <p:nvSpPr>
+          <p:cNvPr id="14" name="Rounded Rectangle 13"/>
+          <p:cNvSpPr/>
+          <p:nvPr/>
+        </p:nvSpPr>
+        <p:spPr>
+          <a:xfrm>
+            <a:off x="758952" y="5943600"/>
+            <a:ext cx="2514600" cy="292608"/>
+          </a:xfrm>
+          <a:prstGeom prst="roundRect">
+            <a:avLst>
+              <a:gd name="adj" fmla="val 50000"/>
+            </a:avLst>
+          </a:prstGeom>
+          <a:solidFill>
+            <a:srgbClr val="FFFFFF"/>
+          </a:solidFill>
+          <a:ln w="15875">
+            <a:solidFill>
+              <a:srgbClr val="B88C00"/>
+            </a:solidFill>
+          </a:ln>
+        </p:spPr>
+        <p:txBody>
+          <a:bodyPr rtlCol="0" anchor="ctr"/>
+          <a:lstStyle/>
+          <a:p>
+            <a:endParaRPr/>
+          </a:p>
+        </p:txBody>
+      </p:sp>
+      <p:sp>
+        <p:nvSpPr>
+          <p:cNvPr id="15" name="TextBox 14"/>
+          <p:cNvSpPr txBox="1"/>
+          <p:nvPr/>
+        </p:nvSpPr>
+        <p:spPr>
+          <a:xfrm>
+            <a:off x="758952" y="5943600"/>
+            <a:ext cx="2514600" cy="292608"/>
+          </a:xfrm>
+          <a:prstGeom prst="rect">
+            <a:avLst/>
+          </a:prstGeom>
+          <a:noFill/>
+        </p:spPr>
+        <p:txBody>
+          <a:bodyPr wrap="square" lIns="0" tIns="0" rIns="0" bIns="0" anchor="ctr">
+            <a:spAutoFit/>
+          </a:bodyPr>
+          <a:lstStyle/>
+          <a:p>
+            <a:pPr algn="ctr"/>
+            <a:r>
+              <a:rPr sz="1200" b="1" i="0">
+                <a:solidFill>
+                  <a:srgbClr val="7A5C00"/>
+                </a:solidFill>
+              </a:rPr>
+              <a:t>SYNTHETIC EXAMPLE DATA</a:t>
+            </a:r>
+          </a:p>
+        </p:txBody>
+      </p:sp>
+    </p:spTree>
+  </p:cSld>
+  <p:clrMapOvr>
+    <a:masterClrMapping/>
+  </p:clrMapOvr>
+</p:sld>
+</file>
+
+<file path=ppt/slides/slide21.xml><?xml version="1.0" encoding="utf-8"?>
+<p:sld xmlns:a="http://schemas.openxmlformats.org/drawingml/2006/main" xmlns:r="http://schemas.openxmlformats.org/officeDocument/2006/relationships" xmlns:p="http://schemas.openxmlformats.org/presentationml/2006/main">
+  <p:cSld>
+    <p:spTree>
+      <p:nvGrpSpPr>
+        <p:cNvPr id="1" name=""/>
+        <p:cNvGrpSpPr/>
+        <p:nvPr/>
+      </p:nvGrpSpPr>
+      <p:grpSpPr>
+        <a:xfrm>
+          <a:off x="0" y="0"/>
+          <a:ext cx="0" cy="0"/>
+          <a:chOff x="0" y="0"/>
+          <a:chExt cx="0" cy="0"/>
+        </a:xfrm>
+      </p:grpSpPr>
+      <p:sp>
+        <p:nvSpPr>
+          <p:cNvPr id="2" name="Title 1"/>
+          <p:cNvSpPr>
+            <a:spLocks noGrp="1"/>
+          </p:cNvSpPr>
+          <p:nvPr>
+            <p:ph type="title"/>
+          </p:nvPr>
+        </p:nvSpPr>
+        <p:spPr/>
+        <p:txBody>
+          <a:bodyPr/>
+          <a:lstStyle/>
+          <a:p>
+            <a:r>
+              <a:rPr sz="3400"/>
+              <a:t>The standard deviation, step by step</a:t>
+            </a:r>
+          </a:p>
+        </p:txBody>
+      </p:sp>
+      <p:sp>
+        <p:nvSpPr>
+          <p:cNvPr id="5" name="Footer Placeholder 4">
+            <a:extLst>
+              <a:ext uri="{FF2B5EF4-FFF2-40B4-BE49-F238E27FC236}">
+                <a16:creationId xmlns:a16="http://schemas.microsoft.com/office/drawing/2014/main" id="{6772CAAB-9C32-D830-FF00-86600C487E94}"/>
+              </a:ext>
+            </a:extLst>
+          </p:cNvPr>
+          <p:cNvSpPr>
+            <a:spLocks noGrp="1"/>
+          </p:cNvSpPr>
+          <p:nvPr>
+            <p:ph type="ftr" sz="quarter" idx="11"/>
+          </p:nvPr>
+        </p:nvSpPr>
+        <p:spPr/>
+        <p:txBody>
+          <a:bodyPr/>
+          <a:lstStyle/>
+          <a:p>
+            <a:r>
+              <a:rPr lang="en-GB"/>
+              <a:t>Measurement and Description</a:t>
+            </a:r>
+          </a:p>
+        </p:txBody>
+      </p:sp>
+      <p:sp>
+        <p:nvSpPr>
+          <p:cNvPr id="6" name="Slide Number Placeholder 5">
+            <a:extLst>
+              <a:ext uri="{FF2B5EF4-FFF2-40B4-BE49-F238E27FC236}">
+                <a16:creationId xmlns:a16="http://schemas.microsoft.com/office/drawing/2014/main" id="{953B9D79-309D-D507-17FF-67827394EFDB}"/>
+              </a:ext>
+            </a:extLst>
+          </p:cNvPr>
+          <p:cNvSpPr>
+            <a:spLocks noGrp="1"/>
+          </p:cNvSpPr>
+          <p:nvPr>
+            <p:ph type="sldNum" sz="quarter" idx="12"/>
+          </p:nvPr>
+        </p:nvSpPr>
+        <p:spPr/>
+        <p:txBody>
+          <a:bodyPr/>
+          <a:lstStyle/>
+          <a:p>
+            <a:fld id="{9FAA51BB-2FC0-4DB8-B50E-F52D50E733B6}" type="slidenum">
+              <a:rPr lang="en-GB" smtClean="0"/>
+              <a:t>21</a:t>
             </a:fld>
             <a:endParaRPr lang="en-GB"/>
           </a:p>
@@ -40959,7 +44532,7 @@
 </p:sld>
 </file>
 
-<file path=ppt/slides/slide21.xml><?xml version="1.0" encoding="utf-8"?>
+<file path=ppt/slides/slide22.xml><?xml version="1.0" encoding="utf-8"?>
 <p:sld xmlns:a="http://schemas.openxmlformats.org/drawingml/2006/main" xmlns:r="http://schemas.openxmlformats.org/officeDocument/2006/relationships" xmlns:p="http://schemas.openxmlformats.org/presentationml/2006/main">
   <p:cSld>
     <p:spTree>
@@ -41053,7 +44626,7 @@
           <a:p>
             <a:fld id="{9FAA51BB-2FC0-4DB8-B50E-F52D50E733B6}" type="slidenum">
               <a:rPr lang="en-GB" smtClean="0"/>
-              <a:t>21</a:t>
+              <a:t>22</a:t>
             </a:fld>
             <a:endParaRPr lang="en-GB"/>
           </a:p>
@@ -42399,7 +45972,7 @@
 </p:sld>
 </file>
 
-<file path=ppt/slides/slide22.xml><?xml version="1.0" encoding="utf-8"?>
+<file path=ppt/slides/slide23.xml><?xml version="1.0" encoding="utf-8"?>
 <p:sld xmlns:a="http://schemas.openxmlformats.org/drawingml/2006/main" xmlns:r="http://schemas.openxmlformats.org/officeDocument/2006/relationships" xmlns:p="http://schemas.openxmlformats.org/presentationml/2006/main">
   <p:cSld>
     <p:spTree>
@@ -42517,7 +46090,7 @@
           <a:p>
             <a:fld id="{9FAA51BB-2FC0-4DB8-B50E-F52D50E733B6}" type="slidenum">
               <a:rPr lang="en-GB" smtClean="0"/>
-              <a:t>22</a:t>
+              <a:t>23</a:t>
             </a:fld>
             <a:endParaRPr lang="en-GB"/>
           </a:p>
@@ -43819,7 +47392,7 @@
 </p:sld>
 </file>
 
-<file path=ppt/slides/slide23.xml><?xml version="1.0" encoding="utf-8"?>
+<file path=ppt/slides/slide24.xml><?xml version="1.0" encoding="utf-8"?>
 <p:sld xmlns:a="http://schemas.openxmlformats.org/drawingml/2006/main" xmlns:r="http://schemas.openxmlformats.org/officeDocument/2006/relationships" xmlns:p="http://schemas.openxmlformats.org/presentationml/2006/main">
   <p:cSld>
     <p:spTree>
@@ -43938,7 +47511,7 @@
           <a:p>
             <a:fld id="{9FAA51BB-2FC0-4DB8-B50E-F52D50E733B6}" type="slidenum">
               <a:rPr lang="en-GB" smtClean="0"/>
-              <a:t>23</a:t>
+              <a:t>24</a:t>
             </a:fld>
             <a:endParaRPr lang="en-GB"/>
           </a:p>
@@ -45366,7 +48939,7 @@
 </p:sld>
 </file>
 
-<file path=ppt/slides/slide24.xml><?xml version="1.0" encoding="utf-8"?>
+<file path=ppt/slides/slide25.xml><?xml version="1.0" encoding="utf-8"?>
 <p:sld xmlns:a="http://schemas.openxmlformats.org/drawingml/2006/main" xmlns:r="http://schemas.openxmlformats.org/officeDocument/2006/relationships" xmlns:p="http://schemas.openxmlformats.org/presentationml/2006/main">
   <p:cSld>
     <p:spTree>
@@ -45485,7 +49058,7 @@
           <a:p>
             <a:fld id="{9FAA51BB-2FC0-4DB8-B50E-F52D50E733B6}" type="slidenum">
               <a:rPr lang="en-GB" smtClean="0"/>
-              <a:t>24</a:t>
+              <a:t>25</a:t>
             </a:fld>
             <a:endParaRPr lang="en-GB"/>
           </a:p>
@@ -45769,7 +49342,7 @@
 </p:sld>
 </file>
 
-<file path=ppt/slides/slide25.xml><?xml version="1.0" encoding="utf-8"?>
+<file path=ppt/slides/slide26.xml><?xml version="1.0" encoding="utf-8"?>
 <p:sld xmlns:a="http://schemas.openxmlformats.org/drawingml/2006/main" xmlns:r="http://schemas.openxmlformats.org/officeDocument/2006/relationships" xmlns:p="http://schemas.openxmlformats.org/presentationml/2006/main">
   <p:cSld>
     <p:bg>
@@ -45901,7 +49474,7 @@
           <a:p>
             <a:fld id="{9FAA51BB-2FC0-4DB8-B50E-F52D50E733B6}" type="slidenum">
               <a:rPr lang="en-GB" smtClean="0"/>
-              <a:t>25</a:t>
+              <a:t>26</a:t>
             </a:fld>
             <a:endParaRPr lang="en-GB"/>
           </a:p>
@@ -46130,167 +49703,6 @@
               </a:rPr>
               <a:t>Data: Community Life Survey 2023-24, England (gb-cls23-trust_nm.sav), n = 51,079. Trust: “how much do you trust most people?” (0 to 10).</a:t>
             </a:r>
-          </a:p>
-        </p:txBody>
-      </p:sp>
-    </p:spTree>
-  </p:cSld>
-  <p:clrMapOvr>
-    <a:masterClrMapping/>
-  </p:clrMapOvr>
-</p:sld>
-</file>
-
-<file path=ppt/slides/slide26.xml><?xml version="1.0" encoding="utf-8"?>
-<p:sld xmlns:a="http://schemas.openxmlformats.org/drawingml/2006/main" xmlns:r="http://schemas.openxmlformats.org/officeDocument/2006/relationships" xmlns:p="http://schemas.openxmlformats.org/presentationml/2006/main">
-  <p:cSld>
-    <p:spTree>
-      <p:nvGrpSpPr>
-        <p:cNvPr id="1" name=""/>
-        <p:cNvGrpSpPr/>
-        <p:nvPr/>
-      </p:nvGrpSpPr>
-      <p:grpSpPr>
-        <a:xfrm>
-          <a:off x="0" y="0"/>
-          <a:ext cx="0" cy="0"/>
-          <a:chOff x="0" y="0"/>
-          <a:chExt cx="0" cy="0"/>
-        </a:xfrm>
-      </p:grpSpPr>
-      <p:sp>
-        <p:nvSpPr>
-          <p:cNvPr id="2" name="Title 1"/>
-          <p:cNvSpPr>
-            <a:spLocks noGrp="1"/>
-          </p:cNvSpPr>
-          <p:nvPr>
-            <p:ph type="title"/>
-          </p:nvPr>
-        </p:nvSpPr>
-        <p:spPr/>
-        <p:txBody>
-          <a:bodyPr/>
-          <a:lstStyle/>
-          <a:p>
-            <a:r>
-              <a:rPr sz="4000"/>
-              <a:t>Two scale</a:t>
-            </a:r>
-          </a:p>
-          <a:p>
-            <a:r>
-              <a:rPr sz="4000"/>
-              <a:t>variables</a:t>
-            </a:r>
-          </a:p>
-        </p:txBody>
-      </p:sp>
-      <p:sp>
-        <p:nvSpPr>
-          <p:cNvPr id="3" name="Text Placeholder 2"/>
-          <p:cNvSpPr>
-            <a:spLocks noGrp="1"/>
-          </p:cNvSpPr>
-          <p:nvPr>
-            <p:ph type="body" sz="half" idx="2"/>
-          </p:nvPr>
-        </p:nvSpPr>
-        <p:spPr/>
-        <p:txBody>
-          <a:bodyPr/>
-          <a:lstStyle/>
-          <a:p>
-            <a:r>
-              <a:rPr sz="2400"/>
-              <a:t>Scatter plots and correlation</a:t>
-            </a:r>
-          </a:p>
-        </p:txBody>
-      </p:sp>
-      <p:sp>
-        <p:nvSpPr>
-          <p:cNvPr id="4" name="Date Placeholder 1">
-            <a:extLst>
-              <a:ext uri="{FF2B5EF4-FFF2-40B4-BE49-F238E27FC236}">
-                <a16:creationId xmlns:a16="http://schemas.microsoft.com/office/drawing/2014/main" id="{BFF50875-77B6-7B50-6789-FC1B56491CC3}"/>
-              </a:ext>
-            </a:extLst>
-          </p:cNvPr>
-          <p:cNvSpPr>
-            <a:spLocks noGrp="1"/>
-          </p:cNvSpPr>
-          <p:nvPr>
-            <p:ph type="dt" sz="half" idx="10"/>
-          </p:nvPr>
-        </p:nvSpPr>
-        <p:spPr/>
-        <p:txBody>
-          <a:bodyPr/>
-          <a:lstStyle/>
-          <a:p>
-            <a:fld id="{FA72AB8D-F27B-45C4-A3C3-1397CC759085}" type="datetimeyyyy">
-              <a:rPr lang="en-US" smtClean="0"/>
-              <a:t>2026</a:t>
-            </a:fld>
-            <a:endParaRPr lang="en-GB"/>
-          </a:p>
-        </p:txBody>
-      </p:sp>
-      <p:sp>
-        <p:nvSpPr>
-          <p:cNvPr id="5" name="Footer Placeholder 4">
-            <a:extLst>
-              <a:ext uri="{FF2B5EF4-FFF2-40B4-BE49-F238E27FC236}">
-                <a16:creationId xmlns:a16="http://schemas.microsoft.com/office/drawing/2014/main" id="{DE0B2AC9-C062-ACDA-78EB-2E5B2DF3BA3F}"/>
-              </a:ext>
-            </a:extLst>
-          </p:cNvPr>
-          <p:cNvSpPr>
-            <a:spLocks noGrp="1"/>
-          </p:cNvSpPr>
-          <p:nvPr>
-            <p:ph type="ftr" sz="quarter" idx="11"/>
-          </p:nvPr>
-        </p:nvSpPr>
-        <p:spPr/>
-        <p:txBody>
-          <a:bodyPr/>
-          <a:lstStyle/>
-          <a:p>
-            <a:r>
-              <a:rPr lang="en-GB"/>
-              <a:t>Comparisons and Associations</a:t>
-            </a:r>
-          </a:p>
-        </p:txBody>
-      </p:sp>
-      <p:sp>
-        <p:nvSpPr>
-          <p:cNvPr id="6" name="Slide Number Placeholder 5">
-            <a:extLst>
-              <a:ext uri="{FF2B5EF4-FFF2-40B4-BE49-F238E27FC236}">
-                <a16:creationId xmlns:a16="http://schemas.microsoft.com/office/drawing/2014/main" id="{63AA58D7-3FC7-1868-4188-EE9D3329FE70}"/>
-              </a:ext>
-            </a:extLst>
-          </p:cNvPr>
-          <p:cNvSpPr>
-            <a:spLocks noGrp="1"/>
-          </p:cNvSpPr>
-          <p:nvPr>
-            <p:ph type="sldNum" sz="quarter" idx="12"/>
-          </p:nvPr>
-        </p:nvSpPr>
-        <p:spPr/>
-        <p:txBody>
-          <a:bodyPr/>
-          <a:lstStyle/>
-          <a:p>
-            <a:fld id="{9FAA51BB-2FC0-4DB8-B50E-F52D50E733B6}" type="slidenum">
-              <a:rPr lang="en-GB" smtClean="0"/>
-              <a:t>26</a:t>
-            </a:fld>
-            <a:endParaRPr lang="en-GB"/>
           </a:p>
         </p:txBody>
       </p:sp>
@@ -46335,6 +49747,167 @@
           <a:lstStyle/>
           <a:p>
             <a:r>
+              <a:rPr sz="4000"/>
+              <a:t>Two scale</a:t>
+            </a:r>
+          </a:p>
+          <a:p>
+            <a:r>
+              <a:rPr sz="4000"/>
+              <a:t>variables</a:t>
+            </a:r>
+          </a:p>
+        </p:txBody>
+      </p:sp>
+      <p:sp>
+        <p:nvSpPr>
+          <p:cNvPr id="3" name="Text Placeholder 2"/>
+          <p:cNvSpPr>
+            <a:spLocks noGrp="1"/>
+          </p:cNvSpPr>
+          <p:nvPr>
+            <p:ph type="body" sz="half" idx="2"/>
+          </p:nvPr>
+        </p:nvSpPr>
+        <p:spPr/>
+        <p:txBody>
+          <a:bodyPr/>
+          <a:lstStyle/>
+          <a:p>
+            <a:r>
+              <a:rPr sz="2400"/>
+              <a:t>Scatter plots and correlation</a:t>
+            </a:r>
+          </a:p>
+        </p:txBody>
+      </p:sp>
+      <p:sp>
+        <p:nvSpPr>
+          <p:cNvPr id="4" name="Date Placeholder 1">
+            <a:extLst>
+              <a:ext uri="{FF2B5EF4-FFF2-40B4-BE49-F238E27FC236}">
+                <a16:creationId xmlns:a16="http://schemas.microsoft.com/office/drawing/2014/main" id="{BFF50875-77B6-7B50-6789-FC1B56491CC3}"/>
+              </a:ext>
+            </a:extLst>
+          </p:cNvPr>
+          <p:cNvSpPr>
+            <a:spLocks noGrp="1"/>
+          </p:cNvSpPr>
+          <p:nvPr>
+            <p:ph type="dt" sz="half" idx="10"/>
+          </p:nvPr>
+        </p:nvSpPr>
+        <p:spPr/>
+        <p:txBody>
+          <a:bodyPr/>
+          <a:lstStyle/>
+          <a:p>
+            <a:fld id="{FA72AB8D-F27B-45C4-A3C3-1397CC759085}" type="datetimeyyyy">
+              <a:rPr lang="en-US" smtClean="0"/>
+              <a:t>2026</a:t>
+            </a:fld>
+            <a:endParaRPr lang="en-GB"/>
+          </a:p>
+        </p:txBody>
+      </p:sp>
+      <p:sp>
+        <p:nvSpPr>
+          <p:cNvPr id="5" name="Footer Placeholder 4">
+            <a:extLst>
+              <a:ext uri="{FF2B5EF4-FFF2-40B4-BE49-F238E27FC236}">
+                <a16:creationId xmlns:a16="http://schemas.microsoft.com/office/drawing/2014/main" id="{DE0B2AC9-C062-ACDA-78EB-2E5B2DF3BA3F}"/>
+              </a:ext>
+            </a:extLst>
+          </p:cNvPr>
+          <p:cNvSpPr>
+            <a:spLocks noGrp="1"/>
+          </p:cNvSpPr>
+          <p:nvPr>
+            <p:ph type="ftr" sz="quarter" idx="11"/>
+          </p:nvPr>
+        </p:nvSpPr>
+        <p:spPr/>
+        <p:txBody>
+          <a:bodyPr/>
+          <a:lstStyle/>
+          <a:p>
+            <a:r>
+              <a:rPr lang="en-GB"/>
+              <a:t>Comparisons and Associations</a:t>
+            </a:r>
+          </a:p>
+        </p:txBody>
+      </p:sp>
+      <p:sp>
+        <p:nvSpPr>
+          <p:cNvPr id="6" name="Slide Number Placeholder 5">
+            <a:extLst>
+              <a:ext uri="{FF2B5EF4-FFF2-40B4-BE49-F238E27FC236}">
+                <a16:creationId xmlns:a16="http://schemas.microsoft.com/office/drawing/2014/main" id="{63AA58D7-3FC7-1868-4188-EE9D3329FE70}"/>
+              </a:ext>
+            </a:extLst>
+          </p:cNvPr>
+          <p:cNvSpPr>
+            <a:spLocks noGrp="1"/>
+          </p:cNvSpPr>
+          <p:nvPr>
+            <p:ph type="sldNum" sz="quarter" idx="12"/>
+          </p:nvPr>
+        </p:nvSpPr>
+        <p:spPr/>
+        <p:txBody>
+          <a:bodyPr/>
+          <a:lstStyle/>
+          <a:p>
+            <a:fld id="{9FAA51BB-2FC0-4DB8-B50E-F52D50E733B6}" type="slidenum">
+              <a:rPr lang="en-GB" smtClean="0"/>
+              <a:t>27</a:t>
+            </a:fld>
+            <a:endParaRPr lang="en-GB"/>
+          </a:p>
+        </p:txBody>
+      </p:sp>
+    </p:spTree>
+  </p:cSld>
+  <p:clrMapOvr>
+    <a:masterClrMapping/>
+  </p:clrMapOvr>
+</p:sld>
+</file>
+
+<file path=ppt/slides/slide28.xml><?xml version="1.0" encoding="utf-8"?>
+<p:sld xmlns:a="http://schemas.openxmlformats.org/drawingml/2006/main" xmlns:r="http://schemas.openxmlformats.org/officeDocument/2006/relationships" xmlns:p="http://schemas.openxmlformats.org/presentationml/2006/main">
+  <p:cSld>
+    <p:spTree>
+      <p:nvGrpSpPr>
+        <p:cNvPr id="1" name=""/>
+        <p:cNvGrpSpPr/>
+        <p:nvPr/>
+      </p:nvGrpSpPr>
+      <p:grpSpPr>
+        <a:xfrm>
+          <a:off x="0" y="0"/>
+          <a:ext cx="0" cy="0"/>
+          <a:chOff x="0" y="0"/>
+          <a:chExt cx="0" cy="0"/>
+        </a:xfrm>
+      </p:grpSpPr>
+      <p:sp>
+        <p:nvSpPr>
+          <p:cNvPr id="2" name="Title 1"/>
+          <p:cNvSpPr>
+            <a:spLocks noGrp="1"/>
+          </p:cNvSpPr>
+          <p:nvPr>
+            <p:ph type="title"/>
+          </p:nvPr>
+        </p:nvSpPr>
+        <p:spPr/>
+        <p:txBody>
+          <a:bodyPr/>
+          <a:lstStyle/>
+          <a:p>
+            <a:r>
               <a:t>Reading a scatter plot</a:t>
             </a:r>
           </a:p>
@@ -46420,7 +49993,7 @@
           <a:p>
             <a:fld id="{9FAA51BB-2FC0-4DB8-B50E-F52D50E733B6}" type="slidenum">
               <a:rPr lang="en-GB" smtClean="0"/>
-              <a:t>27</a:t>
+              <a:t>28</a:t>
             </a:fld>
             <a:endParaRPr lang="en-GB"/>
           </a:p>
@@ -47054,7 +50627,7 @@
 </p:sld>
 </file>
 
-<file path=ppt/slides/slide28.xml><?xml version="1.0" encoding="utf-8"?>
+<file path=ppt/slides/slide29.xml><?xml version="1.0" encoding="utf-8"?>
 <p:sld xmlns:a="http://schemas.openxmlformats.org/drawingml/2006/main" xmlns:r="http://schemas.openxmlformats.org/officeDocument/2006/relationships" xmlns:p="http://schemas.openxmlformats.org/presentationml/2006/main">
   <p:cSld>
     <p:spTree>
@@ -47173,7 +50746,7 @@
           <a:p>
             <a:fld id="{9FAA51BB-2FC0-4DB8-B50E-F52D50E733B6}" type="slidenum">
               <a:rPr lang="en-GB" smtClean="0"/>
-              <a:t>28</a:t>
+              <a:t>29</a:t>
             </a:fld>
             <a:endParaRPr lang="en-GB"/>
           </a:p>
@@ -47500,162 +51073,6 @@
               </a:rPr>
               <a:t>SYNTHETIC EXAMPLE DATA</a:t>
             </a:r>
-          </a:p>
-        </p:txBody>
-      </p:sp>
-    </p:spTree>
-  </p:cSld>
-  <p:clrMapOvr>
-    <a:masterClrMapping/>
-  </p:clrMapOvr>
-</p:sld>
-</file>
-
-<file path=ppt/slides/slide29.xml><?xml version="1.0" encoding="utf-8"?>
-<p:sld xmlns:a="http://schemas.openxmlformats.org/drawingml/2006/main" xmlns:r="http://schemas.openxmlformats.org/officeDocument/2006/relationships" xmlns:p="http://schemas.openxmlformats.org/presentationml/2006/main">
-  <p:cSld>
-    <p:spTree>
-      <p:nvGrpSpPr>
-        <p:cNvPr id="1" name=""/>
-        <p:cNvGrpSpPr/>
-        <p:nvPr/>
-      </p:nvGrpSpPr>
-      <p:grpSpPr>
-        <a:xfrm>
-          <a:off x="0" y="0"/>
-          <a:ext cx="0" cy="0"/>
-          <a:chOff x="0" y="0"/>
-          <a:chExt cx="0" cy="0"/>
-        </a:xfrm>
-      </p:grpSpPr>
-      <p:sp>
-        <p:nvSpPr>
-          <p:cNvPr id="2" name="Title 1"/>
-          <p:cNvSpPr>
-            <a:spLocks noGrp="1"/>
-          </p:cNvSpPr>
-          <p:nvPr>
-            <p:ph type="title"/>
-          </p:nvPr>
-        </p:nvSpPr>
-        <p:spPr/>
-        <p:txBody>
-          <a:bodyPr/>
-          <a:lstStyle/>
-          <a:p>
-            <a:r>
-              <a:rPr lang="en-GB" sz="4000" dirty="0"/>
-              <a:t>APPLICATION</a:t>
-            </a:r>
-            <a:endParaRPr sz="4000" dirty="0"/>
-          </a:p>
-        </p:txBody>
-      </p:sp>
-      <p:sp>
-        <p:nvSpPr>
-          <p:cNvPr id="3" name="Text Placeholder 2"/>
-          <p:cNvSpPr>
-            <a:spLocks noGrp="1"/>
-          </p:cNvSpPr>
-          <p:nvPr>
-            <p:ph type="body" sz="half" idx="2"/>
-          </p:nvPr>
-        </p:nvSpPr>
-        <p:spPr/>
-        <p:txBody>
-          <a:bodyPr/>
-          <a:lstStyle/>
-          <a:p>
-            <a:r>
-              <a:rPr sz="2400" dirty="0"/>
-              <a:t>Is income inequality associated with social trust? The Spirit Level (2009) and 15 years later</a:t>
-            </a:r>
-          </a:p>
-        </p:txBody>
-      </p:sp>
-      <p:sp>
-        <p:nvSpPr>
-          <p:cNvPr id="4" name="Date Placeholder 1">
-            <a:extLst>
-              <a:ext uri="{FF2B5EF4-FFF2-40B4-BE49-F238E27FC236}">
-                <a16:creationId xmlns:a16="http://schemas.microsoft.com/office/drawing/2014/main" id="{BFF50875-77B6-7B50-6789-FC1B56491CC3}"/>
-              </a:ext>
-            </a:extLst>
-          </p:cNvPr>
-          <p:cNvSpPr>
-            <a:spLocks noGrp="1"/>
-          </p:cNvSpPr>
-          <p:nvPr>
-            <p:ph type="dt" sz="half" idx="10"/>
-          </p:nvPr>
-        </p:nvSpPr>
-        <p:spPr/>
-        <p:txBody>
-          <a:bodyPr/>
-          <a:lstStyle/>
-          <a:p>
-            <a:fld id="{FA72AB8D-F27B-45C4-A3C3-1397CC759085}" type="datetimeyyyy">
-              <a:rPr lang="en-US" smtClean="0"/>
-              <a:t>2026</a:t>
-            </a:fld>
-            <a:endParaRPr lang="en-GB"/>
-          </a:p>
-        </p:txBody>
-      </p:sp>
-      <p:sp>
-        <p:nvSpPr>
-          <p:cNvPr id="5" name="Footer Placeholder 4">
-            <a:extLst>
-              <a:ext uri="{FF2B5EF4-FFF2-40B4-BE49-F238E27FC236}">
-                <a16:creationId xmlns:a16="http://schemas.microsoft.com/office/drawing/2014/main" id="{DE0B2AC9-C062-ACDA-78EB-2E5B2DF3BA3F}"/>
-              </a:ext>
-            </a:extLst>
-          </p:cNvPr>
-          <p:cNvSpPr>
-            <a:spLocks noGrp="1"/>
-          </p:cNvSpPr>
-          <p:nvPr>
-            <p:ph type="ftr" sz="quarter" idx="11"/>
-          </p:nvPr>
-        </p:nvSpPr>
-        <p:spPr/>
-        <p:txBody>
-          <a:bodyPr/>
-          <a:lstStyle/>
-          <a:p>
-            <a:r>
-              <a:rPr lang="en-GB"/>
-              <a:t>Comparisons and Associations</a:t>
-            </a:r>
-          </a:p>
-        </p:txBody>
-      </p:sp>
-      <p:sp>
-        <p:nvSpPr>
-          <p:cNvPr id="6" name="Slide Number Placeholder 5">
-            <a:extLst>
-              <a:ext uri="{FF2B5EF4-FFF2-40B4-BE49-F238E27FC236}">
-                <a16:creationId xmlns:a16="http://schemas.microsoft.com/office/drawing/2014/main" id="{63AA58D7-3FC7-1868-4188-EE9D3329FE70}"/>
-              </a:ext>
-            </a:extLst>
-          </p:cNvPr>
-          <p:cNvSpPr>
-            <a:spLocks noGrp="1"/>
-          </p:cNvSpPr>
-          <p:nvPr>
-            <p:ph type="sldNum" sz="quarter" idx="12"/>
-          </p:nvPr>
-        </p:nvSpPr>
-        <p:spPr/>
-        <p:txBody>
-          <a:bodyPr/>
-          <a:lstStyle/>
-          <a:p>
-            <a:fld id="{9FAA51BB-2FC0-4DB8-B50E-F52D50E733B6}" type="slidenum">
-              <a:rPr lang="en-GB" smtClean="0"/>
-              <a:t>29</a:t>
-            </a:fld>
-            <a:endParaRPr lang="en-GB"/>
           </a:p>
         </p:txBody>
       </p:sp>
@@ -48364,6 +51781,162 @@
             <a:spLocks noGrp="1"/>
           </p:cNvSpPr>
           <p:nvPr>
+            <p:ph type="title"/>
+          </p:nvPr>
+        </p:nvSpPr>
+        <p:spPr/>
+        <p:txBody>
+          <a:bodyPr/>
+          <a:lstStyle/>
+          <a:p>
+            <a:r>
+              <a:rPr lang="en-GB" sz="4000" dirty="0"/>
+              <a:t>APPLICATION</a:t>
+            </a:r>
+            <a:endParaRPr sz="4000" dirty="0"/>
+          </a:p>
+        </p:txBody>
+      </p:sp>
+      <p:sp>
+        <p:nvSpPr>
+          <p:cNvPr id="3" name="Text Placeholder 2"/>
+          <p:cNvSpPr>
+            <a:spLocks noGrp="1"/>
+          </p:cNvSpPr>
+          <p:nvPr>
+            <p:ph type="body" sz="half" idx="2"/>
+          </p:nvPr>
+        </p:nvSpPr>
+        <p:spPr/>
+        <p:txBody>
+          <a:bodyPr/>
+          <a:lstStyle/>
+          <a:p>
+            <a:r>
+              <a:rPr sz="2400" dirty="0"/>
+              <a:t>Is income inequality associated with social trust? The Spirit Level (2009) and 15 years later</a:t>
+            </a:r>
+          </a:p>
+        </p:txBody>
+      </p:sp>
+      <p:sp>
+        <p:nvSpPr>
+          <p:cNvPr id="4" name="Date Placeholder 1">
+            <a:extLst>
+              <a:ext uri="{FF2B5EF4-FFF2-40B4-BE49-F238E27FC236}">
+                <a16:creationId xmlns:a16="http://schemas.microsoft.com/office/drawing/2014/main" id="{BFF50875-77B6-7B50-6789-FC1B56491CC3}"/>
+              </a:ext>
+            </a:extLst>
+          </p:cNvPr>
+          <p:cNvSpPr>
+            <a:spLocks noGrp="1"/>
+          </p:cNvSpPr>
+          <p:nvPr>
+            <p:ph type="dt" sz="half" idx="10"/>
+          </p:nvPr>
+        </p:nvSpPr>
+        <p:spPr/>
+        <p:txBody>
+          <a:bodyPr/>
+          <a:lstStyle/>
+          <a:p>
+            <a:fld id="{FA72AB8D-F27B-45C4-A3C3-1397CC759085}" type="datetimeyyyy">
+              <a:rPr lang="en-US" smtClean="0"/>
+              <a:t>2026</a:t>
+            </a:fld>
+            <a:endParaRPr lang="en-GB"/>
+          </a:p>
+        </p:txBody>
+      </p:sp>
+      <p:sp>
+        <p:nvSpPr>
+          <p:cNvPr id="5" name="Footer Placeholder 4">
+            <a:extLst>
+              <a:ext uri="{FF2B5EF4-FFF2-40B4-BE49-F238E27FC236}">
+                <a16:creationId xmlns:a16="http://schemas.microsoft.com/office/drawing/2014/main" id="{DE0B2AC9-C062-ACDA-78EB-2E5B2DF3BA3F}"/>
+              </a:ext>
+            </a:extLst>
+          </p:cNvPr>
+          <p:cNvSpPr>
+            <a:spLocks noGrp="1"/>
+          </p:cNvSpPr>
+          <p:nvPr>
+            <p:ph type="ftr" sz="quarter" idx="11"/>
+          </p:nvPr>
+        </p:nvSpPr>
+        <p:spPr/>
+        <p:txBody>
+          <a:bodyPr/>
+          <a:lstStyle/>
+          <a:p>
+            <a:r>
+              <a:rPr lang="en-GB"/>
+              <a:t>Comparisons and Associations</a:t>
+            </a:r>
+          </a:p>
+        </p:txBody>
+      </p:sp>
+      <p:sp>
+        <p:nvSpPr>
+          <p:cNvPr id="6" name="Slide Number Placeholder 5">
+            <a:extLst>
+              <a:ext uri="{FF2B5EF4-FFF2-40B4-BE49-F238E27FC236}">
+                <a16:creationId xmlns:a16="http://schemas.microsoft.com/office/drawing/2014/main" id="{63AA58D7-3FC7-1868-4188-EE9D3329FE70}"/>
+              </a:ext>
+            </a:extLst>
+          </p:cNvPr>
+          <p:cNvSpPr>
+            <a:spLocks noGrp="1"/>
+          </p:cNvSpPr>
+          <p:nvPr>
+            <p:ph type="sldNum" sz="quarter" idx="12"/>
+          </p:nvPr>
+        </p:nvSpPr>
+        <p:spPr/>
+        <p:txBody>
+          <a:bodyPr/>
+          <a:lstStyle/>
+          <a:p>
+            <a:fld id="{9FAA51BB-2FC0-4DB8-B50E-F52D50E733B6}" type="slidenum">
+              <a:rPr lang="en-GB" smtClean="0"/>
+              <a:t>30</a:t>
+            </a:fld>
+            <a:endParaRPr lang="en-GB"/>
+          </a:p>
+        </p:txBody>
+      </p:sp>
+    </p:spTree>
+  </p:cSld>
+  <p:clrMapOvr>
+    <a:masterClrMapping/>
+  </p:clrMapOvr>
+</p:sld>
+</file>
+
+<file path=ppt/slides/slide31.xml><?xml version="1.0" encoding="utf-8"?>
+<p:sld xmlns:a="http://schemas.openxmlformats.org/drawingml/2006/main" xmlns:r="http://schemas.openxmlformats.org/officeDocument/2006/relationships" xmlns:p="http://schemas.openxmlformats.org/presentationml/2006/main">
+  <p:cSld>
+    <p:spTree>
+      <p:nvGrpSpPr>
+        <p:cNvPr id="1" name=""/>
+        <p:cNvGrpSpPr/>
+        <p:nvPr/>
+      </p:nvGrpSpPr>
+      <p:grpSpPr>
+        <a:xfrm>
+          <a:off x="0" y="0"/>
+          <a:ext cx="0" cy="0"/>
+          <a:chOff x="0" y="0"/>
+          <a:chExt cx="0" cy="0"/>
+        </a:xfrm>
+      </p:grpSpPr>
+      <p:sp>
+        <p:nvSpPr>
+          <p:cNvPr id="2" name="Title 1"/>
+          <p:cNvSpPr>
+            <a:spLocks noGrp="1"/>
+          </p:cNvSpPr>
+          <p:nvPr>
             <p:ph type="title" hasCustomPrompt="1"/>
           </p:nvPr>
         </p:nvSpPr>
@@ -48429,7 +52002,7 @@
             <a:fld id="{C5EF2332-01BF-834F-8236-50238282D533}" type="slidenum">
               <a:rPr lang="en-US" smtClean="0"/>
               <a:pPr/>
-              <a:t>30</a:t>
+              <a:t>31</a:t>
             </a:fld>
             <a:endParaRPr lang="en-US" dirty="0"/>
           </a:p>
@@ -48644,7 +52217,7 @@
 </p:sld>
 </file>
 
-<file path=ppt/slides/slide31.xml><?xml version="1.0" encoding="utf-8"?>
+<file path=ppt/slides/slide32.xml><?xml version="1.0" encoding="utf-8"?>
 <p:sld xmlns:a="http://schemas.openxmlformats.org/drawingml/2006/main" xmlns:r="http://schemas.openxmlformats.org/officeDocument/2006/relationships" xmlns:p="http://schemas.openxmlformats.org/presentationml/2006/main">
   <p:cSld>
     <p:spTree>
@@ -48733,7 +52306,7 @@
             <a:fld id="{C5EF2332-01BF-834F-8236-50238282D533}" type="slidenum">
               <a:rPr lang="en-US" smtClean="0"/>
               <a:pPr/>
-              <a:t>31</a:t>
+              <a:t>32</a:t>
             </a:fld>
             <a:endParaRPr lang="en-US" dirty="0"/>
           </a:p>
@@ -48823,7 +52396,7 @@
 </p:sld>
 </file>
 
-<file path=ppt/slides/slide32.xml><?xml version="1.0" encoding="utf-8"?>
+<file path=ppt/slides/slide33.xml><?xml version="1.0" encoding="utf-8"?>
 <p:sld xmlns:a="http://schemas.openxmlformats.org/drawingml/2006/main" xmlns:r="http://schemas.openxmlformats.org/officeDocument/2006/relationships" xmlns:p="http://schemas.openxmlformats.org/presentationml/2006/main">
   <p:cSld>
     <p:spTree>
@@ -48942,7 +52515,7 @@
           <a:p>
             <a:fld id="{9FAA51BB-2FC0-4DB8-B50E-F52D50E733B6}" type="slidenum">
               <a:rPr lang="en-GB" smtClean="0"/>
-              <a:t>32</a:t>
+              <a:t>33</a:t>
             </a:fld>
             <a:endParaRPr lang="en-GB"/>
           </a:p>
@@ -49176,7 +52749,7 @@
 </p:sld>
 </file>
 
-<file path=ppt/slides/slide33.xml><?xml version="1.0" encoding="utf-8"?>
+<file path=ppt/slides/slide34.xml><?xml version="1.0" encoding="utf-8"?>
 <p:sld xmlns:a="http://schemas.openxmlformats.org/drawingml/2006/main" xmlns:r="http://schemas.openxmlformats.org/officeDocument/2006/relationships" xmlns:p="http://schemas.openxmlformats.org/presentationml/2006/main">
   <p:cSld>
     <p:spTree>
@@ -49295,7 +52868,7 @@
           <a:p>
             <a:fld id="{9FAA51BB-2FC0-4DB8-B50E-F52D50E733B6}" type="slidenum">
               <a:rPr lang="en-GB" smtClean="0"/>
-              <a:t>33</a:t>
+              <a:t>34</a:t>
             </a:fld>
             <a:endParaRPr lang="en-GB"/>
           </a:p>
@@ -49479,7 +53052,7 @@
 </p:sld>
 </file>
 
-<file path=ppt/slides/slide34.xml><?xml version="1.0" encoding="utf-8"?>
+<file path=ppt/slides/slide35.xml><?xml version="1.0" encoding="utf-8"?>
 <p:sld xmlns:a="http://schemas.openxmlformats.org/drawingml/2006/main" xmlns:r="http://schemas.openxmlformats.org/officeDocument/2006/relationships" xmlns:p="http://schemas.openxmlformats.org/presentationml/2006/main">
   <p:cSld>
     <p:spTree>
@@ -49598,7 +53171,7 @@
           <a:p>
             <a:fld id="{9FAA51BB-2FC0-4DB8-B50E-F52D50E733B6}" type="slidenum">
               <a:rPr lang="en-GB" smtClean="0"/>
-              <a:t>34</a:t>
+              <a:t>35</a:t>
             </a:fld>
             <a:endParaRPr lang="en-GB"/>
           </a:p>
@@ -49834,7 +53407,7 @@
 </p:sld>
 </file>
 
-<file path=ppt/slides/slide35.xml><?xml version="1.0" encoding="utf-8"?>
+<file path=ppt/slides/slide36.xml><?xml version="1.0" encoding="utf-8"?>
 <p:sld xmlns:a="http://schemas.openxmlformats.org/drawingml/2006/main" xmlns:r="http://schemas.openxmlformats.org/officeDocument/2006/relationships" xmlns:p="http://schemas.openxmlformats.org/presentationml/2006/main">
   <p:cSld>
     <p:bg>
@@ -49966,7 +53539,7 @@
           <a:p>
             <a:fld id="{9FAA51BB-2FC0-4DB8-B50E-F52D50E733B6}" type="slidenum">
               <a:rPr lang="en-GB" smtClean="0"/>
-              <a:t>35</a:t>
+              <a:t>36</a:t>
             </a:fld>
             <a:endParaRPr lang="en-GB"/>
           </a:p>
@@ -50503,682 +54076,6 @@
                 </a:solidFill>
               </a:rPr>
               <a:t>History, institutions  →  both</a:t>
-            </a:r>
-          </a:p>
-        </p:txBody>
-      </p:sp>
-    </p:spTree>
-  </p:cSld>
-  <p:clrMapOvr>
-    <a:masterClrMapping/>
-  </p:clrMapOvr>
-</p:sld>
-</file>
-
-<file path=ppt/slides/slide36.xml><?xml version="1.0" encoding="utf-8"?>
-<p:sld xmlns:a="http://schemas.openxmlformats.org/drawingml/2006/main" xmlns:r="http://schemas.openxmlformats.org/officeDocument/2006/relationships" xmlns:p="http://schemas.openxmlformats.org/presentationml/2006/main">
-  <p:cSld>
-    <p:spTree>
-      <p:nvGrpSpPr>
-        <p:cNvPr id="1" name=""/>
-        <p:cNvGrpSpPr/>
-        <p:nvPr/>
-      </p:nvGrpSpPr>
-      <p:grpSpPr>
-        <a:xfrm>
-          <a:off x="0" y="0"/>
-          <a:ext cx="0" cy="0"/>
-          <a:chOff x="0" y="0"/>
-          <a:chExt cx="0" cy="0"/>
-        </a:xfrm>
-      </p:grpSpPr>
-      <p:sp>
-        <p:nvSpPr>
-          <p:cNvPr id="2" name="Title 1"/>
-          <p:cNvSpPr>
-            <a:spLocks noGrp="1"/>
-          </p:cNvSpPr>
-          <p:nvPr>
-            <p:ph type="title"/>
-          </p:nvPr>
-        </p:nvSpPr>
-        <p:spPr/>
-        <p:txBody>
-          <a:bodyPr/>
-          <a:lstStyle/>
-          <a:p>
-            <a:r>
-              <a:t>Key takeaways</a:t>
-            </a:r>
-          </a:p>
-        </p:txBody>
-      </p:sp>
-      <p:sp>
-        <p:nvSpPr>
-          <p:cNvPr id="3" name="Date Placeholder 1">
-            <a:extLst>
-              <a:ext uri="{FF2B5EF4-FFF2-40B4-BE49-F238E27FC236}">
-                <a16:creationId xmlns:a16="http://schemas.microsoft.com/office/drawing/2014/main" id="{BFF50875-77B6-7B50-6789-FC1B56491CC3}"/>
-              </a:ext>
-            </a:extLst>
-          </p:cNvPr>
-          <p:cNvSpPr>
-            <a:spLocks noGrp="1"/>
-          </p:cNvSpPr>
-          <p:nvPr>
-            <p:ph type="dt" sz="half" idx="10"/>
-          </p:nvPr>
-        </p:nvSpPr>
-        <p:spPr/>
-        <p:txBody>
-          <a:bodyPr/>
-          <a:lstStyle/>
-          <a:p>
-            <a:fld id="{FA72AB8D-F27B-45C4-A3C3-1397CC759085}" type="datetimeyyyy">
-              <a:rPr lang="en-US" smtClean="0"/>
-              <a:t>2026</a:t>
-            </a:fld>
-            <a:endParaRPr lang="en-GB"/>
-          </a:p>
-        </p:txBody>
-      </p:sp>
-      <p:sp>
-        <p:nvSpPr>
-          <p:cNvPr id="5" name="Footer Placeholder 4">
-            <a:extLst>
-              <a:ext uri="{FF2B5EF4-FFF2-40B4-BE49-F238E27FC236}">
-                <a16:creationId xmlns:a16="http://schemas.microsoft.com/office/drawing/2014/main" id="{DE0B2AC9-C062-ACDA-78EB-2E5B2DF3BA3F}"/>
-              </a:ext>
-            </a:extLst>
-          </p:cNvPr>
-          <p:cNvSpPr>
-            <a:spLocks noGrp="1"/>
-          </p:cNvSpPr>
-          <p:nvPr>
-            <p:ph type="ftr" sz="quarter" idx="11"/>
-          </p:nvPr>
-        </p:nvSpPr>
-        <p:spPr/>
-        <p:txBody>
-          <a:bodyPr/>
-          <a:lstStyle/>
-          <a:p>
-            <a:r>
-              <a:rPr lang="en-GB"/>
-              <a:t>Comparisons and Associations</a:t>
-            </a:r>
-          </a:p>
-        </p:txBody>
-      </p:sp>
-      <p:sp>
-        <p:nvSpPr>
-          <p:cNvPr id="6" name="Slide Number Placeholder 5">
-            <a:extLst>
-              <a:ext uri="{FF2B5EF4-FFF2-40B4-BE49-F238E27FC236}">
-                <a16:creationId xmlns:a16="http://schemas.microsoft.com/office/drawing/2014/main" id="{63AA58D7-3FC7-1868-4188-EE9D3329FE70}"/>
-              </a:ext>
-            </a:extLst>
-          </p:cNvPr>
-          <p:cNvSpPr>
-            <a:spLocks noGrp="1"/>
-          </p:cNvSpPr>
-          <p:nvPr>
-            <p:ph type="sldNum" sz="quarter" idx="12"/>
-          </p:nvPr>
-        </p:nvSpPr>
-        <p:spPr/>
-        <p:txBody>
-          <a:bodyPr/>
-          <a:lstStyle/>
-          <a:p>
-            <a:fld id="{9FAA51BB-2FC0-4DB8-B50E-F52D50E733B6}" type="slidenum">
-              <a:rPr lang="en-GB" smtClean="0"/>
-              <a:t>36</a:t>
-            </a:fld>
-            <a:endParaRPr lang="en-GB"/>
-          </a:p>
-        </p:txBody>
-      </p:sp>
-      <p:sp>
-        <p:nvSpPr>
-          <p:cNvPr id="7" name="Card 1"/>
-          <p:cNvSpPr/>
-          <p:nvPr/>
-        </p:nvSpPr>
-        <p:spPr>
-          <a:xfrm>
-            <a:off x="758952" y="1417320"/>
-            <a:ext cx="5212080" cy="2103120"/>
-          </a:xfrm>
-          <a:prstGeom prst="roundRect">
-            <a:avLst>
-              <a:gd name="adj" fmla="val 8000"/>
-            </a:avLst>
-          </a:prstGeom>
-          <a:solidFill>
-            <a:srgbClr val="EEF3F7"/>
-          </a:solidFill>
-          <a:ln>
-            <a:noFill/>
-          </a:ln>
-        </p:spPr>
-        <p:txBody>
-          <a:bodyPr rtlCol="0" anchor="ctr"/>
-          <a:lstStyle/>
-          <a:p>
-            <a:endParaRPr/>
-          </a:p>
-        </p:txBody>
-      </p:sp>
-      <p:sp>
-        <p:nvSpPr>
-          <p:cNvPr id="8" name="Oval 7"/>
-          <p:cNvSpPr/>
-          <p:nvPr/>
-        </p:nvSpPr>
-        <p:spPr>
-          <a:xfrm>
-            <a:off x="987552" y="1645920"/>
-            <a:ext cx="566928" cy="566928"/>
-          </a:xfrm>
-          <a:prstGeom prst="ellipse">
-            <a:avLst/>
-          </a:prstGeom>
-          <a:solidFill>
-            <a:srgbClr val="1F394D"/>
-          </a:solidFill>
-          <a:ln>
-            <a:noFill/>
-          </a:ln>
-        </p:spPr>
-        <p:txBody>
-          <a:bodyPr lIns="0" tIns="0" rIns="0" bIns="0" rtlCol="0" anchor="ctr"/>
-          <a:lstStyle/>
-          <a:p>
-            <a:pPr algn="ctr"/>
-            <a:r>
-              <a:rPr sz="2000" b="1">
-                <a:solidFill>
-                  <a:srgbClr val="FFFFFF"/>
-                </a:solidFill>
-              </a:rPr>
-              <a:t>1</a:t>
-            </a:r>
-          </a:p>
-        </p:txBody>
-      </p:sp>
-      <p:sp>
-        <p:nvSpPr>
-          <p:cNvPr id="9" name="TextBox 8"/>
-          <p:cNvSpPr txBox="1"/>
-          <p:nvPr/>
-        </p:nvSpPr>
-        <p:spPr>
-          <a:xfrm>
-            <a:off x="1719072" y="1618488"/>
-            <a:ext cx="4023360" cy="640080"/>
-          </a:xfrm>
-          <a:prstGeom prst="rect">
-            <a:avLst/>
-          </a:prstGeom>
-          <a:noFill/>
-        </p:spPr>
-        <p:txBody>
-          <a:bodyPr wrap="square" lIns="0" tIns="0" rIns="0" bIns="0" anchor="ctr">
-            <a:spAutoFit/>
-          </a:bodyPr>
-          <a:lstStyle/>
-          <a:p>
-            <a:pPr algn="l"/>
-            <a:r>
-              <a:rPr sz="2000" b="1" i="0">
-                <a:solidFill>
-                  <a:srgbClr val="1F394D"/>
-                </a:solidFill>
-              </a:rPr>
-              <a:t>The variables’ levels pick the tool</a:t>
-            </a:r>
-          </a:p>
-        </p:txBody>
-      </p:sp>
-      <p:sp>
-        <p:nvSpPr>
-          <p:cNvPr id="10" name="TextBox 9"/>
-          <p:cNvSpPr txBox="1"/>
-          <p:nvPr/>
-        </p:nvSpPr>
-        <p:spPr>
-          <a:xfrm>
-            <a:off x="1719072" y="2313432"/>
-            <a:ext cx="4023360" cy="1097279"/>
-          </a:xfrm>
-          <a:prstGeom prst="rect">
-            <a:avLst/>
-          </a:prstGeom>
-          <a:noFill/>
-        </p:spPr>
-        <p:txBody>
-          <a:bodyPr wrap="square" lIns="0" tIns="0" rIns="0" bIns="0" anchor="t">
-            <a:spAutoFit/>
-          </a:bodyPr>
-          <a:lstStyle/>
-          <a:p>
-            <a:pPr algn="l"/>
-            <a:r>
-              <a:rPr sz="1700" b="0" i="0">
-                <a:solidFill>
-                  <a:srgbClr val="1F2A33"/>
-                </a:solidFill>
-              </a:rPr>
-              <a:t>Contingency table, group comparison or scatter plot.</a:t>
-            </a:r>
-          </a:p>
-        </p:txBody>
-      </p:sp>
-      <p:sp>
-        <p:nvSpPr>
-          <p:cNvPr id="11" name="Card 2"/>
-          <p:cNvSpPr/>
-          <p:nvPr/>
-        </p:nvSpPr>
-        <p:spPr>
-          <a:xfrm>
-            <a:off x="6153912" y="1417320"/>
-            <a:ext cx="5212080" cy="2103120"/>
-          </a:xfrm>
-          <a:prstGeom prst="roundRect">
-            <a:avLst>
-              <a:gd name="adj" fmla="val 8000"/>
-            </a:avLst>
-          </a:prstGeom>
-          <a:solidFill>
-            <a:srgbClr val="EEF3F7"/>
-          </a:solidFill>
-          <a:ln>
-            <a:noFill/>
-          </a:ln>
-        </p:spPr>
-        <p:txBody>
-          <a:bodyPr rtlCol="0" anchor="ctr"/>
-          <a:lstStyle/>
-          <a:p>
-            <a:endParaRPr/>
-          </a:p>
-        </p:txBody>
-      </p:sp>
-      <p:sp>
-        <p:nvSpPr>
-          <p:cNvPr id="12" name="Oval 11"/>
-          <p:cNvSpPr/>
-          <p:nvPr/>
-        </p:nvSpPr>
-        <p:spPr>
-          <a:xfrm>
-            <a:off x="6382512" y="1645920"/>
-            <a:ext cx="566928" cy="566928"/>
-          </a:xfrm>
-          <a:prstGeom prst="ellipse">
-            <a:avLst/>
-          </a:prstGeom>
-          <a:solidFill>
-            <a:srgbClr val="1F394D"/>
-          </a:solidFill>
-          <a:ln>
-            <a:noFill/>
-          </a:ln>
-        </p:spPr>
-        <p:txBody>
-          <a:bodyPr lIns="0" tIns="0" rIns="0" bIns="0" rtlCol="0" anchor="ctr"/>
-          <a:lstStyle/>
-          <a:p>
-            <a:pPr algn="ctr"/>
-            <a:r>
-              <a:rPr sz="2000" b="1">
-                <a:solidFill>
-                  <a:srgbClr val="FFFFFF"/>
-                </a:solidFill>
-              </a:rPr>
-              <a:t>2</a:t>
-            </a:r>
-          </a:p>
-        </p:txBody>
-      </p:sp>
-      <p:sp>
-        <p:nvSpPr>
-          <p:cNvPr id="13" name="TextBox 12"/>
-          <p:cNvSpPr txBox="1"/>
-          <p:nvPr/>
-        </p:nvSpPr>
-        <p:spPr>
-          <a:xfrm>
-            <a:off x="7114032" y="1618488"/>
-            <a:ext cx="4023360" cy="640080"/>
-          </a:xfrm>
-          <a:prstGeom prst="rect">
-            <a:avLst/>
-          </a:prstGeom>
-          <a:noFill/>
-        </p:spPr>
-        <p:txBody>
-          <a:bodyPr wrap="square" lIns="0" tIns="0" rIns="0" bIns="0" anchor="ctr">
-            <a:spAutoFit/>
-          </a:bodyPr>
-          <a:lstStyle/>
-          <a:p>
-            <a:pPr algn="l"/>
-            <a:r>
-              <a:rPr sz="2000" b="1" i="0">
-                <a:solidFill>
-                  <a:srgbClr val="1F394D"/>
-                </a:solidFill>
-              </a:rPr>
-              <a:t>Compare within groups</a:t>
-            </a:r>
-          </a:p>
-        </p:txBody>
-      </p:sp>
-      <p:sp>
-        <p:nvSpPr>
-          <p:cNvPr id="14" name="TextBox 13"/>
-          <p:cNvSpPr txBox="1"/>
-          <p:nvPr/>
-        </p:nvSpPr>
-        <p:spPr>
-          <a:xfrm>
-            <a:off x="7114032" y="2313432"/>
-            <a:ext cx="4023360" cy="1097279"/>
-          </a:xfrm>
-          <a:prstGeom prst="rect">
-            <a:avLst/>
-          </a:prstGeom>
-          <a:noFill/>
-        </p:spPr>
-        <p:txBody>
-          <a:bodyPr wrap="square" lIns="0" tIns="0" rIns="0" bIns="0" anchor="t">
-            <a:spAutoFit/>
-          </a:bodyPr>
-          <a:lstStyle/>
-          <a:p>
-            <a:pPr algn="l"/>
-            <a:r>
-              <a:rPr sz="1700" b="0" i="0">
-                <a:solidFill>
-                  <a:srgbClr val="1F2A33"/>
-                </a:solidFill>
-              </a:rPr>
-              <a:t>Column percentages (explanatory variable in the columns) answer “do groups differ?”</a:t>
-            </a:r>
-          </a:p>
-        </p:txBody>
-      </p:sp>
-      <p:sp>
-        <p:nvSpPr>
-          <p:cNvPr id="15" name="Card 3"/>
-          <p:cNvSpPr/>
-          <p:nvPr/>
-        </p:nvSpPr>
-        <p:spPr>
-          <a:xfrm>
-            <a:off x="758952" y="3749039"/>
-            <a:ext cx="5212080" cy="2103120"/>
-          </a:xfrm>
-          <a:prstGeom prst="roundRect">
-            <a:avLst>
-              <a:gd name="adj" fmla="val 8000"/>
-            </a:avLst>
-          </a:prstGeom>
-          <a:solidFill>
-            <a:srgbClr val="EEF3F7"/>
-          </a:solidFill>
-          <a:ln>
-            <a:noFill/>
-          </a:ln>
-        </p:spPr>
-        <p:txBody>
-          <a:bodyPr rtlCol="0" anchor="ctr"/>
-          <a:lstStyle/>
-          <a:p>
-            <a:endParaRPr/>
-          </a:p>
-        </p:txBody>
-      </p:sp>
-      <p:sp>
-        <p:nvSpPr>
-          <p:cNvPr id="16" name="Oval 15"/>
-          <p:cNvSpPr/>
-          <p:nvPr/>
-        </p:nvSpPr>
-        <p:spPr>
-          <a:xfrm>
-            <a:off x="987552" y="3977639"/>
-            <a:ext cx="566928" cy="566928"/>
-          </a:xfrm>
-          <a:prstGeom prst="ellipse">
-            <a:avLst/>
-          </a:prstGeom>
-          <a:solidFill>
-            <a:srgbClr val="1F394D"/>
-          </a:solidFill>
-          <a:ln>
-            <a:noFill/>
-          </a:ln>
-        </p:spPr>
-        <p:txBody>
-          <a:bodyPr lIns="0" tIns="0" rIns="0" bIns="0" rtlCol="0" anchor="ctr"/>
-          <a:lstStyle/>
-          <a:p>
-            <a:pPr algn="ctr"/>
-            <a:r>
-              <a:rPr sz="2000" b="1">
-                <a:solidFill>
-                  <a:srgbClr val="FFFFFF"/>
-                </a:solidFill>
-              </a:rPr>
-              <a:t>3</a:t>
-            </a:r>
-          </a:p>
-        </p:txBody>
-      </p:sp>
-      <p:sp>
-        <p:nvSpPr>
-          <p:cNvPr id="17" name="TextBox 16"/>
-          <p:cNvSpPr txBox="1"/>
-          <p:nvPr/>
-        </p:nvSpPr>
-        <p:spPr>
-          <a:xfrm>
-            <a:off x="1719072" y="3950207"/>
-            <a:ext cx="4023360" cy="640080"/>
-          </a:xfrm>
-          <a:prstGeom prst="rect">
-            <a:avLst/>
-          </a:prstGeom>
-          <a:noFill/>
-        </p:spPr>
-        <p:txBody>
-          <a:bodyPr wrap="square" lIns="0" tIns="0" rIns="0" bIns="0" anchor="ctr">
-            <a:spAutoFit/>
-          </a:bodyPr>
-          <a:lstStyle/>
-          <a:p>
-            <a:pPr algn="l"/>
-            <a:r>
-              <a:rPr sz="2000" b="1" i="0">
-                <a:solidFill>
-                  <a:srgbClr val="1F394D"/>
-                </a:solidFill>
-              </a:rPr>
-              <a:t>Size against spread</a:t>
-            </a:r>
-          </a:p>
-        </p:txBody>
-      </p:sp>
-      <p:sp>
-        <p:nvSpPr>
-          <p:cNvPr id="18" name="TextBox 17"/>
-          <p:cNvSpPr txBox="1"/>
-          <p:nvPr/>
-        </p:nvSpPr>
-        <p:spPr>
-          <a:xfrm>
-            <a:off x="1719072" y="4645152"/>
-            <a:ext cx="4023360" cy="1097279"/>
-          </a:xfrm>
-          <a:prstGeom prst="rect">
-            <a:avLst/>
-          </a:prstGeom>
-          <a:noFill/>
-        </p:spPr>
-        <p:txBody>
-          <a:bodyPr wrap="square" lIns="0" tIns="0" rIns="0" bIns="0" anchor="t">
-            <a:spAutoFit/>
-          </a:bodyPr>
-          <a:lstStyle/>
-          <a:p>
-            <a:pPr algn="l"/>
-            <a:r>
-              <a:rPr sz="1700" b="0" i="0">
-                <a:solidFill>
-                  <a:srgbClr val="1F2A33"/>
-                </a:solidFill>
-              </a:rPr>
-              <a:t>A gap in means matters only relative to the spread within groups.</a:t>
-            </a:r>
-          </a:p>
-        </p:txBody>
-      </p:sp>
-      <p:sp>
-        <p:nvSpPr>
-          <p:cNvPr id="19" name="Card 4"/>
-          <p:cNvSpPr/>
-          <p:nvPr/>
-        </p:nvSpPr>
-        <p:spPr>
-          <a:xfrm>
-            <a:off x="6153912" y="3749039"/>
-            <a:ext cx="5212080" cy="2103120"/>
-          </a:xfrm>
-          <a:prstGeom prst="roundRect">
-            <a:avLst>
-              <a:gd name="adj" fmla="val 8000"/>
-            </a:avLst>
-          </a:prstGeom>
-          <a:solidFill>
-            <a:srgbClr val="EEF3F7"/>
-          </a:solidFill>
-          <a:ln>
-            <a:noFill/>
-          </a:ln>
-        </p:spPr>
-        <p:txBody>
-          <a:bodyPr rtlCol="0" anchor="ctr"/>
-          <a:lstStyle/>
-          <a:p>
-            <a:endParaRPr/>
-          </a:p>
-        </p:txBody>
-      </p:sp>
-      <p:sp>
-        <p:nvSpPr>
-          <p:cNvPr id="20" name="Oval 19"/>
-          <p:cNvSpPr/>
-          <p:nvPr/>
-        </p:nvSpPr>
-        <p:spPr>
-          <a:xfrm>
-            <a:off x="6382512" y="3977639"/>
-            <a:ext cx="566928" cy="566928"/>
-          </a:xfrm>
-          <a:prstGeom prst="ellipse">
-            <a:avLst/>
-          </a:prstGeom>
-          <a:solidFill>
-            <a:srgbClr val="1F394D"/>
-          </a:solidFill>
-          <a:ln>
-            <a:noFill/>
-          </a:ln>
-        </p:spPr>
-        <p:txBody>
-          <a:bodyPr lIns="0" tIns="0" rIns="0" bIns="0" rtlCol="0" anchor="ctr"/>
-          <a:lstStyle/>
-          <a:p>
-            <a:pPr algn="ctr"/>
-            <a:r>
-              <a:rPr sz="2000" b="1">
-                <a:solidFill>
-                  <a:srgbClr val="FFFFFF"/>
-                </a:solidFill>
-              </a:rPr>
-              <a:t>4</a:t>
-            </a:r>
-          </a:p>
-        </p:txBody>
-      </p:sp>
-      <p:sp>
-        <p:nvSpPr>
-          <p:cNvPr id="21" name="TextBox 20"/>
-          <p:cNvSpPr txBox="1"/>
-          <p:nvPr/>
-        </p:nvSpPr>
-        <p:spPr>
-          <a:xfrm>
-            <a:off x="7114032" y="3950207"/>
-            <a:ext cx="4023360" cy="640080"/>
-          </a:xfrm>
-          <a:prstGeom prst="rect">
-            <a:avLst/>
-          </a:prstGeom>
-          <a:noFill/>
-        </p:spPr>
-        <p:txBody>
-          <a:bodyPr wrap="square" lIns="0" tIns="0" rIns="0" bIns="0" anchor="ctr">
-            <a:spAutoFit/>
-          </a:bodyPr>
-          <a:lstStyle/>
-          <a:p>
-            <a:pPr algn="l"/>
-            <a:r>
-              <a:rPr sz="2000" b="1" i="0">
-                <a:solidFill>
-                  <a:srgbClr val="1F394D"/>
-                </a:solidFill>
-              </a:rPr>
-              <a:t>Look before you correlate</a:t>
-            </a:r>
-          </a:p>
-        </p:txBody>
-      </p:sp>
-      <p:sp>
-        <p:nvSpPr>
-          <p:cNvPr id="22" name="TextBox 21"/>
-          <p:cNvSpPr txBox="1"/>
-          <p:nvPr/>
-        </p:nvSpPr>
-        <p:spPr>
-          <a:xfrm>
-            <a:off x="7114032" y="4645152"/>
-            <a:ext cx="4023360" cy="1097279"/>
-          </a:xfrm>
-          <a:prstGeom prst="rect">
-            <a:avLst/>
-          </a:prstGeom>
-          <a:noFill/>
-        </p:spPr>
-        <p:txBody>
-          <a:bodyPr wrap="square" lIns="0" tIns="0" rIns="0" bIns="0" anchor="t">
-            <a:spAutoFit/>
-          </a:bodyPr>
-          <a:lstStyle/>
-          <a:p>
-            <a:pPr algn="l"/>
-            <a:r>
-              <a:rPr sz="1700" b="0" i="0">
-                <a:solidFill>
-                  <a:srgbClr val="1F2A33"/>
-                </a:solidFill>
-              </a:rPr>
-              <a:t>r captures straight lines only, and one case can move it a lot.</a:t>
             </a:r>
           </a:p>
         </p:txBody>
@@ -51210,13 +54107,7 @@
       </p:grpSpPr>
       <p:sp>
         <p:nvSpPr>
-          <p:cNvPr id="7" name="Title 6">
-            <a:extLst>
-              <a:ext uri="{FF2B5EF4-FFF2-40B4-BE49-F238E27FC236}">
-                <a16:creationId xmlns:a16="http://schemas.microsoft.com/office/drawing/2014/main" id="{75BCA108-CB1D-5541-DFA5-C4B6F5FB8C65}"/>
-              </a:ext>
-            </a:extLst>
-          </p:cNvPr>
+          <p:cNvPr id="2" name="Title 1"/>
           <p:cNvSpPr>
             <a:spLocks noGrp="1"/>
           </p:cNvSpPr>
@@ -51224,28 +54115,20 @@
             <p:ph type="title"/>
           </p:nvPr>
         </p:nvSpPr>
-        <p:spPr>
-          <a:xfrm>
-            <a:off x="465512" y="2761331"/>
-            <a:ext cx="3200400" cy="1198178"/>
-          </a:xfrm>
-        </p:spPr>
-        <p:txBody>
-          <a:bodyPr vert="horz" lIns="91440" tIns="45720" rIns="91440" bIns="45720" rtlCol="0" anchor="b">
-            <a:normAutofit/>
-          </a:bodyPr>
+        <p:spPr/>
+        <p:txBody>
+          <a:bodyPr/>
           <a:lstStyle/>
           <a:p>
             <a:r>
-              <a:rPr lang="en-GB" dirty="0"/>
-              <a:t>Assignment Questions</a:t>
+              <a:t>Reporting the results</a:t>
             </a:r>
           </a:p>
         </p:txBody>
       </p:sp>
       <p:sp>
         <p:nvSpPr>
-          <p:cNvPr id="2" name="Date Placeholder 1">
+          <p:cNvPr id="3" name="Date Placeholder 1">
             <a:extLst>
               <a:ext uri="{FF2B5EF4-FFF2-40B4-BE49-F238E27FC236}">
                 <a16:creationId xmlns:a16="http://schemas.microsoft.com/office/drawing/2014/main" id="{BFF50875-77B6-7B50-6789-FC1B56491CC3}"/>
@@ -51259,30 +54142,13 @@
             <p:ph type="dt" sz="half" idx="10"/>
           </p:nvPr>
         </p:nvSpPr>
-        <p:spPr>
-          <a:xfrm>
-            <a:off x="465512" y="6459785"/>
-            <a:ext cx="2618510" cy="365125"/>
-          </a:xfrm>
-        </p:spPr>
-        <p:txBody>
-          <a:bodyPr vert="horz" lIns="91440" tIns="45720" rIns="91440" bIns="45720" rtlCol="0" anchor="ctr">
-            <a:normAutofit/>
-          </a:bodyPr>
-          <a:lstStyle/>
-          <a:p>
-            <a:pPr>
-              <a:spcAft>
-                <a:spcPts val="600"/>
-              </a:spcAft>
-            </a:pPr>
+        <p:spPr/>
+        <p:txBody>
+          <a:bodyPr/>
+          <a:lstStyle/>
+          <a:p>
             <a:fld id="{FA72AB8D-F27B-45C4-A3C3-1397CC759085}" type="datetimeyyyy">
               <a:rPr lang="en-US" smtClean="0"/>
-              <a:pPr>
-                <a:spcAft>
-                  <a:spcPts val="600"/>
-                </a:spcAft>
-              </a:pPr>
               <a:t>2026</a:t>
             </a:fld>
             <a:endParaRPr lang="en-GB"/>
@@ -51305,29 +54171,13 @@
             <p:ph type="ftr" sz="quarter" idx="11"/>
           </p:nvPr>
         </p:nvSpPr>
-        <p:spPr>
-          <a:xfrm>
-            <a:off x="4800600" y="6459785"/>
-            <a:ext cx="4648200" cy="365125"/>
-          </a:xfrm>
-        </p:spPr>
-        <p:txBody>
-          <a:bodyPr vert="horz" lIns="91440" tIns="45720" rIns="91440" bIns="45720" rtlCol="0" anchor="ctr">
-            <a:normAutofit/>
-          </a:bodyPr>
-          <a:lstStyle/>
-          <a:p>
-            <a:pPr>
-              <a:spcAft>
-                <a:spcPts val="600"/>
-              </a:spcAft>
-            </a:pPr>
+        <p:spPr/>
+        <p:txBody>
+          <a:bodyPr/>
+          <a:lstStyle/>
+          <a:p>
             <a:r>
-              <a:rPr lang="en-GB" kern="1200" cap="all" baseline="0">
-                <a:latin typeface="+mn-lt"/>
-                <a:ea typeface="+mn-ea"/>
-                <a:cs typeface="+mn-cs"/>
-              </a:rPr>
+              <a:rPr lang="en-GB"/>
               <a:t>Comparisons and Associations</a:t>
             </a:r>
           </a:p>
@@ -51349,86 +54199,651 @@
             <p:ph type="sldNum" sz="quarter" idx="12"/>
           </p:nvPr>
         </p:nvSpPr>
+        <p:spPr/>
+        <p:txBody>
+          <a:bodyPr/>
+          <a:lstStyle/>
+          <a:p>
+            <a:fld id="{9FAA51BB-2FC0-4DB8-B50E-F52D50E733B6}" type="slidenum">
+              <a:rPr lang="en-GB" smtClean="0"/>
+              <a:t>37</a:t>
+            </a:fld>
+            <a:endParaRPr lang="en-GB"/>
+          </a:p>
+        </p:txBody>
+      </p:sp>
+      <p:sp>
+        <p:nvSpPr>
+          <p:cNvPr id="7" name="Rounded Rectangle 6"/>
+          <p:cNvSpPr/>
+          <p:nvPr/>
+        </p:nvSpPr>
         <p:spPr>
           <a:xfrm>
-            <a:off x="9900458" y="6459785"/>
-            <a:ext cx="1312025" cy="365125"/>
+            <a:off x="758952" y="1371600"/>
+            <a:ext cx="6675120" cy="4434840"/>
           </a:xfrm>
+          <a:prstGeom prst="roundRect">
+            <a:avLst>
+              <a:gd name="adj" fmla="val 8000"/>
+            </a:avLst>
+          </a:prstGeom>
+          <a:solidFill>
+            <a:srgbClr val="EEF3F7"/>
+          </a:solidFill>
+          <a:ln>
+            <a:noFill/>
+          </a:ln>
         </p:spPr>
         <p:txBody>
-          <a:bodyPr vert="horz" lIns="91440" tIns="45720" rIns="91440" bIns="45720" rtlCol="0" anchor="ctr">
-            <a:normAutofit/>
+          <a:bodyPr rtlCol="0" anchor="ctr"/>
+          <a:lstStyle/>
+          <a:p>
+            <a:pPr algn="ctr"/>
+            <a:endParaRPr/>
+          </a:p>
+        </p:txBody>
+      </p:sp>
+      <p:sp>
+        <p:nvSpPr>
+          <p:cNvPr id="8" name="TextBox 7"/>
+          <p:cNvSpPr txBox="1"/>
+          <p:nvPr/>
+        </p:nvSpPr>
+        <p:spPr>
+          <a:xfrm>
+            <a:off x="987552" y="1508760"/>
+            <a:ext cx="6263640" cy="4160520"/>
+          </a:xfrm>
+          <a:prstGeom prst="rect">
+            <a:avLst/>
+          </a:prstGeom>
+          <a:noFill/>
+        </p:spPr>
+        <p:txBody>
+          <a:bodyPr wrap="square" lIns="0" tIns="0" rIns="0" bIns="0" anchor="t">
+            <a:spAutoFit/>
           </a:bodyPr>
           <a:lstStyle/>
           <a:p>
-            <a:pPr>
+            <a:pPr algn="l">
               <a:spcAft>
                 <a:spcPts val="600"/>
               </a:spcAft>
             </a:pPr>
-            <a:fld id="{9FAA51BB-2FC0-4DB8-B50E-F52D50E733B6}" type="slidenum">
-              <a:rPr lang="en-GB" smtClean="0"/>
-              <a:pPr>
-                <a:spcAft>
-                  <a:spcPts val="600"/>
-                </a:spcAft>
-              </a:pPr>
-              <a:t>37</a:t>
-            </a:fld>
-            <a:endParaRPr lang="en-GB"/>
-          </a:p>
-        </p:txBody>
-      </p:sp>
-      <p:graphicFrame>
-        <p:nvGraphicFramePr>
-          <p:cNvPr id="9" name="TextBox 3">
-            <a:extLst>
-              <a:ext uri="{FF2B5EF4-FFF2-40B4-BE49-F238E27FC236}">
-                <a16:creationId xmlns:a16="http://schemas.microsoft.com/office/drawing/2014/main" id="{C99D6C87-9AF3-E3D7-FBAB-D1AACB4C355B}"/>
-              </a:ext>
-            </a:extLst>
-          </p:cNvPr>
-          <p:cNvGraphicFramePr/>
-          <p:nvPr>
-            <p:extLst>
-              <p:ext uri="{D42A27DB-BD31-4B8C-83A1-F6EECF244321}">
-                <p14:modId xmlns:p14="http://schemas.microsoft.com/office/powerpoint/2010/main" val="3184808095"/>
-              </p:ext>
-            </p:extLst>
-          </p:nvPr>
-        </p:nvGraphicFramePr>
-        <p:xfrm>
-          <a:off x="4800600" y="731520"/>
-          <a:ext cx="6492240" cy="5257800"/>
-        </p:xfrm>
-        <a:graphic>
-          <a:graphicData uri="http://schemas.openxmlformats.org/drawingml/2006/diagram">
-            <dgm:relIds xmlns:dgm="http://schemas.openxmlformats.org/drawingml/2006/diagram" xmlns:r="http://schemas.openxmlformats.org/officeDocument/2006/relationships" r:dm="rId3" r:lo="rId4" r:qs="rId5" r:cs="rId6"/>
-          </a:graphicData>
-        </a:graphic>
-      </p:graphicFrame>
+            <a:r>
+              <a:rPr sz="1500" b="1" i="0">
+                <a:solidFill>
+                  <a:srgbClr val="3F739B"/>
+                </a:solidFill>
+              </a:rPr>
+              <a:t>Example paragraph</a:t>
+            </a:r>
+            <a:endParaRPr sz="1500"/>
+          </a:p>
+          <a:p>
+            <a:pPr algn="l">
+              <a:lnSpc>
+                <a:spcPct val="106000"/>
+              </a:lnSpc>
+            </a:pPr>
+            <a:r>
+              <a:rPr sz="1700" b="0" i="0">
+                <a:solidFill>
+                  <a:srgbClr val="1F2A33"/>
+                </a:solidFill>
+              </a:rPr>
+              <a:t>In the British Social Attitudes survey 2010, 51.7% of men and 40.7% of women said that most people can be trusted, a gap of 11 percentage points. On the 0–10 trust scale of the European Social Survey 2023–24 (UK), men averaged 5.54 and women 5.27; this gap of 0.27 points is small next to the standard deviation of about 2.3, and the two distributions overlap almost completely. Across 23 rich countries, income inequality and trust were strongly and negatively correlated (r = −0.66): more unequal countries tended to have lower trust, with clear exceptions.</a:t>
+            </a:r>
+            <a:endParaRPr sz="1700"/>
+          </a:p>
+        </p:txBody>
+      </p:sp>
+      <p:sp>
+        <p:nvSpPr>
+          <p:cNvPr id="9" name="Rounded Rectangle 8"/>
+          <p:cNvSpPr/>
+          <p:nvPr/>
+        </p:nvSpPr>
+        <p:spPr>
+          <a:xfrm>
+            <a:off x="7635240" y="1371600"/>
+            <a:ext cx="3730752" cy="4434840"/>
+          </a:xfrm>
+          <a:prstGeom prst="roundRect">
+            <a:avLst>
+              <a:gd name="adj" fmla="val 8000"/>
+            </a:avLst>
+          </a:prstGeom>
+          <a:solidFill>
+            <a:srgbClr val="1F394D"/>
+          </a:solidFill>
+          <a:ln>
+            <a:noFill/>
+          </a:ln>
+        </p:spPr>
+        <p:txBody>
+          <a:bodyPr rtlCol="0" anchor="ctr"/>
+          <a:lstStyle/>
+          <a:p>
+            <a:pPr algn="ctr"/>
+            <a:endParaRPr/>
+          </a:p>
+        </p:txBody>
+      </p:sp>
+      <p:sp>
+        <p:nvSpPr>
+          <p:cNvPr id="10" name="TextBox 9"/>
+          <p:cNvSpPr txBox="1"/>
+          <p:nvPr/>
+        </p:nvSpPr>
+        <p:spPr>
+          <a:xfrm>
+            <a:off x="7863840" y="1508760"/>
+            <a:ext cx="3337560" cy="365760"/>
+          </a:xfrm>
+          <a:prstGeom prst="rect">
+            <a:avLst/>
+          </a:prstGeom>
+          <a:noFill/>
+        </p:spPr>
+        <p:txBody>
+          <a:bodyPr wrap="square" lIns="0" tIns="0" rIns="0" bIns="0" anchor="t">
+            <a:spAutoFit/>
+          </a:bodyPr>
+          <a:lstStyle/>
+          <a:p>
+            <a:pPr algn="l"/>
+            <a:r>
+              <a:rPr sz="1600" b="1" i="0">
+                <a:solidFill>
+                  <a:srgbClr val="B88C00"/>
+                </a:solidFill>
+              </a:rPr>
+              <a:t>Checklist</a:t>
+            </a:r>
+            <a:endParaRPr sz="1600"/>
+          </a:p>
+        </p:txBody>
+      </p:sp>
+      <p:sp>
+        <p:nvSpPr>
+          <p:cNvPr id="11" name="Oval 10"/>
+          <p:cNvSpPr/>
+          <p:nvPr/>
+        </p:nvSpPr>
+        <p:spPr>
+          <a:xfrm>
+            <a:off x="7882128" y="2057400"/>
+            <a:ext cx="365760" cy="365760"/>
+          </a:xfrm>
+          <a:prstGeom prst="ellipse">
+            <a:avLst/>
+          </a:prstGeom>
+          <a:solidFill>
+            <a:srgbClr val="B88C00"/>
+          </a:solidFill>
+          <a:ln>
+            <a:noFill/>
+          </a:ln>
+        </p:spPr>
+        <p:txBody>
+          <a:bodyPr wrap="square" lIns="0" tIns="18288" rIns="0" bIns="18288" rtlCol="0" anchor="ctr"/>
+          <a:lstStyle/>
+          <a:p>
+            <a:pPr algn="ctr"/>
+            <a:r>
+              <a:rPr sz="1400" b="1" i="0">
+                <a:solidFill>
+                  <a:srgbClr val="FFFFFF"/>
+                </a:solidFill>
+              </a:rPr>
+              <a:t>1</a:t>
+            </a:r>
+            <a:endParaRPr sz="1400"/>
+          </a:p>
+        </p:txBody>
+      </p:sp>
+      <p:sp>
+        <p:nvSpPr>
+          <p:cNvPr id="12" name="TextBox 11"/>
+          <p:cNvSpPr txBox="1"/>
+          <p:nvPr/>
+        </p:nvSpPr>
+        <p:spPr>
+          <a:xfrm>
+            <a:off x="8385048" y="2057400"/>
+            <a:ext cx="2880360" cy="384048"/>
+          </a:xfrm>
+          <a:prstGeom prst="rect">
+            <a:avLst/>
+          </a:prstGeom>
+          <a:noFill/>
+        </p:spPr>
+        <p:txBody>
+          <a:bodyPr wrap="square" lIns="0" tIns="0" rIns="0" bIns="0" anchor="ctr">
+            <a:spAutoFit/>
+          </a:bodyPr>
+          <a:lstStyle/>
+          <a:p>
+            <a:pPr algn="l"/>
+            <a:r>
+              <a:rPr sz="1500" b="0" i="0">
+                <a:solidFill>
+                  <a:srgbClr val="FFFFFF"/>
+                </a:solidFill>
+              </a:rPr>
+              <a:t>Which variable is the outcome</a:t>
+            </a:r>
+            <a:endParaRPr sz="1500"/>
+          </a:p>
+        </p:txBody>
+      </p:sp>
+      <p:sp>
+        <p:nvSpPr>
+          <p:cNvPr id="13" name="Oval 12"/>
+          <p:cNvSpPr/>
+          <p:nvPr/>
+        </p:nvSpPr>
+        <p:spPr>
+          <a:xfrm>
+            <a:off x="7882128" y="2660904"/>
+            <a:ext cx="365760" cy="365760"/>
+          </a:xfrm>
+          <a:prstGeom prst="ellipse">
+            <a:avLst/>
+          </a:prstGeom>
+          <a:solidFill>
+            <a:srgbClr val="B88C00"/>
+          </a:solidFill>
+          <a:ln>
+            <a:noFill/>
+          </a:ln>
+        </p:spPr>
+        <p:txBody>
+          <a:bodyPr wrap="square" lIns="0" tIns="18288" rIns="0" bIns="18288" rtlCol="0" anchor="ctr"/>
+          <a:lstStyle/>
+          <a:p>
+            <a:pPr algn="ctr"/>
+            <a:r>
+              <a:rPr sz="1400" b="1" i="0">
+                <a:solidFill>
+                  <a:srgbClr val="FFFFFF"/>
+                </a:solidFill>
+              </a:rPr>
+              <a:t>2</a:t>
+            </a:r>
+            <a:endParaRPr sz="1400"/>
+          </a:p>
+        </p:txBody>
+      </p:sp>
+      <p:sp>
+        <p:nvSpPr>
+          <p:cNvPr id="14" name="TextBox 13"/>
+          <p:cNvSpPr txBox="1"/>
+          <p:nvPr/>
+        </p:nvSpPr>
+        <p:spPr>
+          <a:xfrm>
+            <a:off x="8385048" y="2660904"/>
+            <a:ext cx="2880360" cy="384048"/>
+          </a:xfrm>
+          <a:prstGeom prst="rect">
+            <a:avLst/>
+          </a:prstGeom>
+          <a:noFill/>
+        </p:spPr>
+        <p:txBody>
+          <a:bodyPr wrap="square" lIns="0" tIns="0" rIns="0" bIns="0" anchor="ctr">
+            <a:spAutoFit/>
+          </a:bodyPr>
+          <a:lstStyle/>
+          <a:p>
+            <a:pPr algn="l"/>
+            <a:r>
+              <a:rPr sz="1500" b="0" i="0">
+                <a:solidFill>
+                  <a:srgbClr val="FFFFFF"/>
+                </a:solidFill>
+              </a:rPr>
+              <a:t>Percentages within the groups compared</a:t>
+            </a:r>
+            <a:endParaRPr sz="1500"/>
+          </a:p>
+        </p:txBody>
+      </p:sp>
+      <p:sp>
+        <p:nvSpPr>
+          <p:cNvPr id="15" name="Oval 14"/>
+          <p:cNvSpPr/>
+          <p:nvPr/>
+        </p:nvSpPr>
+        <p:spPr>
+          <a:xfrm>
+            <a:off x="7882128" y="3264408"/>
+            <a:ext cx="365760" cy="365760"/>
+          </a:xfrm>
+          <a:prstGeom prst="ellipse">
+            <a:avLst/>
+          </a:prstGeom>
+          <a:solidFill>
+            <a:srgbClr val="B88C00"/>
+          </a:solidFill>
+          <a:ln>
+            <a:noFill/>
+          </a:ln>
+        </p:spPr>
+        <p:txBody>
+          <a:bodyPr wrap="square" lIns="0" tIns="18288" rIns="0" bIns="18288" rtlCol="0" anchor="ctr"/>
+          <a:lstStyle/>
+          <a:p>
+            <a:pPr algn="ctr"/>
+            <a:r>
+              <a:rPr sz="1400" b="1" i="0">
+                <a:solidFill>
+                  <a:srgbClr val="FFFFFF"/>
+                </a:solidFill>
+              </a:rPr>
+              <a:t>3</a:t>
+            </a:r>
+            <a:endParaRPr sz="1400"/>
+          </a:p>
+        </p:txBody>
+      </p:sp>
+      <p:sp>
+        <p:nvSpPr>
+          <p:cNvPr id="16" name="TextBox 15"/>
+          <p:cNvSpPr txBox="1"/>
+          <p:nvPr/>
+        </p:nvSpPr>
+        <p:spPr>
+          <a:xfrm>
+            <a:off x="8385048" y="3264408"/>
+            <a:ext cx="2880360" cy="384048"/>
+          </a:xfrm>
+          <a:prstGeom prst="rect">
+            <a:avLst/>
+          </a:prstGeom>
+          <a:noFill/>
+        </p:spPr>
+        <p:txBody>
+          <a:bodyPr wrap="square" lIns="0" tIns="0" rIns="0" bIns="0" anchor="ctr">
+            <a:spAutoFit/>
+          </a:bodyPr>
+          <a:lstStyle/>
+          <a:p>
+            <a:pPr algn="l"/>
+            <a:r>
+              <a:rPr sz="1500" b="0" i="0">
+                <a:solidFill>
+                  <a:srgbClr val="FFFFFF"/>
+                </a:solidFill>
+              </a:rPr>
+              <a:t>The size of the gap, in the outcome’s units</a:t>
+            </a:r>
+            <a:endParaRPr sz="1500"/>
+          </a:p>
+        </p:txBody>
+      </p:sp>
+      <p:sp>
+        <p:nvSpPr>
+          <p:cNvPr id="17" name="Oval 16"/>
+          <p:cNvSpPr/>
+          <p:nvPr/>
+        </p:nvSpPr>
+        <p:spPr>
+          <a:xfrm>
+            <a:off x="7882128" y="3867912"/>
+            <a:ext cx="365760" cy="365760"/>
+          </a:xfrm>
+          <a:prstGeom prst="ellipse">
+            <a:avLst/>
+          </a:prstGeom>
+          <a:solidFill>
+            <a:srgbClr val="B88C00"/>
+          </a:solidFill>
+          <a:ln>
+            <a:noFill/>
+          </a:ln>
+        </p:spPr>
+        <p:txBody>
+          <a:bodyPr wrap="square" lIns="0" tIns="18288" rIns="0" bIns="18288" rtlCol="0" anchor="ctr"/>
+          <a:lstStyle/>
+          <a:p>
+            <a:pPr algn="ctr"/>
+            <a:r>
+              <a:rPr sz="1400" b="1" i="0">
+                <a:solidFill>
+                  <a:srgbClr val="FFFFFF"/>
+                </a:solidFill>
+              </a:rPr>
+              <a:t>4</a:t>
+            </a:r>
+            <a:endParaRPr sz="1400"/>
+          </a:p>
+        </p:txBody>
+      </p:sp>
+      <p:sp>
+        <p:nvSpPr>
+          <p:cNvPr id="18" name="TextBox 17"/>
+          <p:cNvSpPr txBox="1"/>
+          <p:nvPr/>
+        </p:nvSpPr>
+        <p:spPr>
+          <a:xfrm>
+            <a:off x="8385048" y="3867912"/>
+            <a:ext cx="2880360" cy="384048"/>
+          </a:xfrm>
+          <a:prstGeom prst="rect">
+            <a:avLst/>
+          </a:prstGeom>
+          <a:noFill/>
+        </p:spPr>
+        <p:txBody>
+          <a:bodyPr wrap="square" lIns="0" tIns="0" rIns="0" bIns="0" anchor="ctr">
+            <a:spAutoFit/>
+          </a:bodyPr>
+          <a:lstStyle/>
+          <a:p>
+            <a:pPr algn="l"/>
+            <a:r>
+              <a:rPr sz="1500" b="0" i="0">
+                <a:solidFill>
+                  <a:srgbClr val="FFFFFF"/>
+                </a:solidFill>
+              </a:rPr>
+              <a:t>The gap set against the spread</a:t>
+            </a:r>
+            <a:endParaRPr sz="1500"/>
+          </a:p>
+        </p:txBody>
+      </p:sp>
+      <p:sp>
+        <p:nvSpPr>
+          <p:cNvPr id="19" name="Oval 18"/>
+          <p:cNvSpPr/>
+          <p:nvPr/>
+        </p:nvSpPr>
+        <p:spPr>
+          <a:xfrm>
+            <a:off x="7882128" y="4471416"/>
+            <a:ext cx="365760" cy="365760"/>
+          </a:xfrm>
+          <a:prstGeom prst="ellipse">
+            <a:avLst/>
+          </a:prstGeom>
+          <a:solidFill>
+            <a:srgbClr val="B88C00"/>
+          </a:solidFill>
+          <a:ln>
+            <a:noFill/>
+          </a:ln>
+        </p:spPr>
+        <p:txBody>
+          <a:bodyPr wrap="square" lIns="0" tIns="18288" rIns="0" bIns="18288" rtlCol="0" anchor="ctr"/>
+          <a:lstStyle/>
+          <a:p>
+            <a:pPr algn="ctr"/>
+            <a:r>
+              <a:rPr sz="1400" b="1" i="0">
+                <a:solidFill>
+                  <a:srgbClr val="FFFFFF"/>
+                </a:solidFill>
+              </a:rPr>
+              <a:t>5</a:t>
+            </a:r>
+            <a:endParaRPr sz="1400"/>
+          </a:p>
+        </p:txBody>
+      </p:sp>
+      <p:sp>
+        <p:nvSpPr>
+          <p:cNvPr id="20" name="TextBox 19"/>
+          <p:cNvSpPr txBox="1"/>
+          <p:nvPr/>
+        </p:nvSpPr>
+        <p:spPr>
+          <a:xfrm>
+            <a:off x="8385048" y="4471416"/>
+            <a:ext cx="2880360" cy="384048"/>
+          </a:xfrm>
+          <a:prstGeom prst="rect">
+            <a:avLst/>
+          </a:prstGeom>
+          <a:noFill/>
+        </p:spPr>
+        <p:txBody>
+          <a:bodyPr wrap="square" lIns="0" tIns="0" rIns="0" bIns="0" anchor="ctr">
+            <a:spAutoFit/>
+          </a:bodyPr>
+          <a:lstStyle/>
+          <a:p>
+            <a:pPr algn="l"/>
+            <a:r>
+              <a:rPr sz="1500" b="0" i="0">
+                <a:solidFill>
+                  <a:srgbClr val="FFFFFF"/>
+                </a:solidFill>
+              </a:rPr>
+              <a:t>Direction and strength of a correlation</a:t>
+            </a:r>
+            <a:endParaRPr sz="1500"/>
+          </a:p>
+        </p:txBody>
+      </p:sp>
+      <p:sp>
+        <p:nvSpPr>
+          <p:cNvPr id="21" name="Oval 20"/>
+          <p:cNvSpPr/>
+          <p:nvPr/>
+        </p:nvSpPr>
+        <p:spPr>
+          <a:xfrm>
+            <a:off x="7882128" y="5074920"/>
+            <a:ext cx="365760" cy="365760"/>
+          </a:xfrm>
+          <a:prstGeom prst="ellipse">
+            <a:avLst/>
+          </a:prstGeom>
+          <a:solidFill>
+            <a:srgbClr val="B88C00"/>
+          </a:solidFill>
+          <a:ln>
+            <a:noFill/>
+          </a:ln>
+        </p:spPr>
+        <p:txBody>
+          <a:bodyPr wrap="square" lIns="0" tIns="18288" rIns="0" bIns="18288" rtlCol="0" anchor="ctr"/>
+          <a:lstStyle/>
+          <a:p>
+            <a:pPr algn="ctr"/>
+            <a:r>
+              <a:rPr sz="1400" b="1" i="0">
+                <a:solidFill>
+                  <a:srgbClr val="FFFFFF"/>
+                </a:solidFill>
+              </a:rPr>
+              <a:t>6</a:t>
+            </a:r>
+            <a:endParaRPr sz="1400"/>
+          </a:p>
+        </p:txBody>
+      </p:sp>
+      <p:sp>
+        <p:nvSpPr>
+          <p:cNvPr id="22" name="TextBox 21"/>
+          <p:cNvSpPr txBox="1"/>
+          <p:nvPr/>
+        </p:nvSpPr>
+        <p:spPr>
+          <a:xfrm>
+            <a:off x="8385048" y="5074920"/>
+            <a:ext cx="2880360" cy="384048"/>
+          </a:xfrm>
+          <a:prstGeom prst="rect">
+            <a:avLst/>
+          </a:prstGeom>
+          <a:noFill/>
+        </p:spPr>
+        <p:txBody>
+          <a:bodyPr wrap="square" lIns="0" tIns="0" rIns="0" bIns="0" anchor="ctr">
+            <a:spAutoFit/>
+          </a:bodyPr>
+          <a:lstStyle/>
+          <a:p>
+            <a:pPr algn="l"/>
+            <a:r>
+              <a:rPr sz="1500" b="0" i="0">
+                <a:solidFill>
+                  <a:srgbClr val="FFFFFF"/>
+                </a:solidFill>
+              </a:rPr>
+              <a:t>Association, not cause</a:t>
+            </a:r>
+            <a:endParaRPr sz="1500"/>
+          </a:p>
+        </p:txBody>
+      </p:sp>
+      <p:sp>
+        <p:nvSpPr>
+          <p:cNvPr id="23" name="TextBox 22"/>
+          <p:cNvSpPr txBox="1"/>
+          <p:nvPr/>
+        </p:nvSpPr>
+        <p:spPr>
+          <a:xfrm>
+            <a:off x="758952" y="5943600"/>
+            <a:ext cx="10607040" cy="292608"/>
+          </a:xfrm>
+          <a:prstGeom prst="rect">
+            <a:avLst/>
+          </a:prstGeom>
+          <a:noFill/>
+        </p:spPr>
+        <p:txBody>
+          <a:bodyPr wrap="square" lIns="0" tIns="0" rIns="0" bIns="0" anchor="ctr">
+            <a:spAutoFit/>
+          </a:bodyPr>
+          <a:lstStyle/>
+          <a:p>
+            <a:pPr algn="l"/>
+            <a:r>
+              <a:rPr sz="1200" b="0" i="0">
+                <a:solidFill>
+                  <a:srgbClr val="55606B"/>
+                </a:solidFill>
+              </a:rPr>
+              <a:t>Data: BSA 2010 (n = 1,064); ESS Round 11, UK (n = 1,680); pickett2009.csv (23 countries).</a:t>
+            </a:r>
+            <a:endParaRPr sz="1200"/>
+          </a:p>
+        </p:txBody>
+      </p:sp>
     </p:spTree>
-    <p:extLst>
-      <p:ext uri="{BB962C8B-B14F-4D97-AF65-F5344CB8AC3E}">
-        <p14:creationId xmlns:p14="http://schemas.microsoft.com/office/powerpoint/2010/main" val="1301853266"/>
-      </p:ext>
-    </p:extLst>
   </p:cSld>
   <p:clrMapOvr>
     <a:masterClrMapping/>
   </p:clrMapOvr>
-  <mc:AlternateContent xmlns:mc="http://schemas.openxmlformats.org/markup-compatibility/2006" xmlns:p159="http://schemas.microsoft.com/office/powerpoint/2015/09/main">
-    <mc:Choice Requires="p159">
-      <p:transition spd="slow">
-        <p159:morph option="byObject"/>
-      </p:transition>
-    </mc:Choice>
-    <mc:Fallback xmlns="">
-      <p:transition spd="slow">
-        <p:fade/>
-      </p:transition>
-    </mc:Fallback>
-  </mc:AlternateContent>
 </p:sld>
 </file>
 
@@ -51451,13 +54866,7 @@
       </p:grpSpPr>
       <p:sp>
         <p:nvSpPr>
-          <p:cNvPr id="7" name="Title 6">
-            <a:extLst>
-              <a:ext uri="{FF2B5EF4-FFF2-40B4-BE49-F238E27FC236}">
-                <a16:creationId xmlns:a16="http://schemas.microsoft.com/office/drawing/2014/main" id="{FF2CBA3A-E59C-1E5C-37CA-CD0F1E185ED5}"/>
-              </a:ext>
-            </a:extLst>
-          </p:cNvPr>
+          <p:cNvPr id="2" name="Title 1"/>
           <p:cNvSpPr>
             <a:spLocks noGrp="1"/>
           </p:cNvSpPr>
@@ -51471,51 +54880,17 @@
           <a:lstStyle/>
           <a:p>
             <a:r>
-              <a:rPr lang="en-GB" dirty="0"/>
-              <a:t>Workshop</a:t>
+              <a:t>Interactive explorer</a:t>
             </a:r>
           </a:p>
         </p:txBody>
       </p:sp>
       <p:sp>
         <p:nvSpPr>
-          <p:cNvPr id="8" name="Text Placeholder 7">
+          <p:cNvPr id="3" name="Date Placeholder 1">
             <a:extLst>
               <a:ext uri="{FF2B5EF4-FFF2-40B4-BE49-F238E27FC236}">
-                <a16:creationId xmlns:a16="http://schemas.microsoft.com/office/drawing/2014/main" id="{636F7FD2-53FA-4A51-9681-6FC5C8960063}"/>
-              </a:ext>
-            </a:extLst>
-          </p:cNvPr>
-          <p:cNvSpPr>
-            <a:spLocks noGrp="1"/>
-          </p:cNvSpPr>
-          <p:nvPr>
-            <p:ph type="body" sz="half" idx="2"/>
-          </p:nvPr>
-        </p:nvSpPr>
-        <p:spPr/>
-        <p:txBody>
-          <a:bodyPr/>
-          <a:lstStyle/>
-          <a:p>
-            <a:r>
-              <a:rPr lang="en-GB" dirty="0"/>
-              <a:t>3 -</a:t>
-            </a:r>
-            <a:r>
-              <a:rPr lang="en-GB" dirty="0" err="1"/>
-              <a:t>5pm</a:t>
-            </a:r>
-            <a:endParaRPr lang="en-GB" dirty="0"/>
-          </a:p>
-        </p:txBody>
-      </p:sp>
-      <p:sp>
-        <p:nvSpPr>
-          <p:cNvPr id="4" name="Date Placeholder 3">
-            <a:extLst>
-              <a:ext uri="{FF2B5EF4-FFF2-40B4-BE49-F238E27FC236}">
-                <a16:creationId xmlns:a16="http://schemas.microsoft.com/office/drawing/2014/main" id="{7452334B-2A42-251C-845C-1CED233665F2}"/>
+                <a16:creationId xmlns:a16="http://schemas.microsoft.com/office/drawing/2014/main" id="{BFF50875-77B6-7B50-6789-FC1B56491CC3}"/>
               </a:ext>
             </a:extLst>
           </p:cNvPr>
@@ -51531,7 +54906,7 @@
           <a:bodyPr/>
           <a:lstStyle/>
           <a:p>
-            <a:fld id="{DCDB07DE-4FD6-4257-A590-7FE39EB05791}" type="datetimeyyyy">
+            <a:fld id="{FA72AB8D-F27B-45C4-A3C3-1397CC759085}" type="datetimeyyyy">
               <a:rPr lang="en-US" smtClean="0"/>
               <a:t>2026</a:t>
             </a:fld>
@@ -51544,7 +54919,7 @@
           <p:cNvPr id="5" name="Footer Placeholder 4">
             <a:extLst>
               <a:ext uri="{FF2B5EF4-FFF2-40B4-BE49-F238E27FC236}">
-                <a16:creationId xmlns:a16="http://schemas.microsoft.com/office/drawing/2014/main" id="{E7848055-4F62-3048-C4D2-554FF0041ADC}"/>
+                <a16:creationId xmlns:a16="http://schemas.microsoft.com/office/drawing/2014/main" id="{DE0B2AC9-C062-ACDA-78EB-2E5B2DF3BA3F}"/>
               </a:ext>
             </a:extLst>
           </p:cNvPr>
@@ -51564,7 +54939,6 @@
               <a:rPr lang="en-GB"/>
               <a:t>Comparisons and Associations</a:t>
             </a:r>
-            <a:endParaRPr lang="en-GB" dirty="0"/>
           </a:p>
         </p:txBody>
       </p:sp>
@@ -51573,7 +54947,7 @@
           <p:cNvPr id="6" name="Slide Number Placeholder 5">
             <a:extLst>
               <a:ext uri="{FF2B5EF4-FFF2-40B4-BE49-F238E27FC236}">
-                <a16:creationId xmlns:a16="http://schemas.microsoft.com/office/drawing/2014/main" id="{70535960-24E1-CFDC-22DF-A828C2B2C10E}"/>
+                <a16:creationId xmlns:a16="http://schemas.microsoft.com/office/drawing/2014/main" id="{63AA58D7-3FC7-1868-4188-EE9D3329FE70}"/>
               </a:ext>
             </a:extLst>
           </p:cNvPr>
@@ -51591,35 +54965,530 @@
           <a:p>
             <a:fld id="{9FAA51BB-2FC0-4DB8-B50E-F52D50E733B6}" type="slidenum">
               <a:rPr lang="en-GB" smtClean="0"/>
-              <a:pPr/>
               <a:t>38</a:t>
             </a:fld>
-            <a:endParaRPr lang="en-GB" dirty="0"/>
+            <a:endParaRPr lang="en-GB"/>
+          </a:p>
+        </p:txBody>
+      </p:sp>
+      <p:pic>
+        <p:nvPicPr>
+          <p:cNvPr id="7" name="Picture 6" descr="qr_w2.png"/>
+          <p:cNvPicPr>
+            <a:picLocks noChangeAspect="1"/>
+          </p:cNvPicPr>
+          <p:nvPr/>
+        </p:nvPicPr>
+        <p:blipFill>
+          <a:blip r:embed="rId3"/>
+          <a:stretch>
+            <a:fillRect/>
+          </a:stretch>
+        </p:blipFill>
+        <p:spPr>
+          <a:xfrm>
+            <a:off x="1051560" y="1463040"/>
+            <a:ext cx="2834640" cy="2834640"/>
+          </a:xfrm>
+          <a:prstGeom prst="rect">
+            <a:avLst/>
+          </a:prstGeom>
+        </p:spPr>
+      </p:pic>
+      <p:sp>
+        <p:nvSpPr>
+          <p:cNvPr id="8" name="TextBox 7"/>
+          <p:cNvSpPr txBox="1"/>
+          <p:nvPr/>
+        </p:nvSpPr>
+        <p:spPr>
+          <a:xfrm>
+            <a:off x="758952" y="4434840"/>
+            <a:ext cx="3429000" cy="1097280"/>
+          </a:xfrm>
+          <a:prstGeom prst="rect">
+            <a:avLst/>
+          </a:prstGeom>
+          <a:noFill/>
+        </p:spPr>
+        <p:txBody>
+          <a:bodyPr wrap="square" lIns="0" tIns="0" rIns="0" bIns="0" anchor="t">
+            <a:spAutoFit/>
+          </a:bodyPr>
+          <a:lstStyle/>
+          <a:p>
+            <a:pPr algn="ctr">
+              <a:spcAft>
+                <a:spcPts val="400"/>
+              </a:spcAft>
+            </a:pPr>
+            <a:r>
+              <a:rPr sz="1400" b="1" i="0">
+                <a:solidFill>
+                  <a:srgbClr val="1F394D"/>
+                </a:solidFill>
+              </a:rPr>
+              <a:t>Course site › [W2] Interactive Explorer</a:t>
+            </a:r>
+            <a:endParaRPr sz="1400"/>
+          </a:p>
+          <a:p>
+            <a:pPr algn="ctr"/>
+            <a:r>
+              <a:rPr sz="1200" b="0" i="0">
+                <a:solidFill>
+                  <a:srgbClr val="55606B"/>
+                </a:solidFill>
+              </a:rPr>
+              <a:t>cgmoreh.github.io/SOC2069-QUANT-26</a:t>
+            </a:r>
+            <a:endParaRPr sz="1200"/>
+          </a:p>
+        </p:txBody>
+      </p:sp>
+      <p:sp>
+        <p:nvSpPr>
+          <p:cNvPr id="9" name="Rounded Rectangle 8"/>
+          <p:cNvSpPr/>
+          <p:nvPr/>
+        </p:nvSpPr>
+        <p:spPr>
+          <a:xfrm>
+            <a:off x="4526280" y="1417320"/>
+            <a:ext cx="6839712" cy="1097280"/>
+          </a:xfrm>
+          <a:prstGeom prst="roundRect">
+            <a:avLst>
+              <a:gd name="adj" fmla="val 8000"/>
+            </a:avLst>
+          </a:prstGeom>
+          <a:solidFill>
+            <a:srgbClr val="EEF3F7"/>
+          </a:solidFill>
+          <a:ln>
+            <a:noFill/>
+          </a:ln>
+        </p:spPr>
+        <p:txBody>
+          <a:bodyPr rtlCol="0" anchor="ctr"/>
+          <a:lstStyle/>
+          <a:p>
+            <a:pPr algn="ctr"/>
+            <a:endParaRPr/>
+          </a:p>
+        </p:txBody>
+      </p:sp>
+      <p:sp>
+        <p:nvSpPr>
+          <p:cNvPr id="10" name="Oval 9"/>
+          <p:cNvSpPr/>
+          <p:nvPr/>
+        </p:nvSpPr>
+        <p:spPr>
+          <a:xfrm>
+            <a:off x="4732020" y="1714500"/>
+            <a:ext cx="502920" cy="502920"/>
+          </a:xfrm>
+          <a:prstGeom prst="ellipse">
+            <a:avLst/>
+          </a:prstGeom>
+          <a:solidFill>
+            <a:srgbClr val="1F394D"/>
+          </a:solidFill>
+          <a:ln>
+            <a:noFill/>
+          </a:ln>
+        </p:spPr>
+        <p:txBody>
+          <a:bodyPr wrap="square" lIns="0" tIns="18288" rIns="0" bIns="18288" rtlCol="0" anchor="ctr"/>
+          <a:lstStyle/>
+          <a:p>
+            <a:pPr algn="ctr"/>
+            <a:r>
+              <a:rPr sz="1800" b="1" i="0">
+                <a:solidFill>
+                  <a:srgbClr val="FFFFFF"/>
+                </a:solidFill>
+              </a:rPr>
+              <a:t>1</a:t>
+            </a:r>
+            <a:endParaRPr sz="1800"/>
+          </a:p>
+        </p:txBody>
+      </p:sp>
+      <p:sp>
+        <p:nvSpPr>
+          <p:cNvPr id="11" name="TextBox 10"/>
+          <p:cNvSpPr txBox="1"/>
+          <p:nvPr/>
+        </p:nvSpPr>
+        <p:spPr>
+          <a:xfrm>
+            <a:off x="5440680" y="1527048"/>
+            <a:ext cx="5760720" cy="877824"/>
+          </a:xfrm>
+          <a:prstGeom prst="rect">
+            <a:avLst/>
+          </a:prstGeom>
+          <a:noFill/>
+        </p:spPr>
+        <p:txBody>
+          <a:bodyPr wrap="square" lIns="0" tIns="0" rIns="0" bIns="0" anchor="ctr">
+            <a:spAutoFit/>
+          </a:bodyPr>
+          <a:lstStyle/>
+          <a:p>
+            <a:pPr algn="l">
+              <a:spcAft>
+                <a:spcPts val="200"/>
+              </a:spcAft>
+            </a:pPr>
+            <a:r>
+              <a:rPr sz="1800" b="1" i="0">
+                <a:solidFill>
+                  <a:srgbClr val="1F394D"/>
+                </a:solidFill>
+              </a:rPr>
+              <a:t>Guess the correlation</a:t>
+            </a:r>
+            <a:endParaRPr sz="1800"/>
+          </a:p>
+          <a:p>
+            <a:pPr algn="l"/>
+            <a:r>
+              <a:rPr sz="1500" b="0" i="0">
+                <a:solidFill>
+                  <a:srgbClr val="1F2A33"/>
+                </a:solidFill>
+              </a:rPr>
+              <a:t>Generate scatter plots with a correlation you choose, then test yourself on new ones.</a:t>
+            </a:r>
+            <a:endParaRPr sz="1500"/>
+          </a:p>
+        </p:txBody>
+      </p:sp>
+      <p:sp>
+        <p:nvSpPr>
+          <p:cNvPr id="12" name="Rounded Rectangle 11"/>
+          <p:cNvSpPr/>
+          <p:nvPr/>
+        </p:nvSpPr>
+        <p:spPr>
+          <a:xfrm>
+            <a:off x="4526280" y="2651760"/>
+            <a:ext cx="6839712" cy="1097280"/>
+          </a:xfrm>
+          <a:prstGeom prst="roundRect">
+            <a:avLst>
+              <a:gd name="adj" fmla="val 8000"/>
+            </a:avLst>
+          </a:prstGeom>
+          <a:solidFill>
+            <a:srgbClr val="EEF3F7"/>
+          </a:solidFill>
+          <a:ln>
+            <a:noFill/>
+          </a:ln>
+        </p:spPr>
+        <p:txBody>
+          <a:bodyPr rtlCol="0" anchor="ctr"/>
+          <a:lstStyle/>
+          <a:p>
+            <a:pPr algn="ctr"/>
+            <a:endParaRPr/>
+          </a:p>
+        </p:txBody>
+      </p:sp>
+      <p:sp>
+        <p:nvSpPr>
+          <p:cNvPr id="13" name="Oval 12"/>
+          <p:cNvSpPr/>
+          <p:nvPr/>
+        </p:nvSpPr>
+        <p:spPr>
+          <a:xfrm>
+            <a:off x="4732020" y="2948940"/>
+            <a:ext cx="502920" cy="502920"/>
+          </a:xfrm>
+          <a:prstGeom prst="ellipse">
+            <a:avLst/>
+          </a:prstGeom>
+          <a:solidFill>
+            <a:srgbClr val="1F394D"/>
+          </a:solidFill>
+          <a:ln>
+            <a:noFill/>
+          </a:ln>
+        </p:spPr>
+        <p:txBody>
+          <a:bodyPr wrap="square" lIns="0" tIns="18288" rIns="0" bIns="18288" rtlCol="0" anchor="ctr"/>
+          <a:lstStyle/>
+          <a:p>
+            <a:pPr algn="ctr"/>
+            <a:r>
+              <a:rPr sz="1800" b="1" i="0">
+                <a:solidFill>
+                  <a:srgbClr val="FFFFFF"/>
+                </a:solidFill>
+              </a:rPr>
+              <a:t>2</a:t>
+            </a:r>
+            <a:endParaRPr sz="1800"/>
+          </a:p>
+        </p:txBody>
+      </p:sp>
+      <p:sp>
+        <p:nvSpPr>
+          <p:cNvPr id="14" name="TextBox 13"/>
+          <p:cNvSpPr txBox="1"/>
+          <p:nvPr/>
+        </p:nvSpPr>
+        <p:spPr>
+          <a:xfrm>
+            <a:off x="5440680" y="2761488"/>
+            <a:ext cx="5760720" cy="877824"/>
+          </a:xfrm>
+          <a:prstGeom prst="rect">
+            <a:avLst/>
+          </a:prstGeom>
+          <a:noFill/>
+        </p:spPr>
+        <p:txBody>
+          <a:bodyPr wrap="square" lIns="0" tIns="0" rIns="0" bIns="0" anchor="ctr">
+            <a:spAutoFit/>
+          </a:bodyPr>
+          <a:lstStyle/>
+          <a:p>
+            <a:pPr algn="l">
+              <a:spcAft>
+                <a:spcPts val="200"/>
+              </a:spcAft>
+            </a:pPr>
+            <a:r>
+              <a:rPr sz="1800" b="1" i="0">
+                <a:solidFill>
+                  <a:srgbClr val="1F394D"/>
+                </a:solidFill>
+              </a:rPr>
+              <a:t>Same gap, different overlap</a:t>
+            </a:r>
+            <a:endParaRPr sz="1800"/>
+          </a:p>
+          <a:p>
+            <a:pPr algn="l"/>
+            <a:r>
+              <a:rPr sz="1500" b="0" i="0">
+                <a:solidFill>
+                  <a:srgbClr val="1F2A33"/>
+                </a:solidFill>
+              </a:rPr>
+              <a:t>Change the gap between two group means and the spread within the groups.</a:t>
+            </a:r>
+            <a:endParaRPr sz="1500"/>
+          </a:p>
+        </p:txBody>
+      </p:sp>
+      <p:sp>
+        <p:nvSpPr>
+          <p:cNvPr id="15" name="Rounded Rectangle 14"/>
+          <p:cNvSpPr/>
+          <p:nvPr/>
+        </p:nvSpPr>
+        <p:spPr>
+          <a:xfrm>
+            <a:off x="4526280" y="3886200"/>
+            <a:ext cx="6839712" cy="1097280"/>
+          </a:xfrm>
+          <a:prstGeom prst="roundRect">
+            <a:avLst>
+              <a:gd name="adj" fmla="val 8000"/>
+            </a:avLst>
+          </a:prstGeom>
+          <a:solidFill>
+            <a:srgbClr val="EEF3F7"/>
+          </a:solidFill>
+          <a:ln>
+            <a:noFill/>
+          </a:ln>
+        </p:spPr>
+        <p:txBody>
+          <a:bodyPr rtlCol="0" anchor="ctr"/>
+          <a:lstStyle/>
+          <a:p>
+            <a:pPr algn="ctr"/>
+            <a:endParaRPr/>
+          </a:p>
+        </p:txBody>
+      </p:sp>
+      <p:sp>
+        <p:nvSpPr>
+          <p:cNvPr id="16" name="Oval 15"/>
+          <p:cNvSpPr/>
+          <p:nvPr/>
+        </p:nvSpPr>
+        <p:spPr>
+          <a:xfrm>
+            <a:off x="4732020" y="4183379"/>
+            <a:ext cx="502920" cy="502920"/>
+          </a:xfrm>
+          <a:prstGeom prst="ellipse">
+            <a:avLst/>
+          </a:prstGeom>
+          <a:solidFill>
+            <a:srgbClr val="1F394D"/>
+          </a:solidFill>
+          <a:ln>
+            <a:noFill/>
+          </a:ln>
+        </p:spPr>
+        <p:txBody>
+          <a:bodyPr wrap="square" lIns="0" tIns="18288" rIns="0" bIns="18288" rtlCol="0" anchor="ctr"/>
+          <a:lstStyle/>
+          <a:p>
+            <a:pPr algn="ctr"/>
+            <a:r>
+              <a:rPr sz="1800" b="1" i="0">
+                <a:solidFill>
+                  <a:srgbClr val="FFFFFF"/>
+                </a:solidFill>
+              </a:rPr>
+              <a:t>3</a:t>
+            </a:r>
+            <a:endParaRPr sz="1800"/>
+          </a:p>
+        </p:txBody>
+      </p:sp>
+      <p:sp>
+        <p:nvSpPr>
+          <p:cNvPr id="17" name="TextBox 16"/>
+          <p:cNvSpPr txBox="1"/>
+          <p:nvPr/>
+        </p:nvSpPr>
+        <p:spPr>
+          <a:xfrm>
+            <a:off x="5440680" y="3995928"/>
+            <a:ext cx="5760720" cy="877824"/>
+          </a:xfrm>
+          <a:prstGeom prst="rect">
+            <a:avLst/>
+          </a:prstGeom>
+          <a:noFill/>
+        </p:spPr>
+        <p:txBody>
+          <a:bodyPr wrap="square" lIns="0" tIns="0" rIns="0" bIns="0" anchor="ctr">
+            <a:spAutoFit/>
+          </a:bodyPr>
+          <a:lstStyle/>
+          <a:p>
+            <a:pPr algn="l">
+              <a:spcAft>
+                <a:spcPts val="200"/>
+              </a:spcAft>
+            </a:pPr>
+            <a:r>
+              <a:rPr sz="1800" b="1" i="0">
+                <a:solidFill>
+                  <a:srgbClr val="1F394D"/>
+                </a:solidFill>
+              </a:rPr>
+              <a:t>Column percentages</a:t>
+            </a:r>
+            <a:endParaRPr sz="1800"/>
+          </a:p>
+          <a:p>
+            <a:pPr algn="l"/>
+            <a:r>
+              <a:rPr sz="1500" b="0" i="0">
+                <a:solidFill>
+                  <a:srgbClr val="1F2A33"/>
+                </a:solidFill>
+              </a:rPr>
+              <a:t>Type in the counts of a two-by-two table and compare the groups.</a:t>
+            </a:r>
+            <a:endParaRPr sz="1500"/>
+          </a:p>
+        </p:txBody>
+      </p:sp>
+      <p:sp>
+        <p:nvSpPr>
+          <p:cNvPr id="18" name="Rounded Rectangle 17"/>
+          <p:cNvSpPr/>
+          <p:nvPr/>
+        </p:nvSpPr>
+        <p:spPr>
+          <a:xfrm>
+            <a:off x="4526280" y="5120640"/>
+            <a:ext cx="6839712" cy="731520"/>
+          </a:xfrm>
+          <a:prstGeom prst="roundRect">
+            <a:avLst>
+              <a:gd name="adj" fmla="val 8000"/>
+            </a:avLst>
+          </a:prstGeom>
+          <a:solidFill>
+            <a:srgbClr val="1F394D"/>
+          </a:solidFill>
+          <a:ln>
+            <a:noFill/>
+          </a:ln>
+        </p:spPr>
+        <p:txBody>
+          <a:bodyPr rtlCol="0" anchor="ctr"/>
+          <a:lstStyle/>
+          <a:p>
+            <a:pPr algn="ctr"/>
+            <a:endParaRPr/>
+          </a:p>
+        </p:txBody>
+      </p:sp>
+      <p:sp>
+        <p:nvSpPr>
+          <p:cNvPr id="19" name="TextBox 18"/>
+          <p:cNvSpPr txBox="1"/>
+          <p:nvPr/>
+        </p:nvSpPr>
+        <p:spPr>
+          <a:xfrm>
+            <a:off x="4754880" y="5120640"/>
+            <a:ext cx="6400800" cy="731520"/>
+          </a:xfrm>
+          <a:prstGeom prst="rect">
+            <a:avLst/>
+          </a:prstGeom>
+          <a:noFill/>
+        </p:spPr>
+        <p:txBody>
+          <a:bodyPr wrap="square" lIns="0" tIns="0" rIns="0" bIns="0" anchor="ctr">
+            <a:spAutoFit/>
+          </a:bodyPr>
+          <a:lstStyle/>
+          <a:p>
+            <a:pPr algn="l"/>
+            <a:r>
+              <a:rPr sz="1500" b="1" i="0">
+                <a:solidFill>
+                  <a:srgbClr val="B88C00"/>
+                </a:solidFill>
+              </a:rPr>
+              <a:t>Also on the page: </a:t>
+            </a:r>
+            <a:r>
+              <a:rPr sz="1500" b="0" i="0">
+                <a:solidFill>
+                  <a:srgbClr val="FFFFFF"/>
+                </a:solidFill>
+              </a:rPr>
+              <a:t>the gender gap in trust from the BSA 2010 as the starting example</a:t>
+            </a:r>
+            <a:endParaRPr sz="1500"/>
           </a:p>
         </p:txBody>
       </p:sp>
     </p:spTree>
-    <p:extLst>
-      <p:ext uri="{BB962C8B-B14F-4D97-AF65-F5344CB8AC3E}">
-        <p14:creationId xmlns:p14="http://schemas.microsoft.com/office/powerpoint/2010/main" val="253129452"/>
-      </p:ext>
-    </p:extLst>
   </p:cSld>
   <p:clrMapOvr>
     <a:masterClrMapping/>
   </p:clrMapOvr>
-  <mc:AlternateContent xmlns:mc="http://schemas.openxmlformats.org/markup-compatibility/2006" xmlns:p159="http://schemas.microsoft.com/office/powerpoint/2015/09/main">
-    <mc:Choice Requires="p159">
-      <p:transition spd="slow">
-        <p159:morph option="byObject"/>
-      </p:transition>
-    </mc:Choice>
-    <mc:Fallback xmlns="">
-      <p:transition spd="slow">
-        <p:fade/>
-      </p:transition>
-    </mc:Fallback>
-  </mc:AlternateContent>
 </p:sld>
 </file>
 
@@ -51642,10 +55511,31 @@
       </p:grpSpPr>
       <p:sp>
         <p:nvSpPr>
-          <p:cNvPr id="2" name="Date Placeholder 1">
+          <p:cNvPr id="2" name="Title 1"/>
+          <p:cNvSpPr>
+            <a:spLocks noGrp="1"/>
+          </p:cNvSpPr>
+          <p:nvPr>
+            <p:ph type="title"/>
+          </p:nvPr>
+        </p:nvSpPr>
+        <p:spPr/>
+        <p:txBody>
+          <a:bodyPr/>
+          <a:lstStyle/>
+          <a:p>
+            <a:r>
+              <a:t>Key takeaways</a:t>
+            </a:r>
+          </a:p>
+        </p:txBody>
+      </p:sp>
+      <p:sp>
+        <p:nvSpPr>
+          <p:cNvPr id="3" name="Date Placeholder 1">
             <a:extLst>
               <a:ext uri="{FF2B5EF4-FFF2-40B4-BE49-F238E27FC236}">
-                <a16:creationId xmlns:a16="http://schemas.microsoft.com/office/drawing/2014/main" id="{4AAE4DB1-6B08-6AEB-B597-8064268FD9C5}"/>
+                <a16:creationId xmlns:a16="http://schemas.microsoft.com/office/drawing/2014/main" id="{BFF50875-77B6-7B50-6789-FC1B56491CC3}"/>
               </a:ext>
             </a:extLst>
           </p:cNvPr>
@@ -51661,7 +55551,7 @@
           <a:bodyPr/>
           <a:lstStyle/>
           <a:p>
-            <a:fld id="{F093E5A9-8248-448D-B582-A60BAB2205BC}" type="datetimeyyyy">
+            <a:fld id="{FA72AB8D-F27B-45C4-A3C3-1397CC759085}" type="datetimeyyyy">
               <a:rPr lang="en-US" smtClean="0"/>
               <a:t>2026</a:t>
             </a:fld>
@@ -51671,10 +55561,10 @@
       </p:sp>
       <p:sp>
         <p:nvSpPr>
-          <p:cNvPr id="3" name="Footer Placeholder 2">
+          <p:cNvPr id="5" name="Footer Placeholder 4">
             <a:extLst>
               <a:ext uri="{FF2B5EF4-FFF2-40B4-BE49-F238E27FC236}">
-                <a16:creationId xmlns:a16="http://schemas.microsoft.com/office/drawing/2014/main" id="{D6F2723A-2C1C-2AB6-3420-9BD762F766DF}"/>
+                <a16:creationId xmlns:a16="http://schemas.microsoft.com/office/drawing/2014/main" id="{DE0B2AC9-C062-ACDA-78EB-2E5B2DF3BA3F}"/>
               </a:ext>
             </a:extLst>
           </p:cNvPr>
@@ -51699,10 +55589,10 @@
       </p:sp>
       <p:sp>
         <p:nvSpPr>
-          <p:cNvPr id="4" name="Slide Number Placeholder 3">
+          <p:cNvPr id="6" name="Slide Number Placeholder 5">
             <a:extLst>
               <a:ext uri="{FF2B5EF4-FFF2-40B4-BE49-F238E27FC236}">
-                <a16:creationId xmlns:a16="http://schemas.microsoft.com/office/drawing/2014/main" id="{E9AFD3A0-9074-636F-30B6-C6C650C3F58D}"/>
+                <a16:creationId xmlns:a16="http://schemas.microsoft.com/office/drawing/2014/main" id="{63AA58D7-3FC7-1868-4188-EE9D3329FE70}"/>
               </a:ext>
             </a:extLst>
           </p:cNvPr>
@@ -51713,12 +55603,7 @@
             <p:ph type="sldNum" sz="quarter" idx="12"/>
           </p:nvPr>
         </p:nvSpPr>
-        <p:spPr>
-          <a:xfrm>
-            <a:off x="9900458" y="6459785"/>
-            <a:ext cx="1312025" cy="365125"/>
-          </a:xfrm>
-        </p:spPr>
+        <p:spPr/>
         <p:txBody>
           <a:bodyPr/>
           <a:lstStyle/>
@@ -51731,28 +55616,555 @@
           </a:p>
         </p:txBody>
       </p:sp>
+      <p:sp>
+        <p:nvSpPr>
+          <p:cNvPr id="7" name="Card 1"/>
+          <p:cNvSpPr/>
+          <p:nvPr/>
+        </p:nvSpPr>
+        <p:spPr>
+          <a:xfrm>
+            <a:off x="758952" y="1417320"/>
+            <a:ext cx="5212080" cy="2103120"/>
+          </a:xfrm>
+          <a:prstGeom prst="roundRect">
+            <a:avLst>
+              <a:gd name="adj" fmla="val 8000"/>
+            </a:avLst>
+          </a:prstGeom>
+          <a:solidFill>
+            <a:srgbClr val="EEF3F7"/>
+          </a:solidFill>
+          <a:ln>
+            <a:noFill/>
+          </a:ln>
+        </p:spPr>
+        <p:txBody>
+          <a:bodyPr rtlCol="0" anchor="ctr"/>
+          <a:lstStyle/>
+          <a:p>
+            <a:endParaRPr/>
+          </a:p>
+        </p:txBody>
+      </p:sp>
+      <p:sp>
+        <p:nvSpPr>
+          <p:cNvPr id="8" name="Oval 7"/>
+          <p:cNvSpPr/>
+          <p:nvPr/>
+        </p:nvSpPr>
+        <p:spPr>
+          <a:xfrm>
+            <a:off x="987552" y="1645920"/>
+            <a:ext cx="566928" cy="566928"/>
+          </a:xfrm>
+          <a:prstGeom prst="ellipse">
+            <a:avLst/>
+          </a:prstGeom>
+          <a:solidFill>
+            <a:srgbClr val="1F394D"/>
+          </a:solidFill>
+          <a:ln>
+            <a:noFill/>
+          </a:ln>
+        </p:spPr>
+        <p:txBody>
+          <a:bodyPr lIns="0" tIns="0" rIns="0" bIns="0" rtlCol="0" anchor="ctr"/>
+          <a:lstStyle/>
+          <a:p>
+            <a:pPr algn="ctr"/>
+            <a:r>
+              <a:rPr sz="2000" b="1">
+                <a:solidFill>
+                  <a:srgbClr val="FFFFFF"/>
+                </a:solidFill>
+              </a:rPr>
+              <a:t>1</a:t>
+            </a:r>
+          </a:p>
+        </p:txBody>
+      </p:sp>
+      <p:sp>
+        <p:nvSpPr>
+          <p:cNvPr id="9" name="TextBox 8"/>
+          <p:cNvSpPr txBox="1"/>
+          <p:nvPr/>
+        </p:nvSpPr>
+        <p:spPr>
+          <a:xfrm>
+            <a:off x="1719072" y="1618488"/>
+            <a:ext cx="4023360" cy="640080"/>
+          </a:xfrm>
+          <a:prstGeom prst="rect">
+            <a:avLst/>
+          </a:prstGeom>
+          <a:noFill/>
+        </p:spPr>
+        <p:txBody>
+          <a:bodyPr wrap="square" lIns="0" tIns="0" rIns="0" bIns="0" anchor="ctr">
+            <a:spAutoFit/>
+          </a:bodyPr>
+          <a:lstStyle/>
+          <a:p>
+            <a:pPr algn="l"/>
+            <a:r>
+              <a:rPr sz="2000" b="1" i="0">
+                <a:solidFill>
+                  <a:srgbClr val="1F394D"/>
+                </a:solidFill>
+              </a:rPr>
+              <a:t>The variables’ levels pick the tool</a:t>
+            </a:r>
+          </a:p>
+        </p:txBody>
+      </p:sp>
+      <p:sp>
+        <p:nvSpPr>
+          <p:cNvPr id="10" name="TextBox 9"/>
+          <p:cNvSpPr txBox="1"/>
+          <p:nvPr/>
+        </p:nvSpPr>
+        <p:spPr>
+          <a:xfrm>
+            <a:off x="1719072" y="2313432"/>
+            <a:ext cx="4023360" cy="1097279"/>
+          </a:xfrm>
+          <a:prstGeom prst="rect">
+            <a:avLst/>
+          </a:prstGeom>
+          <a:noFill/>
+        </p:spPr>
+        <p:txBody>
+          <a:bodyPr wrap="square" lIns="0" tIns="0" rIns="0" bIns="0" anchor="t">
+            <a:spAutoFit/>
+          </a:bodyPr>
+          <a:lstStyle/>
+          <a:p>
+            <a:pPr algn="l"/>
+            <a:r>
+              <a:rPr sz="1700" b="0" i="0">
+                <a:solidFill>
+                  <a:srgbClr val="1F2A33"/>
+                </a:solidFill>
+              </a:rPr>
+              <a:t>Contingency table, group comparison or scatter plot.</a:t>
+            </a:r>
+          </a:p>
+        </p:txBody>
+      </p:sp>
+      <p:sp>
+        <p:nvSpPr>
+          <p:cNvPr id="11" name="Card 2"/>
+          <p:cNvSpPr/>
+          <p:nvPr/>
+        </p:nvSpPr>
+        <p:spPr>
+          <a:xfrm>
+            <a:off x="6153912" y="1417320"/>
+            <a:ext cx="5212080" cy="2103120"/>
+          </a:xfrm>
+          <a:prstGeom prst="roundRect">
+            <a:avLst>
+              <a:gd name="adj" fmla="val 8000"/>
+            </a:avLst>
+          </a:prstGeom>
+          <a:solidFill>
+            <a:srgbClr val="EEF3F7"/>
+          </a:solidFill>
+          <a:ln>
+            <a:noFill/>
+          </a:ln>
+        </p:spPr>
+        <p:txBody>
+          <a:bodyPr rtlCol="0" anchor="ctr"/>
+          <a:lstStyle/>
+          <a:p>
+            <a:endParaRPr/>
+          </a:p>
+        </p:txBody>
+      </p:sp>
+      <p:sp>
+        <p:nvSpPr>
+          <p:cNvPr id="12" name="Oval 11"/>
+          <p:cNvSpPr/>
+          <p:nvPr/>
+        </p:nvSpPr>
+        <p:spPr>
+          <a:xfrm>
+            <a:off x="6382512" y="1645920"/>
+            <a:ext cx="566928" cy="566928"/>
+          </a:xfrm>
+          <a:prstGeom prst="ellipse">
+            <a:avLst/>
+          </a:prstGeom>
+          <a:solidFill>
+            <a:srgbClr val="1F394D"/>
+          </a:solidFill>
+          <a:ln>
+            <a:noFill/>
+          </a:ln>
+        </p:spPr>
+        <p:txBody>
+          <a:bodyPr lIns="0" tIns="0" rIns="0" bIns="0" rtlCol="0" anchor="ctr"/>
+          <a:lstStyle/>
+          <a:p>
+            <a:pPr algn="ctr"/>
+            <a:r>
+              <a:rPr sz="2000" b="1">
+                <a:solidFill>
+                  <a:srgbClr val="FFFFFF"/>
+                </a:solidFill>
+              </a:rPr>
+              <a:t>2</a:t>
+            </a:r>
+          </a:p>
+        </p:txBody>
+      </p:sp>
+      <p:sp>
+        <p:nvSpPr>
+          <p:cNvPr id="13" name="TextBox 12"/>
+          <p:cNvSpPr txBox="1"/>
+          <p:nvPr/>
+        </p:nvSpPr>
+        <p:spPr>
+          <a:xfrm>
+            <a:off x="7114032" y="1618488"/>
+            <a:ext cx="4023360" cy="640080"/>
+          </a:xfrm>
+          <a:prstGeom prst="rect">
+            <a:avLst/>
+          </a:prstGeom>
+          <a:noFill/>
+        </p:spPr>
+        <p:txBody>
+          <a:bodyPr wrap="square" lIns="0" tIns="0" rIns="0" bIns="0" anchor="ctr">
+            <a:spAutoFit/>
+          </a:bodyPr>
+          <a:lstStyle/>
+          <a:p>
+            <a:pPr algn="l"/>
+            <a:r>
+              <a:rPr sz="2000" b="1" i="0">
+                <a:solidFill>
+                  <a:srgbClr val="1F394D"/>
+                </a:solidFill>
+              </a:rPr>
+              <a:t>Compare within groups</a:t>
+            </a:r>
+          </a:p>
+        </p:txBody>
+      </p:sp>
+      <p:sp>
+        <p:nvSpPr>
+          <p:cNvPr id="14" name="TextBox 13"/>
+          <p:cNvSpPr txBox="1"/>
+          <p:nvPr/>
+        </p:nvSpPr>
+        <p:spPr>
+          <a:xfrm>
+            <a:off x="7114032" y="2313432"/>
+            <a:ext cx="4023360" cy="1097279"/>
+          </a:xfrm>
+          <a:prstGeom prst="rect">
+            <a:avLst/>
+          </a:prstGeom>
+          <a:noFill/>
+        </p:spPr>
+        <p:txBody>
+          <a:bodyPr wrap="square" lIns="0" tIns="0" rIns="0" bIns="0" anchor="t">
+            <a:spAutoFit/>
+          </a:bodyPr>
+          <a:lstStyle/>
+          <a:p>
+            <a:pPr algn="l"/>
+            <a:r>
+              <a:rPr sz="1700" b="0" i="0">
+                <a:solidFill>
+                  <a:srgbClr val="1F2A33"/>
+                </a:solidFill>
+              </a:rPr>
+              <a:t>Column percentages (explanatory variable in the columns) answer “do groups differ?”</a:t>
+            </a:r>
+          </a:p>
+        </p:txBody>
+      </p:sp>
+      <p:sp>
+        <p:nvSpPr>
+          <p:cNvPr id="15" name="Card 3"/>
+          <p:cNvSpPr/>
+          <p:nvPr/>
+        </p:nvSpPr>
+        <p:spPr>
+          <a:xfrm>
+            <a:off x="758952" y="3749039"/>
+            <a:ext cx="5212080" cy="2103120"/>
+          </a:xfrm>
+          <a:prstGeom prst="roundRect">
+            <a:avLst>
+              <a:gd name="adj" fmla="val 8000"/>
+            </a:avLst>
+          </a:prstGeom>
+          <a:solidFill>
+            <a:srgbClr val="EEF3F7"/>
+          </a:solidFill>
+          <a:ln>
+            <a:noFill/>
+          </a:ln>
+        </p:spPr>
+        <p:txBody>
+          <a:bodyPr rtlCol="0" anchor="ctr"/>
+          <a:lstStyle/>
+          <a:p>
+            <a:endParaRPr/>
+          </a:p>
+        </p:txBody>
+      </p:sp>
+      <p:sp>
+        <p:nvSpPr>
+          <p:cNvPr id="16" name="Oval 15"/>
+          <p:cNvSpPr/>
+          <p:nvPr/>
+        </p:nvSpPr>
+        <p:spPr>
+          <a:xfrm>
+            <a:off x="987552" y="3977639"/>
+            <a:ext cx="566928" cy="566928"/>
+          </a:xfrm>
+          <a:prstGeom prst="ellipse">
+            <a:avLst/>
+          </a:prstGeom>
+          <a:solidFill>
+            <a:srgbClr val="1F394D"/>
+          </a:solidFill>
+          <a:ln>
+            <a:noFill/>
+          </a:ln>
+        </p:spPr>
+        <p:txBody>
+          <a:bodyPr lIns="0" tIns="0" rIns="0" bIns="0" rtlCol="0" anchor="ctr"/>
+          <a:lstStyle/>
+          <a:p>
+            <a:pPr algn="ctr"/>
+            <a:r>
+              <a:rPr sz="2000" b="1">
+                <a:solidFill>
+                  <a:srgbClr val="FFFFFF"/>
+                </a:solidFill>
+              </a:rPr>
+              <a:t>3</a:t>
+            </a:r>
+          </a:p>
+        </p:txBody>
+      </p:sp>
+      <p:sp>
+        <p:nvSpPr>
+          <p:cNvPr id="17" name="TextBox 16"/>
+          <p:cNvSpPr txBox="1"/>
+          <p:nvPr/>
+        </p:nvSpPr>
+        <p:spPr>
+          <a:xfrm>
+            <a:off x="1719072" y="3950207"/>
+            <a:ext cx="4023360" cy="640080"/>
+          </a:xfrm>
+          <a:prstGeom prst="rect">
+            <a:avLst/>
+          </a:prstGeom>
+          <a:noFill/>
+        </p:spPr>
+        <p:txBody>
+          <a:bodyPr wrap="square" lIns="0" tIns="0" rIns="0" bIns="0" anchor="ctr">
+            <a:spAutoFit/>
+          </a:bodyPr>
+          <a:lstStyle/>
+          <a:p>
+            <a:pPr algn="l"/>
+            <a:r>
+              <a:rPr sz="2000" b="1" i="0">
+                <a:solidFill>
+                  <a:srgbClr val="1F394D"/>
+                </a:solidFill>
+              </a:rPr>
+              <a:t>Size against spread</a:t>
+            </a:r>
+          </a:p>
+        </p:txBody>
+      </p:sp>
+      <p:sp>
+        <p:nvSpPr>
+          <p:cNvPr id="18" name="TextBox 17"/>
+          <p:cNvSpPr txBox="1"/>
+          <p:nvPr/>
+        </p:nvSpPr>
+        <p:spPr>
+          <a:xfrm>
+            <a:off x="1719072" y="4645152"/>
+            <a:ext cx="4023360" cy="1097279"/>
+          </a:xfrm>
+          <a:prstGeom prst="rect">
+            <a:avLst/>
+          </a:prstGeom>
+          <a:noFill/>
+        </p:spPr>
+        <p:txBody>
+          <a:bodyPr wrap="square" lIns="0" tIns="0" rIns="0" bIns="0" anchor="t">
+            <a:spAutoFit/>
+          </a:bodyPr>
+          <a:lstStyle/>
+          <a:p>
+            <a:pPr algn="l"/>
+            <a:r>
+              <a:rPr sz="1700" b="0" i="0">
+                <a:solidFill>
+                  <a:srgbClr val="1F2A33"/>
+                </a:solidFill>
+              </a:rPr>
+              <a:t>A gap in means matters only relative to the spread within groups.</a:t>
+            </a:r>
+          </a:p>
+        </p:txBody>
+      </p:sp>
+      <p:sp>
+        <p:nvSpPr>
+          <p:cNvPr id="19" name="Card 4"/>
+          <p:cNvSpPr/>
+          <p:nvPr/>
+        </p:nvSpPr>
+        <p:spPr>
+          <a:xfrm>
+            <a:off x="6153912" y="3749039"/>
+            <a:ext cx="5212080" cy="2103120"/>
+          </a:xfrm>
+          <a:prstGeom prst="roundRect">
+            <a:avLst>
+              <a:gd name="adj" fmla="val 8000"/>
+            </a:avLst>
+          </a:prstGeom>
+          <a:solidFill>
+            <a:srgbClr val="EEF3F7"/>
+          </a:solidFill>
+          <a:ln>
+            <a:noFill/>
+          </a:ln>
+        </p:spPr>
+        <p:txBody>
+          <a:bodyPr rtlCol="0" anchor="ctr"/>
+          <a:lstStyle/>
+          <a:p>
+            <a:endParaRPr/>
+          </a:p>
+        </p:txBody>
+      </p:sp>
+      <p:sp>
+        <p:nvSpPr>
+          <p:cNvPr id="20" name="Oval 19"/>
+          <p:cNvSpPr/>
+          <p:nvPr/>
+        </p:nvSpPr>
+        <p:spPr>
+          <a:xfrm>
+            <a:off x="6382512" y="3977639"/>
+            <a:ext cx="566928" cy="566928"/>
+          </a:xfrm>
+          <a:prstGeom prst="ellipse">
+            <a:avLst/>
+          </a:prstGeom>
+          <a:solidFill>
+            <a:srgbClr val="1F394D"/>
+          </a:solidFill>
+          <a:ln>
+            <a:noFill/>
+          </a:ln>
+        </p:spPr>
+        <p:txBody>
+          <a:bodyPr lIns="0" tIns="0" rIns="0" bIns="0" rtlCol="0" anchor="ctr"/>
+          <a:lstStyle/>
+          <a:p>
+            <a:pPr algn="ctr"/>
+            <a:r>
+              <a:rPr sz="2000" b="1">
+                <a:solidFill>
+                  <a:srgbClr val="FFFFFF"/>
+                </a:solidFill>
+              </a:rPr>
+              <a:t>4</a:t>
+            </a:r>
+          </a:p>
+        </p:txBody>
+      </p:sp>
+      <p:sp>
+        <p:nvSpPr>
+          <p:cNvPr id="21" name="TextBox 20"/>
+          <p:cNvSpPr txBox="1"/>
+          <p:nvPr/>
+        </p:nvSpPr>
+        <p:spPr>
+          <a:xfrm>
+            <a:off x="7114032" y="3950207"/>
+            <a:ext cx="4023360" cy="640080"/>
+          </a:xfrm>
+          <a:prstGeom prst="rect">
+            <a:avLst/>
+          </a:prstGeom>
+          <a:noFill/>
+        </p:spPr>
+        <p:txBody>
+          <a:bodyPr wrap="square" lIns="0" tIns="0" rIns="0" bIns="0" anchor="ctr">
+            <a:spAutoFit/>
+          </a:bodyPr>
+          <a:lstStyle/>
+          <a:p>
+            <a:pPr algn="l"/>
+            <a:r>
+              <a:rPr sz="2000" b="1" i="0">
+                <a:solidFill>
+                  <a:srgbClr val="1F394D"/>
+                </a:solidFill>
+              </a:rPr>
+              <a:t>Look before you correlate</a:t>
+            </a:r>
+          </a:p>
+        </p:txBody>
+      </p:sp>
+      <p:sp>
+        <p:nvSpPr>
+          <p:cNvPr id="22" name="TextBox 21"/>
+          <p:cNvSpPr txBox="1"/>
+          <p:nvPr/>
+        </p:nvSpPr>
+        <p:spPr>
+          <a:xfrm>
+            <a:off x="7114032" y="4645152"/>
+            <a:ext cx="4023360" cy="1097279"/>
+          </a:xfrm>
+          <a:prstGeom prst="rect">
+            <a:avLst/>
+          </a:prstGeom>
+          <a:noFill/>
+        </p:spPr>
+        <p:txBody>
+          <a:bodyPr wrap="square" lIns="0" tIns="0" rIns="0" bIns="0" anchor="t">
+            <a:spAutoFit/>
+          </a:bodyPr>
+          <a:lstStyle/>
+          <a:p>
+            <a:pPr algn="l"/>
+            <a:r>
+              <a:rPr sz="1700" b="0" i="0">
+                <a:solidFill>
+                  <a:srgbClr val="1F2A33"/>
+                </a:solidFill>
+              </a:rPr>
+              <a:t>r captures straight lines only, and one case can move it a lot.</a:t>
+            </a:r>
+          </a:p>
+        </p:txBody>
+      </p:sp>
     </p:spTree>
-    <p:extLst>
-      <p:ext uri="{BB962C8B-B14F-4D97-AF65-F5344CB8AC3E}">
-        <p14:creationId xmlns:p14="http://schemas.microsoft.com/office/powerpoint/2010/main" val="2858093789"/>
-      </p:ext>
-    </p:extLst>
   </p:cSld>
   <p:clrMapOvr>
     <a:masterClrMapping/>
   </p:clrMapOvr>
-  <mc:AlternateContent xmlns:mc="http://schemas.openxmlformats.org/markup-compatibility/2006" xmlns:p159="http://schemas.microsoft.com/office/powerpoint/2015/09/main">
-    <mc:Choice Requires="p159">
-      <p:transition spd="slow">
-        <p159:morph option="byObject"/>
-      </p:transition>
-    </mc:Choice>
-    <mc:Fallback xmlns="">
-      <p:transition spd="slow">
-        <p:fade/>
-      </p:transition>
-    </mc:Fallback>
-  </mc:AlternateContent>
 </p:sld>
 </file>
 
@@ -52374,6 +56786,571 @@
   <p:clrMapOvr>
     <a:masterClrMapping/>
   </p:clrMapOvr>
+</p:sld>
+</file>
+
+<file path=ppt/slides/slide40.xml><?xml version="1.0" encoding="utf-8"?>
+<p:sld xmlns:a="http://schemas.openxmlformats.org/drawingml/2006/main" xmlns:r="http://schemas.openxmlformats.org/officeDocument/2006/relationships" xmlns:p="http://schemas.openxmlformats.org/presentationml/2006/main">
+  <p:cSld>
+    <p:spTree>
+      <p:nvGrpSpPr>
+        <p:cNvPr id="1" name=""/>
+        <p:cNvGrpSpPr/>
+        <p:nvPr/>
+      </p:nvGrpSpPr>
+      <p:grpSpPr>
+        <a:xfrm>
+          <a:off x="0" y="0"/>
+          <a:ext cx="0" cy="0"/>
+          <a:chOff x="0" y="0"/>
+          <a:chExt cx="0" cy="0"/>
+        </a:xfrm>
+      </p:grpSpPr>
+      <p:sp>
+        <p:nvSpPr>
+          <p:cNvPr id="7" name="Title 6">
+            <a:extLst>
+              <a:ext uri="{FF2B5EF4-FFF2-40B4-BE49-F238E27FC236}">
+                <a16:creationId xmlns:a16="http://schemas.microsoft.com/office/drawing/2014/main" id="{75BCA108-CB1D-5541-DFA5-C4B6F5FB8C65}"/>
+              </a:ext>
+            </a:extLst>
+          </p:cNvPr>
+          <p:cNvSpPr>
+            <a:spLocks noGrp="1"/>
+          </p:cNvSpPr>
+          <p:nvPr>
+            <p:ph type="title"/>
+          </p:nvPr>
+        </p:nvSpPr>
+        <p:spPr>
+          <a:xfrm>
+            <a:off x="465512" y="2761331"/>
+            <a:ext cx="3200400" cy="1198178"/>
+          </a:xfrm>
+        </p:spPr>
+        <p:txBody>
+          <a:bodyPr vert="horz" lIns="91440" tIns="45720" rIns="91440" bIns="45720" rtlCol="0" anchor="b">
+            <a:normAutofit/>
+          </a:bodyPr>
+          <a:lstStyle/>
+          <a:p>
+            <a:r>
+              <a:rPr lang="en-GB" dirty="0"/>
+              <a:t>Assignment Questions</a:t>
+            </a:r>
+          </a:p>
+        </p:txBody>
+      </p:sp>
+      <p:sp>
+        <p:nvSpPr>
+          <p:cNvPr id="2" name="Date Placeholder 1">
+            <a:extLst>
+              <a:ext uri="{FF2B5EF4-FFF2-40B4-BE49-F238E27FC236}">
+                <a16:creationId xmlns:a16="http://schemas.microsoft.com/office/drawing/2014/main" id="{BFF50875-77B6-7B50-6789-FC1B56491CC3}"/>
+              </a:ext>
+            </a:extLst>
+          </p:cNvPr>
+          <p:cNvSpPr>
+            <a:spLocks noGrp="1"/>
+          </p:cNvSpPr>
+          <p:nvPr>
+            <p:ph type="dt" sz="half" idx="10"/>
+          </p:nvPr>
+        </p:nvSpPr>
+        <p:spPr>
+          <a:xfrm>
+            <a:off x="465512" y="6459785"/>
+            <a:ext cx="2618510" cy="365125"/>
+          </a:xfrm>
+        </p:spPr>
+        <p:txBody>
+          <a:bodyPr vert="horz" lIns="91440" tIns="45720" rIns="91440" bIns="45720" rtlCol="0" anchor="ctr">
+            <a:normAutofit/>
+          </a:bodyPr>
+          <a:lstStyle/>
+          <a:p>
+            <a:pPr>
+              <a:spcAft>
+                <a:spcPts val="600"/>
+              </a:spcAft>
+            </a:pPr>
+            <a:fld id="{FA72AB8D-F27B-45C4-A3C3-1397CC759085}" type="datetimeyyyy">
+              <a:rPr lang="en-US" smtClean="0"/>
+              <a:pPr>
+                <a:spcAft>
+                  <a:spcPts val="600"/>
+                </a:spcAft>
+              </a:pPr>
+              <a:t>2026</a:t>
+            </a:fld>
+            <a:endParaRPr lang="en-GB"/>
+          </a:p>
+        </p:txBody>
+      </p:sp>
+      <p:sp>
+        <p:nvSpPr>
+          <p:cNvPr id="5" name="Footer Placeholder 4">
+            <a:extLst>
+              <a:ext uri="{FF2B5EF4-FFF2-40B4-BE49-F238E27FC236}">
+                <a16:creationId xmlns:a16="http://schemas.microsoft.com/office/drawing/2014/main" id="{DE0B2AC9-C062-ACDA-78EB-2E5B2DF3BA3F}"/>
+              </a:ext>
+            </a:extLst>
+          </p:cNvPr>
+          <p:cNvSpPr>
+            <a:spLocks noGrp="1"/>
+          </p:cNvSpPr>
+          <p:nvPr>
+            <p:ph type="ftr" sz="quarter" idx="11"/>
+          </p:nvPr>
+        </p:nvSpPr>
+        <p:spPr>
+          <a:xfrm>
+            <a:off x="4800600" y="6459785"/>
+            <a:ext cx="4648200" cy="365125"/>
+          </a:xfrm>
+        </p:spPr>
+        <p:txBody>
+          <a:bodyPr vert="horz" lIns="91440" tIns="45720" rIns="91440" bIns="45720" rtlCol="0" anchor="ctr">
+            <a:normAutofit/>
+          </a:bodyPr>
+          <a:lstStyle/>
+          <a:p>
+            <a:pPr>
+              <a:spcAft>
+                <a:spcPts val="600"/>
+              </a:spcAft>
+            </a:pPr>
+            <a:r>
+              <a:rPr lang="en-GB" kern="1200" cap="all" baseline="0">
+                <a:latin typeface="+mn-lt"/>
+                <a:ea typeface="+mn-ea"/>
+                <a:cs typeface="+mn-cs"/>
+              </a:rPr>
+              <a:t>Comparisons and Associations</a:t>
+            </a:r>
+          </a:p>
+        </p:txBody>
+      </p:sp>
+      <p:sp>
+        <p:nvSpPr>
+          <p:cNvPr id="6" name="Slide Number Placeholder 5">
+            <a:extLst>
+              <a:ext uri="{FF2B5EF4-FFF2-40B4-BE49-F238E27FC236}">
+                <a16:creationId xmlns:a16="http://schemas.microsoft.com/office/drawing/2014/main" id="{63AA58D7-3FC7-1868-4188-EE9D3329FE70}"/>
+              </a:ext>
+            </a:extLst>
+          </p:cNvPr>
+          <p:cNvSpPr>
+            <a:spLocks noGrp="1"/>
+          </p:cNvSpPr>
+          <p:nvPr>
+            <p:ph type="sldNum" sz="quarter" idx="12"/>
+          </p:nvPr>
+        </p:nvSpPr>
+        <p:spPr>
+          <a:xfrm>
+            <a:off x="9900458" y="6459785"/>
+            <a:ext cx="1312025" cy="365125"/>
+          </a:xfrm>
+        </p:spPr>
+        <p:txBody>
+          <a:bodyPr vert="horz" lIns="91440" tIns="45720" rIns="91440" bIns="45720" rtlCol="0" anchor="ctr">
+            <a:normAutofit/>
+          </a:bodyPr>
+          <a:lstStyle/>
+          <a:p>
+            <a:pPr>
+              <a:spcAft>
+                <a:spcPts val="600"/>
+              </a:spcAft>
+            </a:pPr>
+            <a:fld id="{9FAA51BB-2FC0-4DB8-B50E-F52D50E733B6}" type="slidenum">
+              <a:rPr lang="en-GB" smtClean="0"/>
+              <a:pPr>
+                <a:spcAft>
+                  <a:spcPts val="600"/>
+                </a:spcAft>
+              </a:pPr>
+              <a:t>40</a:t>
+            </a:fld>
+            <a:endParaRPr lang="en-GB"/>
+          </a:p>
+        </p:txBody>
+      </p:sp>
+      <p:graphicFrame>
+        <p:nvGraphicFramePr>
+          <p:cNvPr id="9" name="TextBox 3">
+            <a:extLst>
+              <a:ext uri="{FF2B5EF4-FFF2-40B4-BE49-F238E27FC236}">
+                <a16:creationId xmlns:a16="http://schemas.microsoft.com/office/drawing/2014/main" id="{C99D6C87-9AF3-E3D7-FBAB-D1AACB4C355B}"/>
+              </a:ext>
+            </a:extLst>
+          </p:cNvPr>
+          <p:cNvGraphicFramePr/>
+          <p:nvPr>
+            <p:extLst>
+              <p:ext uri="{D42A27DB-BD31-4B8C-83A1-F6EECF244321}">
+                <p14:modId xmlns:p14="http://schemas.microsoft.com/office/powerpoint/2010/main" val="3184808095"/>
+              </p:ext>
+            </p:extLst>
+          </p:nvPr>
+        </p:nvGraphicFramePr>
+        <p:xfrm>
+          <a:off x="4800600" y="731520"/>
+          <a:ext cx="6492240" cy="5257800"/>
+        </p:xfrm>
+        <a:graphic>
+          <a:graphicData uri="http://schemas.openxmlformats.org/drawingml/2006/diagram">
+            <dgm:relIds xmlns:dgm="http://schemas.openxmlformats.org/drawingml/2006/diagram" xmlns:r="http://schemas.openxmlformats.org/officeDocument/2006/relationships" r:dm="rId3" r:lo="rId4" r:qs="rId5" r:cs="rId6"/>
+          </a:graphicData>
+        </a:graphic>
+      </p:graphicFrame>
+    </p:spTree>
+    <p:extLst>
+      <p:ext uri="{BB962C8B-B14F-4D97-AF65-F5344CB8AC3E}">
+        <p14:creationId xmlns:p14="http://schemas.microsoft.com/office/powerpoint/2010/main" val="1301853266"/>
+      </p:ext>
+    </p:extLst>
+  </p:cSld>
+  <p:clrMapOvr>
+    <a:masterClrMapping/>
+  </p:clrMapOvr>
+  <mc:AlternateContent xmlns:mc="http://schemas.openxmlformats.org/markup-compatibility/2006" xmlns:p159="http://schemas.microsoft.com/office/powerpoint/2015/09/main">
+    <mc:Choice Requires="p159">
+      <p:transition spd="slow">
+        <p159:morph option="byObject"/>
+      </p:transition>
+    </mc:Choice>
+    <mc:Fallback xmlns="">
+      <p:transition spd="slow">
+        <p:fade/>
+      </p:transition>
+    </mc:Fallback>
+  </mc:AlternateContent>
+</p:sld>
+</file>
+
+<file path=ppt/slides/slide41.xml><?xml version="1.0" encoding="utf-8"?>
+<p:sld xmlns:a="http://schemas.openxmlformats.org/drawingml/2006/main" xmlns:r="http://schemas.openxmlformats.org/officeDocument/2006/relationships" xmlns:p="http://schemas.openxmlformats.org/presentationml/2006/main">
+  <p:cSld>
+    <p:spTree>
+      <p:nvGrpSpPr>
+        <p:cNvPr id="1" name=""/>
+        <p:cNvGrpSpPr/>
+        <p:nvPr/>
+      </p:nvGrpSpPr>
+      <p:grpSpPr>
+        <a:xfrm>
+          <a:off x="0" y="0"/>
+          <a:ext cx="0" cy="0"/>
+          <a:chOff x="0" y="0"/>
+          <a:chExt cx="0" cy="0"/>
+        </a:xfrm>
+      </p:grpSpPr>
+      <p:sp>
+        <p:nvSpPr>
+          <p:cNvPr id="7" name="Title 6">
+            <a:extLst>
+              <a:ext uri="{FF2B5EF4-FFF2-40B4-BE49-F238E27FC236}">
+                <a16:creationId xmlns:a16="http://schemas.microsoft.com/office/drawing/2014/main" id="{FF2CBA3A-E59C-1E5C-37CA-CD0F1E185ED5}"/>
+              </a:ext>
+            </a:extLst>
+          </p:cNvPr>
+          <p:cNvSpPr>
+            <a:spLocks noGrp="1"/>
+          </p:cNvSpPr>
+          <p:nvPr>
+            <p:ph type="title"/>
+          </p:nvPr>
+        </p:nvSpPr>
+        <p:spPr/>
+        <p:txBody>
+          <a:bodyPr/>
+          <a:lstStyle/>
+          <a:p>
+            <a:r>
+              <a:rPr lang="en-GB" dirty="0"/>
+              <a:t>Workshop</a:t>
+            </a:r>
+          </a:p>
+        </p:txBody>
+      </p:sp>
+      <p:sp>
+        <p:nvSpPr>
+          <p:cNvPr id="8" name="Text Placeholder 7">
+            <a:extLst>
+              <a:ext uri="{FF2B5EF4-FFF2-40B4-BE49-F238E27FC236}">
+                <a16:creationId xmlns:a16="http://schemas.microsoft.com/office/drawing/2014/main" id="{636F7FD2-53FA-4A51-9681-6FC5C8960063}"/>
+              </a:ext>
+            </a:extLst>
+          </p:cNvPr>
+          <p:cNvSpPr>
+            <a:spLocks noGrp="1"/>
+          </p:cNvSpPr>
+          <p:nvPr>
+            <p:ph type="body" sz="half" idx="2"/>
+          </p:nvPr>
+        </p:nvSpPr>
+        <p:spPr/>
+        <p:txBody>
+          <a:bodyPr/>
+          <a:lstStyle/>
+          <a:p>
+            <a:r>
+              <a:rPr lang="en-GB"/>
+              <a:t>3-</a:t>
+            </a:r>
+            <a:r>
+              <a:rPr lang="en-GB" dirty="0" err="1"/>
+              <a:t>5pm</a:t>
+            </a:r>
+            <a:endParaRPr lang="en-GB" dirty="0"/>
+          </a:p>
+        </p:txBody>
+      </p:sp>
+      <p:sp>
+        <p:nvSpPr>
+          <p:cNvPr id="4" name="Date Placeholder 3">
+            <a:extLst>
+              <a:ext uri="{FF2B5EF4-FFF2-40B4-BE49-F238E27FC236}">
+                <a16:creationId xmlns:a16="http://schemas.microsoft.com/office/drawing/2014/main" id="{7452334B-2A42-251C-845C-1CED233665F2}"/>
+              </a:ext>
+            </a:extLst>
+          </p:cNvPr>
+          <p:cNvSpPr>
+            <a:spLocks noGrp="1"/>
+          </p:cNvSpPr>
+          <p:nvPr>
+            <p:ph type="dt" sz="half" idx="10"/>
+          </p:nvPr>
+        </p:nvSpPr>
+        <p:spPr/>
+        <p:txBody>
+          <a:bodyPr/>
+          <a:lstStyle/>
+          <a:p>
+            <a:fld id="{DCDB07DE-4FD6-4257-A590-7FE39EB05791}" type="datetimeyyyy">
+              <a:rPr lang="en-US" smtClean="0"/>
+              <a:t>2026</a:t>
+            </a:fld>
+            <a:endParaRPr lang="en-GB"/>
+          </a:p>
+        </p:txBody>
+      </p:sp>
+      <p:sp>
+        <p:nvSpPr>
+          <p:cNvPr id="5" name="Footer Placeholder 4">
+            <a:extLst>
+              <a:ext uri="{FF2B5EF4-FFF2-40B4-BE49-F238E27FC236}">
+                <a16:creationId xmlns:a16="http://schemas.microsoft.com/office/drawing/2014/main" id="{E7848055-4F62-3048-C4D2-554FF0041ADC}"/>
+              </a:ext>
+            </a:extLst>
+          </p:cNvPr>
+          <p:cNvSpPr>
+            <a:spLocks noGrp="1"/>
+          </p:cNvSpPr>
+          <p:nvPr>
+            <p:ph type="ftr" sz="quarter" idx="11"/>
+          </p:nvPr>
+        </p:nvSpPr>
+        <p:spPr/>
+        <p:txBody>
+          <a:bodyPr/>
+          <a:lstStyle/>
+          <a:p>
+            <a:r>
+              <a:rPr lang="en-GB"/>
+              <a:t>Comparisons and Associations</a:t>
+            </a:r>
+            <a:endParaRPr lang="en-GB" dirty="0"/>
+          </a:p>
+        </p:txBody>
+      </p:sp>
+      <p:sp>
+        <p:nvSpPr>
+          <p:cNvPr id="6" name="Slide Number Placeholder 5">
+            <a:extLst>
+              <a:ext uri="{FF2B5EF4-FFF2-40B4-BE49-F238E27FC236}">
+                <a16:creationId xmlns:a16="http://schemas.microsoft.com/office/drawing/2014/main" id="{70535960-24E1-CFDC-22DF-A828C2B2C10E}"/>
+              </a:ext>
+            </a:extLst>
+          </p:cNvPr>
+          <p:cNvSpPr>
+            <a:spLocks noGrp="1"/>
+          </p:cNvSpPr>
+          <p:nvPr>
+            <p:ph type="sldNum" sz="quarter" idx="12"/>
+          </p:nvPr>
+        </p:nvSpPr>
+        <p:spPr/>
+        <p:txBody>
+          <a:bodyPr/>
+          <a:lstStyle/>
+          <a:p>
+            <a:fld id="{9FAA51BB-2FC0-4DB8-B50E-F52D50E733B6}" type="slidenum">
+              <a:rPr lang="en-GB" smtClean="0"/>
+              <a:pPr/>
+              <a:t>41</a:t>
+            </a:fld>
+            <a:endParaRPr lang="en-GB" dirty="0"/>
+          </a:p>
+        </p:txBody>
+      </p:sp>
+    </p:spTree>
+    <p:extLst>
+      <p:ext uri="{BB962C8B-B14F-4D97-AF65-F5344CB8AC3E}">
+        <p14:creationId xmlns:p14="http://schemas.microsoft.com/office/powerpoint/2010/main" val="253129452"/>
+      </p:ext>
+    </p:extLst>
+  </p:cSld>
+  <p:clrMapOvr>
+    <a:masterClrMapping/>
+  </p:clrMapOvr>
+  <mc:AlternateContent xmlns:mc="http://schemas.openxmlformats.org/markup-compatibility/2006" xmlns:p159="http://schemas.microsoft.com/office/powerpoint/2015/09/main">
+    <mc:Choice Requires="p159">
+      <p:transition spd="slow">
+        <p159:morph option="byObject"/>
+      </p:transition>
+    </mc:Choice>
+    <mc:Fallback xmlns="">
+      <p:transition spd="slow">
+        <p:fade/>
+      </p:transition>
+    </mc:Fallback>
+  </mc:AlternateContent>
+</p:sld>
+</file>
+
+<file path=ppt/slides/slide42.xml><?xml version="1.0" encoding="utf-8"?>
+<p:sld xmlns:a="http://schemas.openxmlformats.org/drawingml/2006/main" xmlns:r="http://schemas.openxmlformats.org/officeDocument/2006/relationships" xmlns:p="http://schemas.openxmlformats.org/presentationml/2006/main">
+  <p:cSld>
+    <p:spTree>
+      <p:nvGrpSpPr>
+        <p:cNvPr id="1" name=""/>
+        <p:cNvGrpSpPr/>
+        <p:nvPr/>
+      </p:nvGrpSpPr>
+      <p:grpSpPr>
+        <a:xfrm>
+          <a:off x="0" y="0"/>
+          <a:ext cx="0" cy="0"/>
+          <a:chOff x="0" y="0"/>
+          <a:chExt cx="0" cy="0"/>
+        </a:xfrm>
+      </p:grpSpPr>
+      <p:sp>
+        <p:nvSpPr>
+          <p:cNvPr id="2" name="Date Placeholder 1">
+            <a:extLst>
+              <a:ext uri="{FF2B5EF4-FFF2-40B4-BE49-F238E27FC236}">
+                <a16:creationId xmlns:a16="http://schemas.microsoft.com/office/drawing/2014/main" id="{4AAE4DB1-6B08-6AEB-B597-8064268FD9C5}"/>
+              </a:ext>
+            </a:extLst>
+          </p:cNvPr>
+          <p:cNvSpPr>
+            <a:spLocks noGrp="1"/>
+          </p:cNvSpPr>
+          <p:nvPr>
+            <p:ph type="dt" sz="half" idx="10"/>
+          </p:nvPr>
+        </p:nvSpPr>
+        <p:spPr/>
+        <p:txBody>
+          <a:bodyPr/>
+          <a:lstStyle/>
+          <a:p>
+            <a:fld id="{F093E5A9-8248-448D-B582-A60BAB2205BC}" type="datetimeyyyy">
+              <a:rPr lang="en-US" smtClean="0"/>
+              <a:t>2026</a:t>
+            </a:fld>
+            <a:endParaRPr lang="en-GB"/>
+          </a:p>
+        </p:txBody>
+      </p:sp>
+      <p:sp>
+        <p:nvSpPr>
+          <p:cNvPr id="3" name="Footer Placeholder 2">
+            <a:extLst>
+              <a:ext uri="{FF2B5EF4-FFF2-40B4-BE49-F238E27FC236}">
+                <a16:creationId xmlns:a16="http://schemas.microsoft.com/office/drawing/2014/main" id="{D6F2723A-2C1C-2AB6-3420-9BD762F766DF}"/>
+              </a:ext>
+            </a:extLst>
+          </p:cNvPr>
+          <p:cNvSpPr>
+            <a:spLocks noGrp="1"/>
+          </p:cNvSpPr>
+          <p:nvPr>
+            <p:ph type="ftr" sz="quarter" idx="11"/>
+          </p:nvPr>
+        </p:nvSpPr>
+        <p:spPr/>
+        <p:txBody>
+          <a:bodyPr/>
+          <a:lstStyle/>
+          <a:p>
+            <a:r>
+              <a:rPr lang="en-GB"/>
+              <a:t>Comparisons and Associations</a:t>
+            </a:r>
+          </a:p>
+        </p:txBody>
+      </p:sp>
+      <p:sp>
+        <p:nvSpPr>
+          <p:cNvPr id="4" name="Slide Number Placeholder 3">
+            <a:extLst>
+              <a:ext uri="{FF2B5EF4-FFF2-40B4-BE49-F238E27FC236}">
+                <a16:creationId xmlns:a16="http://schemas.microsoft.com/office/drawing/2014/main" id="{E9AFD3A0-9074-636F-30B6-C6C650C3F58D}"/>
+              </a:ext>
+            </a:extLst>
+          </p:cNvPr>
+          <p:cNvSpPr>
+            <a:spLocks noGrp="1"/>
+          </p:cNvSpPr>
+          <p:nvPr>
+            <p:ph type="sldNum" sz="quarter" idx="12"/>
+          </p:nvPr>
+        </p:nvSpPr>
+        <p:spPr>
+          <a:xfrm>
+            <a:off x="9900458" y="6459785"/>
+            <a:ext cx="1312025" cy="365125"/>
+          </a:xfrm>
+        </p:spPr>
+        <p:txBody>
+          <a:bodyPr/>
+          <a:lstStyle/>
+          <a:p>
+            <a:fld id="{9FAA51BB-2FC0-4DB8-B50E-F52D50E733B6}" type="slidenum">
+              <a:rPr lang="en-GB" smtClean="0"/>
+              <a:t>42</a:t>
+            </a:fld>
+            <a:endParaRPr lang="en-GB"/>
+          </a:p>
+        </p:txBody>
+      </p:sp>
+    </p:spTree>
+    <p:extLst>
+      <p:ext uri="{BB962C8B-B14F-4D97-AF65-F5344CB8AC3E}">
+        <p14:creationId xmlns:p14="http://schemas.microsoft.com/office/powerpoint/2010/main" val="2858093789"/>
+      </p:ext>
+    </p:extLst>
+  </p:cSld>
+  <p:clrMapOvr>
+    <a:masterClrMapping/>
+  </p:clrMapOvr>
+  <mc:AlternateContent xmlns:mc="http://schemas.openxmlformats.org/markup-compatibility/2006" xmlns:p159="http://schemas.microsoft.com/office/powerpoint/2015/09/main">
+    <mc:Choice Requires="p159">
+      <p:transition spd="slow">
+        <p159:morph option="byObject"/>
+      </p:transition>
+    </mc:Choice>
+    <mc:Fallback xmlns="">
+      <p:transition spd="slow">
+        <p:fade/>
+      </p:transition>
+    </mc:Fallback>
+  </mc:AlternateContent>
 </p:sld>
 </file>
 
